--- a/10-Knowledge-Products/KP1-GEA/videos/module_1/en/decks/KP1_M1_1.7_Deck_v0.2.pptx
+++ b/10-Knowledge-Products/KP1-GEA/videos/module_1/en/decks/KP1_M1_1.7_Deck_v0.2.pptx
@@ -14,17 +14,17 @@
     <p:handoutMasterId r:id="rId47"/>
   </p:handoutMasterIdLst>
   <p:sldIdLst>
-    <p:sldId id="2681" r:id="rId8"/>
-    <p:sldId id="2736" r:id="rId58"/>
-    <p:sldId id="2737" r:id="rId59"/>
-    <p:sldId id="2738" r:id="rId60"/>
-    <p:sldId id="2739" r:id="rId61"/>
-    <p:sldId id="2740" r:id="rId62"/>
-    <p:sldId id="2741" r:id="rId63"/>
     <p:sldId id="2742" r:id="rId64"/>
     <p:sldId id="2743" r:id="rId65"/>
     <p:sldId id="2744" r:id="rId66"/>
     <p:sldId id="2745" r:id="rId67"/>
+    <p:sldId id="2746" r:id="rId68"/>
+    <p:sldId id="2747" r:id="rId69"/>
+    <p:sldId id="2748" r:id="rId70"/>
+    <p:sldId id="2749" r:id="rId71"/>
+    <p:sldId id="2750" r:id="rId72"/>
+    <p:sldId id="2751" r:id="rId73"/>
+    <p:sldId id="2752" r:id="rId74"/>
   </p:sldIdLst>
   <p:sldSz cx="12192000" cy="6858000"/>
   <p:notesSz cx="6858000" cy="9144000"/>
@@ -891,502 +891,6 @@
 </p:notesMaster>
 </file>
 
-<file path=ppt/notesSlides/notesSlide21.xml><?xml version="1.0" encoding="utf-8"?>
-<p:notes xmlns:a="http://schemas.openxmlformats.org/drawingml/2006/main" xmlns:p="http://schemas.openxmlformats.org/presentationml/2006/main" xmlns:r="http://schemas.openxmlformats.org/officeDocument/2006/relationships">
-  <p:cSld>
-    <p:spTree>
-      <p:nvGrpSpPr>
-        <p:cNvPr id="1" name=""/>
-        <p:cNvGrpSpPr/>
-        <p:nvPr/>
-      </p:nvGrpSpPr>
-      <p:grpSpPr>
-        <a:xfrm>
-          <a:off x="0" y="0"/>
-          <a:ext cx="0" cy="0"/>
-          <a:chOff x="0" y="0"/>
-          <a:chExt cx="0" cy="0"/>
-        </a:xfrm>
-      </p:grpSpPr>
-      <p:sp>
-        <p:nvSpPr>
-          <p:cNvPr id="2" name="Slide Image Placeholder 1"/>
-          <p:cNvSpPr>
-            <a:spLocks noGrp="1"/>
-          </p:cNvSpPr>
-          <p:nvPr>
-            <p:ph type="sldImg" idx="2"/>
-          </p:nvPr>
-        </p:nvSpPr>
-        <p:spPr/>
-      </p:sp>
-      <p:sp>
-        <p:nvSpPr>
-          <p:cNvPr id="3" name="Notes Placeholder 2"/>
-          <p:cNvSpPr>
-            <a:spLocks noGrp="1"/>
-          </p:cNvSpPr>
-          <p:nvPr>
-            <p:ph type="body" idx="3" sz="quarter"/>
-          </p:nvPr>
-        </p:nvSpPr>
-        <p:spPr/>
-        <p:txBody>
-          <a:bodyPr/>
-          <a:lstStyle/>
-          <a:p>
-            <a:r>
-              <a:t>Title card for standalone video 1.7. Content slides are identical to the corresponding section of the combined deck KP1_M1_Deck_v0.2.pptx; voice-over is in each slide’s notes.</a:t>
-            </a:r>
-          </a:p>
-        </p:txBody>
-      </p:sp>
-      <p:sp>
-        <p:nvSpPr>
-          <p:cNvPr id="4" name="Slide Number Placeholder 3"/>
-          <p:cNvSpPr>
-            <a:spLocks noGrp="1"/>
-          </p:cNvSpPr>
-          <p:nvPr>
-            <p:ph type="sldNum" idx="5" sz="quarter"/>
-          </p:nvPr>
-        </p:nvSpPr>
-        <p:spPr/>
-      </p:sp>
-    </p:spTree>
-  </p:cSld>
-  <p:clrMapOvr>
-    <a:masterClrMapping/>
-  </p:clrMapOvr>
-</p:notes>
-</file>
-
-<file path=ppt/notesSlides/notesSlide43.xml><?xml version="1.0" encoding="utf-8"?>
-<p:notes xmlns:a="http://schemas.openxmlformats.org/drawingml/2006/main" xmlns:p="http://schemas.openxmlformats.org/presentationml/2006/main" xmlns:r="http://schemas.openxmlformats.org/officeDocument/2006/relationships">
-  <p:cSld>
-    <p:spTree>
-      <p:nvGrpSpPr>
-        <p:cNvPr id="1" name=""/>
-        <p:cNvGrpSpPr/>
-        <p:nvPr/>
-      </p:nvGrpSpPr>
-      <p:grpSpPr>
-        <a:xfrm>
-          <a:off x="0" y="0"/>
-          <a:ext cx="0" cy="0"/>
-          <a:chOff x="0" y="0"/>
-          <a:chExt cx="0" cy="0"/>
-        </a:xfrm>
-      </p:grpSpPr>
-      <p:sp>
-        <p:nvSpPr>
-          <p:cNvPr id="2" name="Slide Image Placeholder 1"/>
-          <p:cNvSpPr>
-            <a:spLocks noGrp="1"/>
-          </p:cNvSpPr>
-          <p:nvPr>
-            <p:ph type="sldImg" idx="2"/>
-          </p:nvPr>
-        </p:nvSpPr>
-        <p:spPr/>
-      </p:sp>
-      <p:sp>
-        <p:nvSpPr>
-          <p:cNvPr id="3" name="Notes Placeholder 2"/>
-          <p:cNvSpPr>
-            <a:spLocks noGrp="1"/>
-          </p:cNvSpPr>
-          <p:nvPr>
-            <p:ph type="body" idx="3" sz="quarter"/>
-          </p:nvPr>
-        </p:nvSpPr>
-        <p:spPr/>
-        <p:txBody>
-          <a:bodyPr/>
-          <a:lstStyle/>
-          <a:p>
-            <a:r>
-              <a:t>VO, slide 1: Suppose you have made the case and your minister is convinced. Now the harder part: agreeing the four specific things the minister must commit to. Each one is necessary; without any one of them the EA programme will struggle.</a:t>
-            </a:r>
-          </a:p>
-        </p:txBody>
-      </p:sp>
-      <p:sp>
-        <p:nvSpPr>
-          <p:cNvPr id="4" name="Slide Number Placeholder 3"/>
-          <p:cNvSpPr>
-            <a:spLocks noGrp="1"/>
-          </p:cNvSpPr>
-          <p:nvPr>
-            <p:ph type="sldNum" idx="5" sz="quarter"/>
-          </p:nvPr>
-        </p:nvSpPr>
-        <p:spPr/>
-      </p:sp>
-    </p:spTree>
-  </p:cSld>
-  <p:clrMapOvr>
-    <a:masterClrMapping/>
-  </p:clrMapOvr>
-</p:notes>
-</file>
-
-<file path=ppt/notesSlides/notesSlide44.xml><?xml version="1.0" encoding="utf-8"?>
-<p:notes xmlns:a="http://schemas.openxmlformats.org/drawingml/2006/main" xmlns:p="http://schemas.openxmlformats.org/presentationml/2006/main" xmlns:r="http://schemas.openxmlformats.org/officeDocument/2006/relationships">
-  <p:cSld>
-    <p:spTree>
-      <p:nvGrpSpPr>
-        <p:cNvPr id="1" name=""/>
-        <p:cNvGrpSpPr/>
-        <p:nvPr/>
-      </p:nvGrpSpPr>
-      <p:grpSpPr>
-        <a:xfrm>
-          <a:off x="0" y="0"/>
-          <a:ext cx="0" cy="0"/>
-          <a:chOff x="0" y="0"/>
-          <a:chExt cx="0" cy="0"/>
-        </a:xfrm>
-      </p:grpSpPr>
-      <p:sp>
-        <p:nvSpPr>
-          <p:cNvPr id="2" name="Slide Image Placeholder 1"/>
-          <p:cNvSpPr>
-            <a:spLocks noGrp="1"/>
-          </p:cNvSpPr>
-          <p:nvPr>
-            <p:ph type="sldImg" idx="2"/>
-          </p:nvPr>
-        </p:nvSpPr>
-        <p:spPr/>
-      </p:sp>
-      <p:sp>
-        <p:nvSpPr>
-          <p:cNvPr id="3" name="Notes Placeholder 2"/>
-          <p:cNvSpPr>
-            <a:spLocks noGrp="1"/>
-          </p:cNvSpPr>
-          <p:nvPr>
-            <p:ph type="body" idx="3" sz="quarter"/>
-          </p:nvPr>
-        </p:nvSpPr>
-        <p:spPr/>
-        <p:txBody>
-          <a:bodyPr/>
-          <a:lstStyle/>
-          <a:p>
-            <a:r>
-              <a:t>VO: First ask. A small permanent EA team. Two to four senior architects. Permanent. Reporting to your CDO or its equivalent. Not project consultants who arrive and leave. Not a temporary unit. The institutional home of architecture work in your country. Tell your minister: this team will exist whether or not any single programme is running. That is the point. It is your country's permanent muscle for cross-cutting digital decisions.</a:t>
-            </a:r>
-          </a:p>
-        </p:txBody>
-      </p:sp>
-      <p:sp>
-        <p:nvSpPr>
-          <p:cNvPr id="4" name="Slide Number Placeholder 3"/>
-          <p:cNvSpPr>
-            <a:spLocks noGrp="1"/>
-          </p:cNvSpPr>
-          <p:nvPr>
-            <p:ph type="sldNum" idx="5" sz="quarter"/>
-          </p:nvPr>
-        </p:nvSpPr>
-        <p:spPr/>
-      </p:sp>
-    </p:spTree>
-  </p:cSld>
-  <p:clrMapOvr>
-    <a:masterClrMapping/>
-  </p:clrMapOvr>
-</p:notes>
-</file>
-
-<file path=ppt/notesSlides/notesSlide45.xml><?xml version="1.0" encoding="utf-8"?>
-<p:notes xmlns:a="http://schemas.openxmlformats.org/drawingml/2006/main" xmlns:p="http://schemas.openxmlformats.org/presentationml/2006/main" xmlns:r="http://schemas.openxmlformats.org/officeDocument/2006/relationships">
-  <p:cSld>
-    <p:spTree>
-      <p:nvGrpSpPr>
-        <p:cNvPr id="1" name=""/>
-        <p:cNvGrpSpPr/>
-        <p:nvPr/>
-      </p:nvGrpSpPr>
-      <p:grpSpPr>
-        <a:xfrm>
-          <a:off x="0" y="0"/>
-          <a:ext cx="0" cy="0"/>
-          <a:chOff x="0" y="0"/>
-          <a:chExt cx="0" cy="0"/>
-        </a:xfrm>
-      </p:grpSpPr>
-      <p:sp>
-        <p:nvSpPr>
-          <p:cNvPr id="2" name="Slide Image Placeholder 1"/>
-          <p:cNvSpPr>
-            <a:spLocks noGrp="1"/>
-          </p:cNvSpPr>
-          <p:nvPr>
-            <p:ph type="sldImg" idx="2"/>
-          </p:nvPr>
-        </p:nvSpPr>
-        <p:spPr/>
-      </p:sp>
-      <p:sp>
-        <p:nvSpPr>
-          <p:cNvPr id="3" name="Notes Placeholder 2"/>
-          <p:cNvSpPr>
-            <a:spLocks noGrp="1"/>
-          </p:cNvSpPr>
-          <p:nvPr>
-            <p:ph type="body" idx="3" sz="quarter"/>
-          </p:nvPr>
-        </p:nvSpPr>
-        <p:spPr/>
-        <p:txBody>
-          <a:bodyPr/>
-          <a:lstStyle/>
-          <a:p>
-            <a:r>
-              <a:t>VO: Second ask. An EA Board with real authority. Chaired by your CDO, or by the minister directly. Members: sector ministry CIOs, owners of the major state registers, and where useful an external advisor. Cadence: quarterly meetings, with ad-hoc sessions for urgent decisions. The hardest part: the mandate must be binding, not advisory. Without binding authority the EA becomes documentation nobody reads; with it, the EA becomes the place every digital decision passes through.</a:t>
-            </a:r>
-          </a:p>
-        </p:txBody>
-      </p:sp>
-      <p:sp>
-        <p:nvSpPr>
-          <p:cNvPr id="4" name="Slide Number Placeholder 3"/>
-          <p:cNvSpPr>
-            <a:spLocks noGrp="1"/>
-          </p:cNvSpPr>
-          <p:nvPr>
-            <p:ph type="sldNum" idx="5" sz="quarter"/>
-          </p:nvPr>
-        </p:nvSpPr>
-        <p:spPr/>
-      </p:sp>
-    </p:spTree>
-  </p:cSld>
-  <p:clrMapOvr>
-    <a:masterClrMapping/>
-  </p:clrMapOvr>
-</p:notes>
-</file>
-
-<file path=ppt/notesSlides/notesSlide46.xml><?xml version="1.0" encoding="utf-8"?>
-<p:notes xmlns:a="http://schemas.openxmlformats.org/drawingml/2006/main" xmlns:p="http://schemas.openxmlformats.org/presentationml/2006/main" xmlns:r="http://schemas.openxmlformats.org/officeDocument/2006/relationships">
-  <p:cSld>
-    <p:spTree>
-      <p:nvGrpSpPr>
-        <p:cNvPr id="1" name=""/>
-        <p:cNvGrpSpPr/>
-        <p:nvPr/>
-      </p:nvGrpSpPr>
-      <p:grpSpPr>
-        <a:xfrm>
-          <a:off x="0" y="0"/>
-          <a:ext cx="0" cy="0"/>
-          <a:chOff x="0" y="0"/>
-          <a:chExt cx="0" cy="0"/>
-        </a:xfrm>
-      </p:grpSpPr>
-      <p:sp>
-        <p:nvSpPr>
-          <p:cNvPr id="2" name="Slide Image Placeholder 1"/>
-          <p:cNvSpPr>
-            <a:spLocks noGrp="1"/>
-          </p:cNvSpPr>
-          <p:nvPr>
-            <p:ph type="sldImg" idx="2"/>
-          </p:nvPr>
-        </p:nvSpPr>
-        <p:spPr/>
-      </p:sp>
-      <p:sp>
-        <p:nvSpPr>
-          <p:cNvPr id="3" name="Notes Placeholder 2"/>
-          <p:cNvSpPr>
-            <a:spLocks noGrp="1"/>
-          </p:cNvSpPr>
-          <p:nvPr>
-            <p:ph type="body" idx="3" sz="quarter"/>
-          </p:nvPr>
-        </p:nvSpPr>
-        <p:spPr/>
-        <p:txBody>
-          <a:bodyPr/>
-          <a:lstStyle/>
-          <a:p>
-            <a:r>
-              <a:t>VO: Third ask. A sustained budget envelope. Three parts: the initial six-month engagement that runs the first four phases, about ten to fifteen senior person-months; the permanent practice, your two to four architects; and the governance overhead of Board time and occasional external review. As a share of your digital-government budget the whole thing is typically about two per cent. What you want is a five-year envelope, not an annual line that disappears when ministerial priorities shift.</a:t>
-            </a:r>
-          </a:p>
-        </p:txBody>
-      </p:sp>
-      <p:sp>
-        <p:nvSpPr>
-          <p:cNvPr id="4" name="Slide Number Placeholder 3"/>
-          <p:cNvSpPr>
-            <a:spLocks noGrp="1"/>
-          </p:cNvSpPr>
-          <p:nvPr>
-            <p:ph type="sldNum" idx="5" sz="quarter"/>
-          </p:nvPr>
-        </p:nvSpPr>
-        <p:spPr/>
-      </p:sp>
-    </p:spTree>
-  </p:cSld>
-  <p:clrMapOvr>
-    <a:masterClrMapping/>
-  </p:clrMapOvr>
-</p:notes>
-</file>
-
-<file path=ppt/notesSlides/notesSlide47.xml><?xml version="1.0" encoding="utf-8"?>
-<p:notes xmlns:a="http://schemas.openxmlformats.org/drawingml/2006/main" xmlns:p="http://schemas.openxmlformats.org/presentationml/2006/main" xmlns:r="http://schemas.openxmlformats.org/officeDocument/2006/relationships">
-  <p:cSld>
-    <p:spTree>
-      <p:nvGrpSpPr>
-        <p:cNvPr id="1" name=""/>
-        <p:cNvGrpSpPr/>
-        <p:nvPr/>
-      </p:nvGrpSpPr>
-      <p:grpSpPr>
-        <a:xfrm>
-          <a:off x="0" y="0"/>
-          <a:ext cx="0" cy="0"/>
-          <a:chOff x="0" y="0"/>
-          <a:chExt cx="0" cy="0"/>
-        </a:xfrm>
-      </p:grpSpPr>
-      <p:sp>
-        <p:nvSpPr>
-          <p:cNvPr id="2" name="Slide Image Placeholder 1"/>
-          <p:cNvSpPr>
-            <a:spLocks noGrp="1"/>
-          </p:cNvSpPr>
-          <p:nvPr>
-            <p:ph type="sldImg" idx="2"/>
-          </p:nvPr>
-        </p:nvSpPr>
-        <p:spPr/>
-      </p:sp>
-      <p:sp>
-        <p:nvSpPr>
-          <p:cNvPr id="3" name="Notes Placeholder 2"/>
-          <p:cNvSpPr>
-            <a:spLocks noGrp="1"/>
-          </p:cNvSpPr>
-          <p:nvPr>
-            <p:ph type="body" idx="3" sz="quarter"/>
-          </p:nvPr>
-        </p:nvSpPr>
-        <p:spPr/>
-        <p:txBody>
-          <a:bodyPr/>
-          <a:lstStyle/>
-          <a:p>
-            <a:r>
-              <a:t>VO: Fourth ask. One promise. The EA team will not be pulled onto the urgent project of the week. Not by you. Not by the minister. Not by anyone in cabinet. Get this in writing if you can. The most common way EA programmes quietly die is in their second year, when the team is moved onto a flagship delivery and the architecture work stops. The promise to protect the team must be explicit, must be visible, and must be recommitted whenever the minister changes.</a:t>
-            </a:r>
-          </a:p>
-          <a:p/>
-          <a:p>
-            <a:r>
-              <a:t>This is the emotional peak of video 1.7 — the one slide in the module with a full-colour block.</a:t>
-            </a:r>
-          </a:p>
-        </p:txBody>
-      </p:sp>
-      <p:sp>
-        <p:nvSpPr>
-          <p:cNvPr id="4" name="Slide Number Placeholder 3"/>
-          <p:cNvSpPr>
-            <a:spLocks noGrp="1"/>
-          </p:cNvSpPr>
-          <p:nvPr>
-            <p:ph type="sldNum" idx="5" sz="quarter"/>
-          </p:nvPr>
-        </p:nvSpPr>
-        <p:spPr/>
-      </p:sp>
-    </p:spTree>
-  </p:cSld>
-  <p:clrMapOvr>
-    <a:masterClrMapping/>
-  </p:clrMapOvr>
-</p:notes>
-</file>
-
-<file path=ppt/notesSlides/notesSlide48.xml><?xml version="1.0" encoding="utf-8"?>
-<p:notes xmlns:a="http://schemas.openxmlformats.org/drawingml/2006/main" xmlns:p="http://schemas.openxmlformats.org/presentationml/2006/main" xmlns:r="http://schemas.openxmlformats.org/officeDocument/2006/relationships">
-  <p:cSld>
-    <p:spTree>
-      <p:nvGrpSpPr>
-        <p:cNvPr id="1" name=""/>
-        <p:cNvGrpSpPr/>
-        <p:nvPr/>
-      </p:nvGrpSpPr>
-      <p:grpSpPr>
-        <a:xfrm>
-          <a:off x="0" y="0"/>
-          <a:ext cx="0" cy="0"/>
-          <a:chOff x="0" y="0"/>
-          <a:chExt cx="0" cy="0"/>
-        </a:xfrm>
-      </p:grpSpPr>
-      <p:sp>
-        <p:nvSpPr>
-          <p:cNvPr id="2" name="Slide Image Placeholder 1"/>
-          <p:cNvSpPr>
-            <a:spLocks noGrp="1"/>
-          </p:cNvSpPr>
-          <p:nvPr>
-            <p:ph type="sldImg" idx="2"/>
-          </p:nvPr>
-        </p:nvSpPr>
-        <p:spPr/>
-      </p:sp>
-      <p:sp>
-        <p:nvSpPr>
-          <p:cNvPr id="3" name="Notes Placeholder 2"/>
-          <p:cNvSpPr>
-            <a:spLocks noGrp="1"/>
-          </p:cNvSpPr>
-          <p:nvPr>
-            <p:ph type="body" idx="3" sz="quarter"/>
-          </p:nvPr>
-        </p:nvSpPr>
-        <p:spPr/>
-        <p:txBody>
-          <a:bodyPr/>
-          <a:lstStyle/>
-          <a:p>
-            <a:r>
-              <a:t>VO: And one note on time horizon, put honestly. Six months to an approved roadmap. Eighteen to twenty-four months to a fully operating practice. Five years to mature governance. The minister who launches this work will not be the one who completes it — and a minister who hears that as a feature is the right one to commission it.</a:t>
-            </a:r>
-          </a:p>
-        </p:txBody>
-      </p:sp>
-      <p:sp>
-        <p:nvSpPr>
-          <p:cNvPr id="4" name="Slide Number Placeholder 3"/>
-          <p:cNvSpPr>
-            <a:spLocks noGrp="1"/>
-          </p:cNvSpPr>
-          <p:nvPr>
-            <p:ph type="sldNum" idx="5" sz="quarter"/>
-          </p:nvPr>
-        </p:nvSpPr>
-        <p:spPr/>
-      </p:sp>
-    </p:spTree>
-  </p:cSld>
-  <p:clrMapOvr>
-    <a:masterClrMapping/>
-  </p:clrMapOvr>
-</p:notes>
-</file>
-
 <file path=ppt/notesSlides/notesSlide49.xml><?xml version="1.0" encoding="utf-8"?>
 <p:notes xmlns:a="http://schemas.openxmlformats.org/drawingml/2006/main" xmlns:p="http://schemas.openxmlformats.org/presentationml/2006/main" xmlns:r="http://schemas.openxmlformats.org/officeDocument/2006/relationships">
   <p:cSld>
@@ -1432,13 +936,7 @@
           <a:lstStyle/>
           <a:p>
             <a:r>
-              <a:t>Honesty about Kenya's contested experience is a feature of this example, not a defect.</a:t>
-            </a:r>
-          </a:p>
-          <a:p/>
-          <a:p>
-            <a:r>
-              <a:t>VO: One more thing to take into the meeting. Four very different governments have already made these commitments. Rwanda, small with a strong centre, one citizen-services platform and a national identity linked across services. Kenya, with one-stop centres and an identity programme whose results are mixed and openly debated. South Africa, federal, coordinating through a central agency and shared standards rather than imposing them. And Estonia, mature, with distributed registries and the once-only principle.</a:t>
+              <a:t>Title card — the cold open. The hosts name the module, the video number, the title and the single message on this slide; no scripted narration. Hold until the opener begins; the opener is narrated on the next slide.</a:t>
             </a:r>
           </a:p>
         </p:txBody>
@@ -1508,7 +1006,7 @@
           <a:lstStyle/>
           <a:p>
             <a:r>
-              <a:t>VO: Four contexts, one pattern. A small central team with real authority. A published framework other agencies adopt. Binding governance rather than advisory. And a multi-year horizon with results visible inside months. Different sizes, different constitutions, the same four elements — which are the four asks, in four real governments.</a:t>
+              <a:t>VO: Suppose you have made the case and your minister is convinced. Now the harder part: agreeing the four specific things the minister must commit to. Each one is necessary; without any one of them the EA programme will struggle.</a:t>
             </a:r>
           </a:p>
         </p:txBody>
@@ -1578,13 +1076,7 @@
           <a:lstStyle/>
           <a:p>
             <a:r>
-              <a:t>PRACTICE BOX (on-screen only — never read it, never paraphrase it, never point at it). It replaces the narrated handoff: this video ends on the recap and the Sources slide.</a:t>
-            </a:r>
-          </a:p>
-          <a:p/>
-          <a:p>
-            <a:r>
-              <a:t>VO: Four asks. A team. A Board. A budget envelope. A promise. Put them on a single page and ask for all four together — not in pieces. With all four committed, you have what you need.</a:t>
+              <a:t>VO: First ask. A small permanent EA team. Two to four senior architects. Permanent. Reporting to your CDO or its equivalent. Not project consultants who arrive and leave. Not a temporary unit. The institutional home of architecture work in your country. Tell your minister: this team will exist whether or not any single programme is running. That is the point. It is your country's permanent muscle for cross-cutting digital decisions.</a:t>
             </a:r>
           </a:p>
         </p:txBody>
@@ -1610,6 +1102,514 @@
 </file>
 
 <file path=ppt/notesSlides/notesSlide52.xml><?xml version="1.0" encoding="utf-8"?>
+<p:notes xmlns:a="http://schemas.openxmlformats.org/drawingml/2006/main" xmlns:p="http://schemas.openxmlformats.org/presentationml/2006/main" xmlns:r="http://schemas.openxmlformats.org/officeDocument/2006/relationships">
+  <p:cSld>
+    <p:spTree>
+      <p:nvGrpSpPr>
+        <p:cNvPr id="1" name=""/>
+        <p:cNvGrpSpPr/>
+        <p:nvPr/>
+      </p:nvGrpSpPr>
+      <p:grpSpPr>
+        <a:xfrm>
+          <a:off x="0" y="0"/>
+          <a:ext cx="0" cy="0"/>
+          <a:chOff x="0" y="0"/>
+          <a:chExt cx="0" cy="0"/>
+        </a:xfrm>
+      </p:grpSpPr>
+      <p:sp>
+        <p:nvSpPr>
+          <p:cNvPr id="2" name="Slide Image Placeholder 1"/>
+          <p:cNvSpPr>
+            <a:spLocks noGrp="1"/>
+          </p:cNvSpPr>
+          <p:nvPr>
+            <p:ph type="sldImg" idx="2"/>
+          </p:nvPr>
+        </p:nvSpPr>
+        <p:spPr/>
+      </p:sp>
+      <p:sp>
+        <p:nvSpPr>
+          <p:cNvPr id="3" name="Notes Placeholder 2"/>
+          <p:cNvSpPr>
+            <a:spLocks noGrp="1"/>
+          </p:cNvSpPr>
+          <p:nvPr>
+            <p:ph type="body" idx="3" sz="quarter"/>
+          </p:nvPr>
+        </p:nvSpPr>
+        <p:spPr/>
+        <p:txBody>
+          <a:bodyPr/>
+          <a:lstStyle/>
+          <a:p>
+            <a:r>
+              <a:t>VO: Second ask. An EA Board with real authority. Chaired by your CDO, or by the minister directly. Members: sector ministry CIOs, owners of the major state registers, and where useful an external advisor. Cadence: quarterly meetings, with ad-hoc sessions for urgent decisions. The hardest part: the mandate must be binding, not advisory. Without binding authority the EA becomes documentation nobody reads; with it, the EA becomes the place every digital decision passes through.</a:t>
+            </a:r>
+          </a:p>
+        </p:txBody>
+      </p:sp>
+      <p:sp>
+        <p:nvSpPr>
+          <p:cNvPr id="4" name="Slide Number Placeholder 3"/>
+          <p:cNvSpPr>
+            <a:spLocks noGrp="1"/>
+          </p:cNvSpPr>
+          <p:nvPr>
+            <p:ph type="sldNum" idx="5" sz="quarter"/>
+          </p:nvPr>
+        </p:nvSpPr>
+        <p:spPr/>
+      </p:sp>
+    </p:spTree>
+  </p:cSld>
+  <p:clrMapOvr>
+    <a:masterClrMapping/>
+  </p:clrMapOvr>
+</p:notes>
+</file>
+
+<file path=ppt/notesSlides/notesSlide53.xml><?xml version="1.0" encoding="utf-8"?>
+<p:notes xmlns:a="http://schemas.openxmlformats.org/drawingml/2006/main" xmlns:p="http://schemas.openxmlformats.org/presentationml/2006/main" xmlns:r="http://schemas.openxmlformats.org/officeDocument/2006/relationships">
+  <p:cSld>
+    <p:spTree>
+      <p:nvGrpSpPr>
+        <p:cNvPr id="1" name=""/>
+        <p:cNvGrpSpPr/>
+        <p:nvPr/>
+      </p:nvGrpSpPr>
+      <p:grpSpPr>
+        <a:xfrm>
+          <a:off x="0" y="0"/>
+          <a:ext cx="0" cy="0"/>
+          <a:chOff x="0" y="0"/>
+          <a:chExt cx="0" cy="0"/>
+        </a:xfrm>
+      </p:grpSpPr>
+      <p:sp>
+        <p:nvSpPr>
+          <p:cNvPr id="2" name="Slide Image Placeholder 1"/>
+          <p:cNvSpPr>
+            <a:spLocks noGrp="1"/>
+          </p:cNvSpPr>
+          <p:nvPr>
+            <p:ph type="sldImg" idx="2"/>
+          </p:nvPr>
+        </p:nvSpPr>
+        <p:spPr/>
+      </p:sp>
+      <p:sp>
+        <p:nvSpPr>
+          <p:cNvPr id="3" name="Notes Placeholder 2"/>
+          <p:cNvSpPr>
+            <a:spLocks noGrp="1"/>
+          </p:cNvSpPr>
+          <p:nvPr>
+            <p:ph type="body" idx="3" sz="quarter"/>
+          </p:nvPr>
+        </p:nvSpPr>
+        <p:spPr/>
+        <p:txBody>
+          <a:bodyPr/>
+          <a:lstStyle/>
+          <a:p>
+            <a:r>
+              <a:t>VO: Third ask. A sustained budget envelope. Three parts: the initial six-month engagement that runs the first four phases, about ten to fifteen senior person-months; the permanent practice, your two to four architects; and the governance overhead of Board time and occasional external review. As a share of your digital-government budget the whole thing is typically about two per cent. What you want is a five-year envelope, not an annual line that disappears when ministerial priorities shift.</a:t>
+            </a:r>
+          </a:p>
+        </p:txBody>
+      </p:sp>
+      <p:sp>
+        <p:nvSpPr>
+          <p:cNvPr id="4" name="Slide Number Placeholder 3"/>
+          <p:cNvSpPr>
+            <a:spLocks noGrp="1"/>
+          </p:cNvSpPr>
+          <p:nvPr>
+            <p:ph type="sldNum" idx="5" sz="quarter"/>
+          </p:nvPr>
+        </p:nvSpPr>
+        <p:spPr/>
+      </p:sp>
+    </p:spTree>
+  </p:cSld>
+  <p:clrMapOvr>
+    <a:masterClrMapping/>
+  </p:clrMapOvr>
+</p:notes>
+</file>
+
+<file path=ppt/notesSlides/notesSlide54.xml><?xml version="1.0" encoding="utf-8"?>
+<p:notes xmlns:a="http://schemas.openxmlformats.org/drawingml/2006/main" xmlns:p="http://schemas.openxmlformats.org/presentationml/2006/main" xmlns:r="http://schemas.openxmlformats.org/officeDocument/2006/relationships">
+  <p:cSld>
+    <p:spTree>
+      <p:nvGrpSpPr>
+        <p:cNvPr id="1" name=""/>
+        <p:cNvGrpSpPr/>
+        <p:nvPr/>
+      </p:nvGrpSpPr>
+      <p:grpSpPr>
+        <a:xfrm>
+          <a:off x="0" y="0"/>
+          <a:ext cx="0" cy="0"/>
+          <a:chOff x="0" y="0"/>
+          <a:chExt cx="0" cy="0"/>
+        </a:xfrm>
+      </p:grpSpPr>
+      <p:sp>
+        <p:nvSpPr>
+          <p:cNvPr id="2" name="Slide Image Placeholder 1"/>
+          <p:cNvSpPr>
+            <a:spLocks noGrp="1"/>
+          </p:cNvSpPr>
+          <p:nvPr>
+            <p:ph type="sldImg" idx="2"/>
+          </p:nvPr>
+        </p:nvSpPr>
+        <p:spPr/>
+      </p:sp>
+      <p:sp>
+        <p:nvSpPr>
+          <p:cNvPr id="3" name="Notes Placeholder 2"/>
+          <p:cNvSpPr>
+            <a:spLocks noGrp="1"/>
+          </p:cNvSpPr>
+          <p:nvPr>
+            <p:ph type="body" idx="3" sz="quarter"/>
+          </p:nvPr>
+        </p:nvSpPr>
+        <p:spPr/>
+        <p:txBody>
+          <a:bodyPr/>
+          <a:lstStyle/>
+          <a:p>
+            <a:r>
+              <a:t>VO: Fourth ask. One promise. The EA team will not be pulled onto the urgent project of the week. Not by you. Not by the minister. Not by anyone in cabinet. Get this in writing if you can. The most common way EA programmes quietly die is in their second year, when the team is moved onto a flagship delivery and the architecture work stops. The promise to protect the team must be explicit, must be visible, and must be recommitted whenever the minister changes.</a:t>
+            </a:r>
+          </a:p>
+          <a:p/>
+          <a:p>
+            <a:r>
+              <a:t>This is the emotional peak of video 1.7 — the one slide in the module with a full-colour block.</a:t>
+            </a:r>
+          </a:p>
+        </p:txBody>
+      </p:sp>
+      <p:sp>
+        <p:nvSpPr>
+          <p:cNvPr id="4" name="Slide Number Placeholder 3"/>
+          <p:cNvSpPr>
+            <a:spLocks noGrp="1"/>
+          </p:cNvSpPr>
+          <p:nvPr>
+            <p:ph type="sldNum" idx="5" sz="quarter"/>
+          </p:nvPr>
+        </p:nvSpPr>
+        <p:spPr/>
+      </p:sp>
+    </p:spTree>
+  </p:cSld>
+  <p:clrMapOvr>
+    <a:masterClrMapping/>
+  </p:clrMapOvr>
+</p:notes>
+</file>
+
+<file path=ppt/notesSlides/notesSlide55.xml><?xml version="1.0" encoding="utf-8"?>
+<p:notes xmlns:a="http://schemas.openxmlformats.org/drawingml/2006/main" xmlns:p="http://schemas.openxmlformats.org/presentationml/2006/main" xmlns:r="http://schemas.openxmlformats.org/officeDocument/2006/relationships">
+  <p:cSld>
+    <p:spTree>
+      <p:nvGrpSpPr>
+        <p:cNvPr id="1" name=""/>
+        <p:cNvGrpSpPr/>
+        <p:nvPr/>
+      </p:nvGrpSpPr>
+      <p:grpSpPr>
+        <a:xfrm>
+          <a:off x="0" y="0"/>
+          <a:ext cx="0" cy="0"/>
+          <a:chOff x="0" y="0"/>
+          <a:chExt cx="0" cy="0"/>
+        </a:xfrm>
+      </p:grpSpPr>
+      <p:sp>
+        <p:nvSpPr>
+          <p:cNvPr id="2" name="Slide Image Placeholder 1"/>
+          <p:cNvSpPr>
+            <a:spLocks noGrp="1"/>
+          </p:cNvSpPr>
+          <p:nvPr>
+            <p:ph type="sldImg" idx="2"/>
+          </p:nvPr>
+        </p:nvSpPr>
+        <p:spPr/>
+      </p:sp>
+      <p:sp>
+        <p:nvSpPr>
+          <p:cNvPr id="3" name="Notes Placeholder 2"/>
+          <p:cNvSpPr>
+            <a:spLocks noGrp="1"/>
+          </p:cNvSpPr>
+          <p:nvPr>
+            <p:ph type="body" idx="3" sz="quarter"/>
+          </p:nvPr>
+        </p:nvSpPr>
+        <p:spPr/>
+        <p:txBody>
+          <a:bodyPr/>
+          <a:lstStyle/>
+          <a:p>
+            <a:r>
+              <a:t>VO: And one note on time horizon, put honestly. Six months to an approved roadmap. Eighteen to twenty-four months to a fully operating practice. Five years to mature governance. The minister who launches this work will not be the one who completes it — and a minister who hears that as a feature is the right one to commission it.</a:t>
+            </a:r>
+          </a:p>
+        </p:txBody>
+      </p:sp>
+      <p:sp>
+        <p:nvSpPr>
+          <p:cNvPr id="4" name="Slide Number Placeholder 3"/>
+          <p:cNvSpPr>
+            <a:spLocks noGrp="1"/>
+          </p:cNvSpPr>
+          <p:nvPr>
+            <p:ph type="sldNum" idx="5" sz="quarter"/>
+          </p:nvPr>
+        </p:nvSpPr>
+        <p:spPr/>
+      </p:sp>
+    </p:spTree>
+  </p:cSld>
+  <p:clrMapOvr>
+    <a:masterClrMapping/>
+  </p:clrMapOvr>
+</p:notes>
+</file>
+
+<file path=ppt/notesSlides/notesSlide56.xml><?xml version="1.0" encoding="utf-8"?>
+<p:notes xmlns:a="http://schemas.openxmlformats.org/drawingml/2006/main" xmlns:p="http://schemas.openxmlformats.org/presentationml/2006/main" xmlns:r="http://schemas.openxmlformats.org/officeDocument/2006/relationships">
+  <p:cSld>
+    <p:spTree>
+      <p:nvGrpSpPr>
+        <p:cNvPr id="1" name=""/>
+        <p:cNvGrpSpPr/>
+        <p:nvPr/>
+      </p:nvGrpSpPr>
+      <p:grpSpPr>
+        <a:xfrm>
+          <a:off x="0" y="0"/>
+          <a:ext cx="0" cy="0"/>
+          <a:chOff x="0" y="0"/>
+          <a:chExt cx="0" cy="0"/>
+        </a:xfrm>
+      </p:grpSpPr>
+      <p:sp>
+        <p:nvSpPr>
+          <p:cNvPr id="2" name="Slide Image Placeholder 1"/>
+          <p:cNvSpPr>
+            <a:spLocks noGrp="1"/>
+          </p:cNvSpPr>
+          <p:nvPr>
+            <p:ph type="sldImg" idx="2"/>
+          </p:nvPr>
+        </p:nvSpPr>
+        <p:spPr/>
+      </p:sp>
+      <p:sp>
+        <p:nvSpPr>
+          <p:cNvPr id="3" name="Notes Placeholder 2"/>
+          <p:cNvSpPr>
+            <a:spLocks noGrp="1"/>
+          </p:cNvSpPr>
+          <p:nvPr>
+            <p:ph type="body" idx="3" sz="quarter"/>
+          </p:nvPr>
+        </p:nvSpPr>
+        <p:spPr/>
+        <p:txBody>
+          <a:bodyPr/>
+          <a:lstStyle/>
+          <a:p>
+            <a:r>
+              <a:t>Honesty about Kenya's contested experience is a feature of this example, not a defect.</a:t>
+            </a:r>
+          </a:p>
+          <a:p/>
+          <a:p>
+            <a:r>
+              <a:t>VO: One more thing to take into the meeting. Four very different governments have already made these commitments. Rwanda, small with a strong centre, one citizen-services platform and a national identity linked across services. Kenya, with one-stop centres and an identity programme whose results are mixed and openly debated. South Africa, federal, coordinating through a central agency and shared standards rather than imposing them. And Estonia, mature, with distributed registries and the once-only principle.</a:t>
+            </a:r>
+          </a:p>
+        </p:txBody>
+      </p:sp>
+      <p:sp>
+        <p:nvSpPr>
+          <p:cNvPr id="4" name="Slide Number Placeholder 3"/>
+          <p:cNvSpPr>
+            <a:spLocks noGrp="1"/>
+          </p:cNvSpPr>
+          <p:nvPr>
+            <p:ph type="sldNum" idx="5" sz="quarter"/>
+          </p:nvPr>
+        </p:nvSpPr>
+        <p:spPr/>
+      </p:sp>
+    </p:spTree>
+  </p:cSld>
+  <p:clrMapOvr>
+    <a:masterClrMapping/>
+  </p:clrMapOvr>
+</p:notes>
+</file>
+
+<file path=ppt/notesSlides/notesSlide57.xml><?xml version="1.0" encoding="utf-8"?>
+<p:notes xmlns:a="http://schemas.openxmlformats.org/drawingml/2006/main" xmlns:p="http://schemas.openxmlformats.org/presentationml/2006/main" xmlns:r="http://schemas.openxmlformats.org/officeDocument/2006/relationships">
+  <p:cSld>
+    <p:spTree>
+      <p:nvGrpSpPr>
+        <p:cNvPr id="1" name=""/>
+        <p:cNvGrpSpPr/>
+        <p:nvPr/>
+      </p:nvGrpSpPr>
+      <p:grpSpPr>
+        <a:xfrm>
+          <a:off x="0" y="0"/>
+          <a:ext cx="0" cy="0"/>
+          <a:chOff x="0" y="0"/>
+          <a:chExt cx="0" cy="0"/>
+        </a:xfrm>
+      </p:grpSpPr>
+      <p:sp>
+        <p:nvSpPr>
+          <p:cNvPr id="2" name="Slide Image Placeholder 1"/>
+          <p:cNvSpPr>
+            <a:spLocks noGrp="1"/>
+          </p:cNvSpPr>
+          <p:nvPr>
+            <p:ph type="sldImg" idx="2"/>
+          </p:nvPr>
+        </p:nvSpPr>
+        <p:spPr/>
+      </p:sp>
+      <p:sp>
+        <p:nvSpPr>
+          <p:cNvPr id="3" name="Notes Placeholder 2"/>
+          <p:cNvSpPr>
+            <a:spLocks noGrp="1"/>
+          </p:cNvSpPr>
+          <p:nvPr>
+            <p:ph type="body" idx="3" sz="quarter"/>
+          </p:nvPr>
+        </p:nvSpPr>
+        <p:spPr/>
+        <p:txBody>
+          <a:bodyPr/>
+          <a:lstStyle/>
+          <a:p>
+            <a:r>
+              <a:t>VO: Four contexts, one pattern. A small central team with real authority. A published framework other agencies adopt. Binding governance rather than advisory. And a multi-year horizon with results visible inside months. Different sizes, different constitutions, the same four elements — which are the four asks, in four real governments.</a:t>
+            </a:r>
+          </a:p>
+        </p:txBody>
+      </p:sp>
+      <p:sp>
+        <p:nvSpPr>
+          <p:cNvPr id="4" name="Slide Number Placeholder 3"/>
+          <p:cNvSpPr>
+            <a:spLocks noGrp="1"/>
+          </p:cNvSpPr>
+          <p:nvPr>
+            <p:ph type="sldNum" idx="5" sz="quarter"/>
+          </p:nvPr>
+        </p:nvSpPr>
+        <p:spPr/>
+      </p:sp>
+    </p:spTree>
+  </p:cSld>
+  <p:clrMapOvr>
+    <a:masterClrMapping/>
+  </p:clrMapOvr>
+</p:notes>
+</file>
+
+<file path=ppt/notesSlides/notesSlide58.xml><?xml version="1.0" encoding="utf-8"?>
+<p:notes xmlns:a="http://schemas.openxmlformats.org/drawingml/2006/main" xmlns:p="http://schemas.openxmlformats.org/presentationml/2006/main" xmlns:r="http://schemas.openxmlformats.org/officeDocument/2006/relationships">
+  <p:cSld>
+    <p:spTree>
+      <p:nvGrpSpPr>
+        <p:cNvPr id="1" name=""/>
+        <p:cNvGrpSpPr/>
+        <p:nvPr/>
+      </p:nvGrpSpPr>
+      <p:grpSpPr>
+        <a:xfrm>
+          <a:off x="0" y="0"/>
+          <a:ext cx="0" cy="0"/>
+          <a:chOff x="0" y="0"/>
+          <a:chExt cx="0" cy="0"/>
+        </a:xfrm>
+      </p:grpSpPr>
+      <p:sp>
+        <p:nvSpPr>
+          <p:cNvPr id="2" name="Slide Image Placeholder 1"/>
+          <p:cNvSpPr>
+            <a:spLocks noGrp="1"/>
+          </p:cNvSpPr>
+          <p:nvPr>
+            <p:ph type="sldImg" idx="2"/>
+          </p:nvPr>
+        </p:nvSpPr>
+        <p:spPr/>
+      </p:sp>
+      <p:sp>
+        <p:nvSpPr>
+          <p:cNvPr id="3" name="Notes Placeholder 2"/>
+          <p:cNvSpPr>
+            <a:spLocks noGrp="1"/>
+          </p:cNvSpPr>
+          <p:nvPr>
+            <p:ph type="body" idx="3" sz="quarter"/>
+          </p:nvPr>
+        </p:nvSpPr>
+        <p:spPr/>
+        <p:txBody>
+          <a:bodyPr/>
+          <a:lstStyle/>
+          <a:p>
+            <a:r>
+              <a:t>PRACTICE BOX (on-screen only — never read it, never paraphrase it, never point at it). It replaces the narrated handoff: this video ends on the recap and the Sources slide.</a:t>
+            </a:r>
+          </a:p>
+          <a:p/>
+          <a:p>
+            <a:r>
+              <a:t>VO: Four asks. A team. A Board. A budget envelope. A promise. Put them on a single page and ask for all four together — not in pieces. With all four committed, you have what you need.</a:t>
+            </a:r>
+          </a:p>
+        </p:txBody>
+      </p:sp>
+      <p:sp>
+        <p:nvSpPr>
+          <p:cNvPr id="4" name="Slide Number Placeholder 3"/>
+          <p:cNvSpPr>
+            <a:spLocks noGrp="1"/>
+          </p:cNvSpPr>
+          <p:nvPr>
+            <p:ph type="sldNum" idx="5" sz="quarter"/>
+          </p:nvPr>
+        </p:nvSpPr>
+        <p:spPr/>
+      </p:sp>
+    </p:spTree>
+  </p:cSld>
+  <p:clrMapOvr>
+    <a:masterClrMapping/>
+  </p:clrMapOvr>
+</p:notes>
+</file>
+
+<file path=ppt/notesSlides/notesSlide59.xml><?xml version="1.0" encoding="utf-8"?>
 <p:notes xmlns:a="http://schemas.openxmlformats.org/drawingml/2006/main" xmlns:p="http://schemas.openxmlformats.org/presentationml/2006/main" xmlns:r="http://schemas.openxmlformats.org/officeDocument/2006/relationships">
   <p:cSld>
     <p:spTree>
@@ -11815,3012 +11815,6 @@
 </p:sldMaster>
 </file>
 
-<file path=ppt/slides/slide1.xml><?xml version="1.0" encoding="utf-8"?>
-<p:sld xmlns:a="http://schemas.openxmlformats.org/drawingml/2006/main" xmlns:r="http://schemas.openxmlformats.org/officeDocument/2006/relationships" xmlns:p="http://schemas.openxmlformats.org/presentationml/2006/main">
-  <p:cSld>
-    <p:spTree>
-      <p:nvGrpSpPr>
-        <p:cNvPr id="1" name=""/>
-        <p:cNvGrpSpPr/>
-        <p:nvPr/>
-      </p:nvGrpSpPr>
-      <p:grpSpPr>
-        <a:xfrm>
-          <a:off x="0" y="0"/>
-          <a:ext cx="0" cy="0"/>
-          <a:chOff x="0" y="0"/>
-          <a:chExt cx="0" cy="0"/>
-        </a:xfrm>
-      </p:grpSpPr>
-      <p:cxnSp>
-        <p:nvCxnSpPr>
-          <p:cNvPr id="11" name="Straight Connector 10">
-            <a:extLst>
-              <a:ext uri="{FF2B5EF4-FFF2-40B4-BE49-F238E27FC236}">
-                <a16:creationId xmlns:a16="http://schemas.microsoft.com/office/drawing/2014/main" id="{D9AD66F2-F7C0-4D03-9150-D28F17AC561D}"/>
-              </a:ext>
-            </a:extLst>
-          </p:cNvPr>
-          <p:cNvCxnSpPr>
-            <a:cxnSpLocks/>
-          </p:cNvCxnSpPr>
-          <p:nvPr/>
-        </p:nvCxnSpPr>
-        <p:spPr>
-          <a:xfrm>
-            <a:off x="373021" y="2198718"/>
-            <a:ext cx="6843567" cy="0"/>
-          </a:xfrm>
-          <a:prstGeom prst="line">
-            <a:avLst/>
-          </a:prstGeom>
-          <a:ln w="12700">
-            <a:solidFill>
-              <a:srgbClr val="009CD6"/>
-            </a:solidFill>
-          </a:ln>
-        </p:spPr>
-        <p:style>
-          <a:lnRef idx="1">
-            <a:schemeClr val="accent1"/>
-          </a:lnRef>
-          <a:fillRef idx="0">
-            <a:schemeClr val="accent1"/>
-          </a:fillRef>
-          <a:effectRef idx="0">
-            <a:schemeClr val="accent1"/>
-          </a:effectRef>
-          <a:fontRef idx="minor">
-            <a:schemeClr val="tx1"/>
-          </a:fontRef>
-        </p:style>
-      </p:cxnSp>
-      <p:sp>
-        <p:nvSpPr>
-          <p:cNvPr id="12" name="Title 9">
-            <a:extLst>
-              <a:ext uri="{FF2B5EF4-FFF2-40B4-BE49-F238E27FC236}">
-                <a16:creationId xmlns:a16="http://schemas.microsoft.com/office/drawing/2014/main" id="{EEB08032-CE0E-4986-AEDF-A41026C0E8B9}"/>
-              </a:ext>
-            </a:extLst>
-          </p:cNvPr>
-          <p:cNvSpPr txBox="1">
-            <a:spLocks/>
-          </p:cNvSpPr>
-          <p:nvPr/>
-        </p:nvSpPr>
-        <p:spPr>
-          <a:xfrm>
-            <a:off x="237734" y="702833"/>
-            <a:ext cx="6432007" cy="1218817"/>
-          </a:xfrm>
-          <a:prstGeom prst="rect">
-            <a:avLst/>
-          </a:prstGeom>
-        </p:spPr>
-        <p:txBody>
-          <a:bodyPr anchor="b" wrap="square">
-            <a:noAutofit/>
-          </a:bodyPr>
-          <a:lstStyle>
-            <a:lvl1pPr algn="l" defTabSz="914400" rtl="0" eaLnBrk="1" latinLnBrk="0" hangingPunct="1">
-              <a:lnSpc>
-                <a:spcPct val="90000"/>
-              </a:lnSpc>
-              <a:spcBef>
-                <a:spcPct val="0"/>
-              </a:spcBef>
-              <a:buNone/>
-              <a:defRPr sz="4000" kern="1200">
-                <a:solidFill>
-                  <a:schemeClr val="bg1"/>
-                </a:solidFill>
-                <a:latin typeface="Arial" panose="020B0604020202020204" pitchFamily="34" charset="0"/>
-                <a:ea typeface="+mj-ea"/>
-                <a:cs typeface="Arial" panose="020B0604020202020204" pitchFamily="34" charset="0"/>
-              </a:defRPr>
-            </a:lvl1pPr>
-          </a:lstStyle>
-          <a:p>
-            <a:r>
-              <a:rPr sz="2800" b="1" i="0">
-                <a:solidFill>
-                  <a:srgbClr val="1A1A1A"/>
-                </a:solidFill>
-                <a:latin typeface="Arial"/>
-              </a:rPr>
-              <a:t>1.7 — What you will need from your minister</a:t>
-            </a:r>
-          </a:p>
-        </p:txBody>
-      </p:sp>
-      <p:pic>
-        <p:nvPicPr>
-          <p:cNvPr id="7" name="Picture 6">
-            <a:extLst>
-              <a:ext uri="{FF2B5EF4-FFF2-40B4-BE49-F238E27FC236}">
-                <a16:creationId xmlns:a16="http://schemas.microsoft.com/office/drawing/2014/main" id="{A2066351-C569-4C4C-A096-308777FCDC32}"/>
-              </a:ext>
-            </a:extLst>
-          </p:cNvPr>
-          <p:cNvPicPr>
-            <a:picLocks noChangeAspect="1"/>
-          </p:cNvPicPr>
-          <p:nvPr/>
-        </p:nvPicPr>
-        <p:blipFill>
-          <a:blip r:embed="rId2">
-            <a:extLst>
-              <a:ext uri="{28A0092B-C50C-407E-A947-70E740481C1C}">
-                <a14:useLocalDpi xmlns:a14="http://schemas.microsoft.com/office/drawing/2010/main" val="0"/>
-              </a:ext>
-            </a:extLst>
-          </a:blip>
-          <a:srcRect t="20219" b="14729"/>
-          <a:stretch>
-            <a:fillRect/>
-          </a:stretch>
-        </p:blipFill>
-        <p:spPr>
-          <a:xfrm>
-            <a:off x="0" y="5620871"/>
-            <a:ext cx="1323975" cy="1218816"/>
-          </a:xfrm>
-          <a:prstGeom prst="rect">
-            <a:avLst/>
-          </a:prstGeom>
-        </p:spPr>
-      </p:pic>
-      <p:sp>
-        <p:nvSpPr>
-          <p:cNvPr id="14" name="Title 9">
-            <a:extLst>
-              <a:ext uri="{FF2B5EF4-FFF2-40B4-BE49-F238E27FC236}">
-                <a16:creationId xmlns:a16="http://schemas.microsoft.com/office/drawing/2014/main" id="{B5087B80-3EE4-1881-0130-ED58CA625092}"/>
-              </a:ext>
-            </a:extLst>
-          </p:cNvPr>
-          <p:cNvSpPr txBox="1">
-            <a:spLocks/>
-          </p:cNvSpPr>
-          <p:nvPr/>
-        </p:nvSpPr>
-        <p:spPr>
-          <a:xfrm>
-            <a:off x="284452" y="2475786"/>
-            <a:ext cx="6382893" cy="953213"/>
-          </a:xfrm>
-          <a:prstGeom prst="rect">
-            <a:avLst/>
-          </a:prstGeom>
-        </p:spPr>
-        <p:txBody>
-          <a:bodyPr anchor="t" wrap="square">
-            <a:noAutofit/>
-          </a:bodyPr>
-          <a:lstStyle>
-            <a:lvl1pPr algn="l" defTabSz="914400" rtl="0" eaLnBrk="1" latinLnBrk="0" hangingPunct="1">
-              <a:lnSpc>
-                <a:spcPct val="90000"/>
-              </a:lnSpc>
-              <a:spcBef>
-                <a:spcPct val="0"/>
-              </a:spcBef>
-              <a:buNone/>
-              <a:defRPr sz="4000" kern="1200">
-                <a:solidFill>
-                  <a:schemeClr val="bg1"/>
-                </a:solidFill>
-                <a:latin typeface="Arial" panose="020B0604020202020204" pitchFamily="34" charset="0"/>
-                <a:ea typeface="+mj-ea"/>
-                <a:cs typeface="Arial" panose="020B0604020202020204" pitchFamily="34" charset="0"/>
-              </a:defRPr>
-            </a:lvl1pPr>
-          </a:lstStyle>
-          <a:p>
-            <a:pPr marL="0" marR="0" lvl="0" indent="0" rtl="0">
-              <a:spcBef>
-                <a:spcPts val="600"/>
-              </a:spcBef>
-              <a:spcAft>
-                <a:spcPts val="600"/>
-              </a:spcAft>
-              <a:buNone/>
-            </a:pPr>
-            <a:r>
-              <a:rPr sz="1300" b="1" i="0">
-                <a:solidFill>
-                  <a:srgbClr val="006E96"/>
-                </a:solidFill>
-                <a:latin typeface="Arial"/>
-              </a:rPr>
-              <a:t>KP1 · Government Enterprise Architecture · Module 1 · Video 1.7</a:t>
-            </a:r>
-          </a:p>
-          <a:p>
-            <a:r>
-              <a:rPr sz="1200" b="0" i="1">
-                <a:solidFill>
-                  <a:srgbClr val="595959"/>
-                </a:solidFill>
-                <a:latin typeface="Arial"/>
-              </a:rPr>
-              <a:t>Four asks. A small permanent EA team. An EA Board with real authority. About two per cent of digital budget, sustained for five years. And one promise — that the team will not be pulled onto the urgent project of the week.</a:t>
-            </a:r>
-          </a:p>
-        </p:txBody>
-      </p:sp>
-      <p:sp>
-        <p:nvSpPr>
-          <p:cNvPr id="17" name="Title 9">
-            <a:extLst>
-              <a:ext uri="{FF2B5EF4-FFF2-40B4-BE49-F238E27FC236}">
-                <a16:creationId xmlns:a16="http://schemas.microsoft.com/office/drawing/2014/main" id="{5E8796F7-DD26-D250-5E97-B38B22298E72}"/>
-              </a:ext>
-            </a:extLst>
-          </p:cNvPr>
-          <p:cNvSpPr txBox="1">
-            <a:spLocks/>
-          </p:cNvSpPr>
-          <p:nvPr/>
-        </p:nvSpPr>
-        <p:spPr>
-          <a:xfrm>
-            <a:off x="284452" y="4363897"/>
-            <a:ext cx="6382893" cy="953213"/>
-          </a:xfrm>
-          <a:prstGeom prst="rect">
-            <a:avLst/>
-          </a:prstGeom>
-        </p:spPr>
-        <p:txBody>
-          <a:bodyPr anchor="t" wrap="square">
-            <a:noAutofit/>
-          </a:bodyPr>
-          <a:lstStyle>
-            <a:lvl1pPr algn="l" defTabSz="914400" rtl="0" eaLnBrk="1" latinLnBrk="0" hangingPunct="1">
-              <a:lnSpc>
-                <a:spcPct val="90000"/>
-              </a:lnSpc>
-              <a:spcBef>
-                <a:spcPct val="0"/>
-              </a:spcBef>
-              <a:buNone/>
-              <a:defRPr sz="4000" kern="1200">
-                <a:solidFill>
-                  <a:schemeClr val="bg1"/>
-                </a:solidFill>
-                <a:latin typeface="Arial" panose="020B0604020202020204" pitchFamily="34" charset="0"/>
-                <a:ea typeface="+mj-ea"/>
-                <a:cs typeface="Arial" panose="020B0604020202020204" pitchFamily="34" charset="0"/>
-              </a:defRPr>
-            </a:lvl1pPr>
-          </a:lstStyle>
-          <a:p>
-            <a:pPr marL="0" marR="0" lvl="0" indent="0" rtl="0">
-              <a:spcBef>
-                <a:spcPts val="600"/>
-              </a:spcBef>
-              <a:spcAft>
-                <a:spcPts val="400"/>
-              </a:spcAft>
-              <a:buNone/>
-            </a:pPr>
-            <a:r>
-              <a:rPr sz="1400" b="1" i="0">
-                <a:solidFill>
-                  <a:srgbClr val="1A1A1A"/>
-                </a:solidFill>
-                <a:latin typeface="Arial"/>
-              </a:rPr>
-              <a:t>Target audience: </a:t>
-            </a:r>
-            <a:r>
-              <a:rPr sz="1400" b="0" i="0">
-                <a:solidFill>
-                  <a:srgbClr val="1A1A1A"/>
-                </a:solidFill>
-                <a:latin typeface="Arial"/>
-              </a:rPr>
-              <a:t>CDO · Director-General · sector minister</a:t>
-            </a:r>
-          </a:p>
-        </p:txBody>
-      </p:sp>
-      <p:sp>
-        <p:nvSpPr>
-          <p:cNvPr id="18" name="Rectangle 17"/>
-          <p:cNvSpPr/>
-          <p:nvPr/>
-        </p:nvSpPr>
-        <p:spPr>
-          <a:xfrm>
-            <a:off x="7022592" y="0"/>
-            <a:ext cx="5169103" cy="6858000"/>
-          </a:xfrm>
-          <a:prstGeom prst="rect">
-            <a:avLst/>
-          </a:prstGeom>
-          <a:solidFill>
-            <a:srgbClr val="009CD6"/>
-          </a:solidFill>
-          <a:ln>
-            <a:noFill/>
-          </a:ln>
-          <a:effectLst/>
-        </p:spPr>
-        <p:style>
-          <a:lnRef idx="1">
-            <a:schemeClr val="accent1"/>
-          </a:lnRef>
-          <a:fillRef idx="3">
-            <a:schemeClr val="accent1"/>
-          </a:fillRef>
-          <a:effectRef idx="2">
-            <a:schemeClr val="accent1"/>
-          </a:effectRef>
-          <a:fontRef idx="minor">
-            <a:schemeClr val="lt1"/>
-          </a:fontRef>
-        </p:style>
-        <p:txBody>
-          <a:bodyPr rtlCol="0" anchor="ctr"/>
-          <a:lstStyle/>
-          <a:p>
-            <a:pPr algn="ctr"/>
-          </a:p>
-        </p:txBody>
-      </p:sp>
-      <p:sp>
-        <p:nvSpPr>
-          <p:cNvPr id="19" name="TextBox 18"/>
-          <p:cNvSpPr txBox="1"/>
-          <p:nvPr/>
-        </p:nvSpPr>
-        <p:spPr>
-          <a:xfrm>
-            <a:off x="7452360" y="457200"/>
-            <a:ext cx="4297680" cy="457200"/>
-          </a:xfrm>
-          <a:prstGeom prst="rect">
-            <a:avLst/>
-          </a:prstGeom>
-          <a:noFill/>
-        </p:spPr>
-        <p:txBody>
-          <a:bodyPr wrap="square">
-            <a:spAutoFit/>
-          </a:bodyPr>
-          <a:lstStyle/>
-          <a:p>
-            <a:r>
-              <a:rPr sz="1100" b="1" i="0">
-                <a:solidFill>
-                  <a:srgbClr val="E5F5FB"/>
-                </a:solidFill>
-                <a:latin typeface="Arial"/>
-              </a:rPr>
-              <a:t>THE LIFECYCLE THIS MODULE TEACHES</a:t>
-            </a:r>
-          </a:p>
-        </p:txBody>
-      </p:sp>
-      <p:sp>
-        <p:nvSpPr>
-          <p:cNvPr id="20" name="Rounded Rectangle 19"/>
-          <p:cNvSpPr/>
-          <p:nvPr/>
-        </p:nvSpPr>
-        <p:spPr>
-          <a:xfrm>
-            <a:off x="7452360" y="960120"/>
-            <a:ext cx="3840480" cy="658368"/>
-          </a:xfrm>
-          <a:prstGeom prst="roundRect">
-            <a:avLst>
-              <a:gd name="adj" fmla="val 14000"/>
-            </a:avLst>
-          </a:prstGeom>
-          <a:solidFill>
-            <a:srgbClr val="FFFFFF"/>
-          </a:solidFill>
-          <a:ln>
-            <a:noFill/>
-          </a:ln>
-          <a:effectLst/>
-        </p:spPr>
-        <p:style>
-          <a:lnRef idx="1">
-            <a:schemeClr val="accent1"/>
-          </a:lnRef>
-          <a:fillRef idx="3">
-            <a:schemeClr val="accent1"/>
-          </a:fillRef>
-          <a:effectRef idx="2">
-            <a:schemeClr val="accent1"/>
-          </a:effectRef>
-          <a:fontRef idx="minor">
-            <a:schemeClr val="lt1"/>
-          </a:fontRef>
-        </p:style>
-        <p:txBody>
-          <a:bodyPr rtlCol="0" anchor="ctr" lIns="164592" wrap="square"/>
-          <a:lstStyle/>
-          <a:p>
-            <a:pPr algn="ctr"/>
-            <a:r>
-              <a:rPr sz="1500" b="1" i="0">
-                <a:solidFill>
-                  <a:srgbClr val="1A1A1A"/>
-                </a:solidFill>
-                <a:latin typeface="Arial"/>
-              </a:rPr>
-              <a:t>Discover</a:t>
-            </a:r>
-          </a:p>
-        </p:txBody>
-      </p:sp>
-      <p:sp>
-        <p:nvSpPr>
-          <p:cNvPr id="21" name="Diamond 20"/>
-          <p:cNvSpPr/>
-          <p:nvPr/>
-        </p:nvSpPr>
-        <p:spPr>
-          <a:xfrm>
-            <a:off x="7333488" y="1677924"/>
-            <a:ext cx="128016" cy="128016"/>
-          </a:xfrm>
-          <a:prstGeom prst="diamond">
-            <a:avLst/>
-          </a:prstGeom>
-          <a:solidFill>
-            <a:srgbClr val="E5F5FB"/>
-          </a:solidFill>
-          <a:ln>
-            <a:noFill/>
-          </a:ln>
-          <a:effectLst/>
-        </p:spPr>
-        <p:style>
-          <a:lnRef idx="1">
-            <a:schemeClr val="accent1"/>
-          </a:lnRef>
-          <a:fillRef idx="3">
-            <a:schemeClr val="accent1"/>
-          </a:fillRef>
-          <a:effectRef idx="2">
-            <a:schemeClr val="accent1"/>
-          </a:effectRef>
-          <a:fontRef idx="minor">
-            <a:schemeClr val="lt1"/>
-          </a:fontRef>
-        </p:style>
-        <p:txBody>
-          <a:bodyPr rtlCol="0" anchor="ctr"/>
-          <a:lstStyle/>
-          <a:p>
-            <a:pPr algn="ctr"/>
-          </a:p>
-        </p:txBody>
-      </p:sp>
-      <p:sp>
-        <p:nvSpPr>
-          <p:cNvPr id="22" name="Rounded Rectangle 21"/>
-          <p:cNvSpPr/>
-          <p:nvPr/>
-        </p:nvSpPr>
-        <p:spPr>
-          <a:xfrm>
-            <a:off x="7452360" y="1892808"/>
-            <a:ext cx="3840480" cy="658368"/>
-          </a:xfrm>
-          <a:prstGeom prst="roundRect">
-            <a:avLst>
-              <a:gd name="adj" fmla="val 14000"/>
-            </a:avLst>
-          </a:prstGeom>
-          <a:solidFill>
-            <a:srgbClr val="FFFFFF"/>
-          </a:solidFill>
-          <a:ln>
-            <a:noFill/>
-          </a:ln>
-          <a:effectLst/>
-        </p:spPr>
-        <p:style>
-          <a:lnRef idx="1">
-            <a:schemeClr val="accent1"/>
-          </a:lnRef>
-          <a:fillRef idx="3">
-            <a:schemeClr val="accent1"/>
-          </a:fillRef>
-          <a:effectRef idx="2">
-            <a:schemeClr val="accent1"/>
-          </a:effectRef>
-          <a:fontRef idx="minor">
-            <a:schemeClr val="lt1"/>
-          </a:fontRef>
-        </p:style>
-        <p:txBody>
-          <a:bodyPr rtlCol="0" anchor="ctr" lIns="164592" wrap="square"/>
-          <a:lstStyle/>
-          <a:p>
-            <a:pPr algn="ctr"/>
-            <a:r>
-              <a:rPr sz="1500" b="1" i="0">
-                <a:solidFill>
-                  <a:srgbClr val="1A1A1A"/>
-                </a:solidFill>
-                <a:latin typeface="Arial"/>
-              </a:rPr>
-              <a:t>Assess</a:t>
-            </a:r>
-          </a:p>
-        </p:txBody>
-      </p:sp>
-      <p:sp>
-        <p:nvSpPr>
-          <p:cNvPr id="23" name="Diamond 22"/>
-          <p:cNvSpPr/>
-          <p:nvPr/>
-        </p:nvSpPr>
-        <p:spPr>
-          <a:xfrm>
-            <a:off x="7333488" y="2610612"/>
-            <a:ext cx="128016" cy="128016"/>
-          </a:xfrm>
-          <a:prstGeom prst="diamond">
-            <a:avLst/>
-          </a:prstGeom>
-          <a:solidFill>
-            <a:srgbClr val="E5F5FB"/>
-          </a:solidFill>
-          <a:ln>
-            <a:noFill/>
-          </a:ln>
-          <a:effectLst/>
-        </p:spPr>
-        <p:style>
-          <a:lnRef idx="1">
-            <a:schemeClr val="accent1"/>
-          </a:lnRef>
-          <a:fillRef idx="3">
-            <a:schemeClr val="accent1"/>
-          </a:fillRef>
-          <a:effectRef idx="2">
-            <a:schemeClr val="accent1"/>
-          </a:effectRef>
-          <a:fontRef idx="minor">
-            <a:schemeClr val="lt1"/>
-          </a:fontRef>
-        </p:style>
-        <p:txBody>
-          <a:bodyPr rtlCol="0" anchor="ctr"/>
-          <a:lstStyle/>
-          <a:p>
-            <a:pPr algn="ctr"/>
-          </a:p>
-        </p:txBody>
-      </p:sp>
-      <p:sp>
-        <p:nvSpPr>
-          <p:cNvPr id="24" name="Rounded Rectangle 23"/>
-          <p:cNvSpPr/>
-          <p:nvPr/>
-        </p:nvSpPr>
-        <p:spPr>
-          <a:xfrm>
-            <a:off x="7452360" y="2825496"/>
-            <a:ext cx="3840480" cy="658368"/>
-          </a:xfrm>
-          <a:prstGeom prst="roundRect">
-            <a:avLst>
-              <a:gd name="adj" fmla="val 14000"/>
-            </a:avLst>
-          </a:prstGeom>
-          <a:solidFill>
-            <a:srgbClr val="FFFFFF"/>
-          </a:solidFill>
-          <a:ln>
-            <a:noFill/>
-          </a:ln>
-          <a:effectLst/>
-        </p:spPr>
-        <p:style>
-          <a:lnRef idx="1">
-            <a:schemeClr val="accent1"/>
-          </a:lnRef>
-          <a:fillRef idx="3">
-            <a:schemeClr val="accent1"/>
-          </a:fillRef>
-          <a:effectRef idx="2">
-            <a:schemeClr val="accent1"/>
-          </a:effectRef>
-          <a:fontRef idx="minor">
-            <a:schemeClr val="lt1"/>
-          </a:fontRef>
-        </p:style>
-        <p:txBody>
-          <a:bodyPr rtlCol="0" anchor="ctr" lIns="164592" wrap="square"/>
-          <a:lstStyle/>
-          <a:p>
-            <a:pPr algn="ctr"/>
-            <a:r>
-              <a:rPr sz="1500" b="1" i="0">
-                <a:solidFill>
-                  <a:srgbClr val="1A1A1A"/>
-                </a:solidFill>
-                <a:latin typeface="Arial"/>
-              </a:rPr>
-              <a:t>Adapt</a:t>
-            </a:r>
-          </a:p>
-        </p:txBody>
-      </p:sp>
-      <p:sp>
-        <p:nvSpPr>
-          <p:cNvPr id="25" name="Diamond 24"/>
-          <p:cNvSpPr/>
-          <p:nvPr/>
-        </p:nvSpPr>
-        <p:spPr>
-          <a:xfrm>
-            <a:off x="7333488" y="3543300"/>
-            <a:ext cx="128016" cy="128016"/>
-          </a:xfrm>
-          <a:prstGeom prst="diamond">
-            <a:avLst/>
-          </a:prstGeom>
-          <a:solidFill>
-            <a:srgbClr val="E5F5FB"/>
-          </a:solidFill>
-          <a:ln>
-            <a:noFill/>
-          </a:ln>
-          <a:effectLst/>
-        </p:spPr>
-        <p:style>
-          <a:lnRef idx="1">
-            <a:schemeClr val="accent1"/>
-          </a:lnRef>
-          <a:fillRef idx="3">
-            <a:schemeClr val="accent1"/>
-          </a:fillRef>
-          <a:effectRef idx="2">
-            <a:schemeClr val="accent1"/>
-          </a:effectRef>
-          <a:fontRef idx="minor">
-            <a:schemeClr val="lt1"/>
-          </a:fontRef>
-        </p:style>
-        <p:txBody>
-          <a:bodyPr rtlCol="0" anchor="ctr"/>
-          <a:lstStyle/>
-          <a:p>
-            <a:pPr algn="ctr"/>
-          </a:p>
-        </p:txBody>
-      </p:sp>
-      <p:sp>
-        <p:nvSpPr>
-          <p:cNvPr id="26" name="Rounded Rectangle 25"/>
-          <p:cNvSpPr/>
-          <p:nvPr/>
-        </p:nvSpPr>
-        <p:spPr>
-          <a:xfrm>
-            <a:off x="7452360" y="3758184"/>
-            <a:ext cx="3840480" cy="658368"/>
-          </a:xfrm>
-          <a:prstGeom prst="roundRect">
-            <a:avLst>
-              <a:gd name="adj" fmla="val 14000"/>
-            </a:avLst>
-          </a:prstGeom>
-          <a:solidFill>
-            <a:srgbClr val="FFFFFF"/>
-          </a:solidFill>
-          <a:ln>
-            <a:noFill/>
-          </a:ln>
-          <a:effectLst/>
-        </p:spPr>
-        <p:style>
-          <a:lnRef idx="1">
-            <a:schemeClr val="accent1"/>
-          </a:lnRef>
-          <a:fillRef idx="3">
-            <a:schemeClr val="accent1"/>
-          </a:fillRef>
-          <a:effectRef idx="2">
-            <a:schemeClr val="accent1"/>
-          </a:effectRef>
-          <a:fontRef idx="minor">
-            <a:schemeClr val="lt1"/>
-          </a:fontRef>
-        </p:style>
-        <p:txBody>
-          <a:bodyPr rtlCol="0" anchor="ctr" lIns="164592" wrap="square"/>
-          <a:lstStyle/>
-          <a:p>
-            <a:pPr algn="ctr"/>
-            <a:r>
-              <a:rPr sz="1500" b="1" i="0">
-                <a:solidFill>
-                  <a:srgbClr val="1A1A1A"/>
-                </a:solidFill>
-                <a:latin typeface="Arial"/>
-              </a:rPr>
-              <a:t>Plan</a:t>
-            </a:r>
-          </a:p>
-        </p:txBody>
-      </p:sp>
-      <p:sp>
-        <p:nvSpPr>
-          <p:cNvPr id="27" name="Diamond 26"/>
-          <p:cNvSpPr/>
-          <p:nvPr/>
-        </p:nvSpPr>
-        <p:spPr>
-          <a:xfrm>
-            <a:off x="7333488" y="4475988"/>
-            <a:ext cx="128016" cy="128016"/>
-          </a:xfrm>
-          <a:prstGeom prst="diamond">
-            <a:avLst/>
-          </a:prstGeom>
-          <a:solidFill>
-            <a:srgbClr val="E5F5FB"/>
-          </a:solidFill>
-          <a:ln>
-            <a:noFill/>
-          </a:ln>
-          <a:effectLst/>
-        </p:spPr>
-        <p:style>
-          <a:lnRef idx="1">
-            <a:schemeClr val="accent1"/>
-          </a:lnRef>
-          <a:fillRef idx="3">
-            <a:schemeClr val="accent1"/>
-          </a:fillRef>
-          <a:effectRef idx="2">
-            <a:schemeClr val="accent1"/>
-          </a:effectRef>
-          <a:fontRef idx="minor">
-            <a:schemeClr val="lt1"/>
-          </a:fontRef>
-        </p:style>
-        <p:txBody>
-          <a:bodyPr rtlCol="0" anchor="ctr"/>
-          <a:lstStyle/>
-          <a:p>
-            <a:pPr algn="ctr"/>
-          </a:p>
-        </p:txBody>
-      </p:sp>
-      <p:sp>
-        <p:nvSpPr>
-          <p:cNvPr id="28" name="Rounded Rectangle 27"/>
-          <p:cNvSpPr/>
-          <p:nvPr/>
-        </p:nvSpPr>
-        <p:spPr>
-          <a:xfrm>
-            <a:off x="7452360" y="4690872"/>
-            <a:ext cx="3840480" cy="658368"/>
-          </a:xfrm>
-          <a:prstGeom prst="roundRect">
-            <a:avLst>
-              <a:gd name="adj" fmla="val 14000"/>
-            </a:avLst>
-          </a:prstGeom>
-          <a:solidFill>
-            <a:srgbClr val="006E96"/>
-          </a:solidFill>
-          <a:ln>
-            <a:noFill/>
-          </a:ln>
-          <a:effectLst/>
-        </p:spPr>
-        <p:style>
-          <a:lnRef idx="1">
-            <a:schemeClr val="accent1"/>
-          </a:lnRef>
-          <a:fillRef idx="3">
-            <a:schemeClr val="accent1"/>
-          </a:fillRef>
-          <a:effectRef idx="2">
-            <a:schemeClr val="accent1"/>
-          </a:effectRef>
-          <a:fontRef idx="minor">
-            <a:schemeClr val="lt1"/>
-          </a:fontRef>
-        </p:style>
-        <p:txBody>
-          <a:bodyPr rtlCol="0" anchor="ctr" lIns="164592" wrap="square"/>
-          <a:lstStyle/>
-          <a:p>
-            <a:pPr algn="ctr"/>
-            <a:r>
-              <a:rPr sz="1500" b="1" i="0">
-                <a:solidFill>
-                  <a:srgbClr val="FFFFFF"/>
-                </a:solidFill>
-                <a:latin typeface="Arial"/>
-              </a:rPr>
-              <a:t>Execute &amp; Govern</a:t>
-            </a:r>
-          </a:p>
-        </p:txBody>
-      </p:sp>
-      <p:sp>
-        <p:nvSpPr>
-          <p:cNvPr id="29" name="TextBox 28"/>
-          <p:cNvSpPr txBox="1"/>
-          <p:nvPr/>
-        </p:nvSpPr>
-        <p:spPr>
-          <a:xfrm>
-            <a:off x="7452360" y="5806440"/>
-            <a:ext cx="4297680" cy="731520"/>
-          </a:xfrm>
-          <a:prstGeom prst="rect">
-            <a:avLst/>
-          </a:prstGeom>
-          <a:noFill/>
-        </p:spPr>
-        <p:txBody>
-          <a:bodyPr wrap="square">
-            <a:spAutoFit/>
-          </a:bodyPr>
-          <a:lstStyle/>
-          <a:p>
-            <a:r>
-              <a:rPr sz="1200" b="0" i="0">
-                <a:solidFill>
-                  <a:srgbClr val="FFFFFF"/>
-                </a:solidFill>
-                <a:latin typeface="Arial"/>
-              </a:rPr>
-              <a:t>4 sign-offs · 6 months to a roadmap · then ongoing</a:t>
-            </a:r>
-          </a:p>
-        </p:txBody>
-      </p:sp>
-    </p:spTree>
-    <p:extLst>
-      <p:ext uri="{BB962C8B-B14F-4D97-AF65-F5344CB8AC3E}">
-        <p14:creationId xmlns:p14="http://schemas.microsoft.com/office/powerpoint/2010/main" val="1196800265"/>
-      </p:ext>
-    </p:extLst>
-  </p:cSld>
-  <p:clrMapOvr>
-    <a:masterClrMapping/>
-  </p:clrMapOvr>
-</p:sld>
-</file>
-
-<file path=ppt/slides/slide43.xml><?xml version="1.0" encoding="utf-8"?>
-<p:sld xmlns:a="http://schemas.openxmlformats.org/drawingml/2006/main" xmlns:p="http://schemas.openxmlformats.org/presentationml/2006/main" xmlns:r="http://schemas.openxmlformats.org/officeDocument/2006/relationships">
-  <p:cSld>
-    <p:spTree>
-      <p:nvGrpSpPr>
-        <p:cNvPr id="1" name=""/>
-        <p:cNvGrpSpPr/>
-        <p:nvPr/>
-      </p:nvGrpSpPr>
-      <p:grpSpPr/>
-      <p:sp>
-        <p:nvSpPr>
-          <p:cNvPr id="2" name="TextBox 1"/>
-          <p:cNvSpPr txBox="1"/>
-          <p:nvPr/>
-        </p:nvSpPr>
-        <p:spPr>
-          <a:xfrm>
-            <a:off x="822960" y="822960"/>
-            <a:ext cx="7315200" cy="457200"/>
-          </a:xfrm>
-          <a:prstGeom prst="rect">
-            <a:avLst/>
-          </a:prstGeom>
-          <a:noFill/>
-        </p:spPr>
-        <p:txBody>
-          <a:bodyPr wrap="square">
-            <a:spAutoFit/>
-          </a:bodyPr>
-          <a:lstStyle/>
-          <a:p>
-            <a:r>
-              <a:rPr sz="1200" b="1" i="0">
-                <a:solidFill>
-                  <a:srgbClr val="595959"/>
-                </a:solidFill>
-                <a:latin typeface="Arial"/>
-              </a:rPr>
-              <a:t>KP1 · MODULE 1 · VIDEO 1.7</a:t>
-            </a:r>
-          </a:p>
-        </p:txBody>
-      </p:sp>
-      <p:sp>
-        <p:nvSpPr>
-          <p:cNvPr id="3" name="TextBox 2"/>
-          <p:cNvSpPr txBox="1"/>
-          <p:nvPr/>
-        </p:nvSpPr>
-        <p:spPr>
-          <a:xfrm>
-            <a:off x="822960" y="1828800"/>
-            <a:ext cx="2011680" cy="1097280"/>
-          </a:xfrm>
-          <a:prstGeom prst="rect">
-            <a:avLst/>
-          </a:prstGeom>
-          <a:noFill/>
-        </p:spPr>
-        <p:txBody>
-          <a:bodyPr wrap="square">
-            <a:spAutoFit/>
-          </a:bodyPr>
-          <a:lstStyle/>
-          <a:p>
-            <a:r>
-              <a:rPr sz="6000" b="1" i="0">
-                <a:solidFill>
-                  <a:srgbClr val="009CD6"/>
-                </a:solidFill>
-                <a:latin typeface="Arial"/>
-              </a:rPr>
-              <a:t>1.7</a:t>
-            </a:r>
-          </a:p>
-        </p:txBody>
-      </p:sp>
-      <p:sp>
-        <p:nvSpPr>
-          <p:cNvPr id="4" name="TextBox 3"/>
-          <p:cNvSpPr txBox="1"/>
-          <p:nvPr/>
-        </p:nvSpPr>
-        <p:spPr>
-          <a:xfrm>
-            <a:off x="822960" y="2880360"/>
-            <a:ext cx="9601200" cy="1371600"/>
-          </a:xfrm>
-          <a:prstGeom prst="rect">
-            <a:avLst/>
-          </a:prstGeom>
-          <a:noFill/>
-        </p:spPr>
-        <p:txBody>
-          <a:bodyPr wrap="square">
-            <a:spAutoFit/>
-          </a:bodyPr>
-          <a:lstStyle/>
-          <a:p>
-            <a:r>
-              <a:rPr sz="3400" b="1" i="0">
-                <a:solidFill>
-                  <a:srgbClr val="1A1A1A"/>
-                </a:solidFill>
-                <a:latin typeface="Arial"/>
-              </a:rPr>
-              <a:t>What you will need from your minister</a:t>
-            </a:r>
-          </a:p>
-        </p:txBody>
-      </p:sp>
-      <p:sp>
-        <p:nvSpPr>
-          <p:cNvPr id="5" name="TextBox 4"/>
-          <p:cNvSpPr txBox="1"/>
-          <p:nvPr/>
-        </p:nvSpPr>
-        <p:spPr>
-          <a:xfrm>
-            <a:off x="822960" y="4343400"/>
-            <a:ext cx="9875520" cy="1554480"/>
-          </a:xfrm>
-          <a:prstGeom prst="rect">
-            <a:avLst/>
-          </a:prstGeom>
-          <a:noFill/>
-        </p:spPr>
-        <p:txBody>
-          <a:bodyPr wrap="square">
-            <a:spAutoFit/>
-          </a:bodyPr>
-          <a:lstStyle/>
-          <a:p>
-            <a:r>
-              <a:rPr sz="1700" b="0" i="1">
-                <a:solidFill>
-                  <a:srgbClr val="595959"/>
-                </a:solidFill>
-                <a:latin typeface="Arial"/>
-              </a:rPr>
-              <a:t>Four asks. A small permanent EA team. An EA Board with real authority. About two per cent of digital budget, sustained for five years. And one promise — that the team will not be pulled onto the urgent project of the week.</a:t>
-            </a:r>
-          </a:p>
-        </p:txBody>
-      </p:sp>
-      <p:sp>
-        <p:nvSpPr>
-          <p:cNvPr id="6" name="TextBox 5"/>
-          <p:cNvSpPr txBox="1"/>
-          <p:nvPr/>
-        </p:nvSpPr>
-        <p:spPr>
-          <a:xfrm>
-            <a:off x="822960" y="5989320"/>
-            <a:ext cx="7315200" cy="365760"/>
-          </a:xfrm>
-          <a:prstGeom prst="rect">
-            <a:avLst/>
-          </a:prstGeom>
-          <a:noFill/>
-        </p:spPr>
-        <p:txBody>
-          <a:bodyPr wrap="square">
-            <a:spAutoFit/>
-          </a:bodyPr>
-          <a:lstStyle/>
-          <a:p>
-            <a:r>
-              <a:rPr sz="1200" b="0" i="0">
-                <a:solidFill>
-                  <a:srgbClr val="595959"/>
-                </a:solidFill>
-                <a:latin typeface="Arial"/>
-              </a:rPr>
-              <a:t>standalone video · voice-over on text slides</a:t>
-            </a:r>
-          </a:p>
-        </p:txBody>
-      </p:sp>
-    </p:spTree>
-  </p:cSld>
-  <p:clrMapOvr>
-    <a:masterClrMapping/>
-  </p:clrMapOvr>
-</p:sld>
-</file>
-
-<file path=ppt/slides/slide44.xml><?xml version="1.0" encoding="utf-8"?>
-<p:sld xmlns:a="http://schemas.openxmlformats.org/drawingml/2006/main" xmlns:p="http://schemas.openxmlformats.org/presentationml/2006/main" xmlns:r="http://schemas.openxmlformats.org/officeDocument/2006/relationships">
-  <p:cSld>
-    <p:spTree>
-      <p:nvGrpSpPr>
-        <p:cNvPr id="1" name=""/>
-        <p:cNvGrpSpPr/>
-        <p:nvPr/>
-      </p:nvGrpSpPr>
-      <p:grpSpPr/>
-      <p:sp>
-        <p:nvSpPr>
-          <p:cNvPr id="2" name="Rectangle 1"/>
-          <p:cNvSpPr/>
-          <p:nvPr/>
-        </p:nvSpPr>
-        <p:spPr>
-          <a:xfrm>
-            <a:off x="457200" y="384048"/>
-            <a:ext cx="45720" cy="256032"/>
-          </a:xfrm>
-          <a:prstGeom prst="rect">
-            <a:avLst/>
-          </a:prstGeom>
-          <a:solidFill>
-            <a:srgbClr val="009CD6"/>
-          </a:solidFill>
-          <a:ln>
-            <a:noFill/>
-          </a:ln>
-          <a:effectLst/>
-        </p:spPr>
-        <p:style>
-          <a:lnRef idx="1">
-            <a:schemeClr val="accent1"/>
-          </a:lnRef>
-          <a:fillRef idx="3">
-            <a:schemeClr val="accent1"/>
-          </a:fillRef>
-          <a:effectRef idx="2">
-            <a:schemeClr val="accent1"/>
-          </a:effectRef>
-          <a:fontRef idx="minor">
-            <a:schemeClr val="lt1"/>
-          </a:fontRef>
-        </p:style>
-        <p:txBody>
-          <a:bodyPr rtlCol="0" anchor="ctr"/>
-          <a:lstStyle/>
-          <a:p>
-            <a:pPr algn="ctr"/>
-          </a:p>
-        </p:txBody>
-      </p:sp>
-      <p:sp>
-        <p:nvSpPr>
-          <p:cNvPr id="3" name="TextBox 2"/>
-          <p:cNvSpPr txBox="1"/>
-          <p:nvPr/>
-        </p:nvSpPr>
-        <p:spPr>
-          <a:xfrm>
-            <a:off x="621792" y="274320"/>
-            <a:ext cx="11247120" cy="914400"/>
-          </a:xfrm>
-          <a:prstGeom prst="rect">
-            <a:avLst/>
-          </a:prstGeom>
-          <a:noFill/>
-        </p:spPr>
-        <p:txBody>
-          <a:bodyPr wrap="square">
-            <a:spAutoFit/>
-          </a:bodyPr>
-          <a:lstStyle/>
-          <a:p>
-            <a:r>
-              <a:rPr sz="2800" b="1" i="0">
-                <a:solidFill>
-                  <a:srgbClr val="1A1A1A"/>
-                </a:solidFill>
-                <a:latin typeface="Arial"/>
-              </a:rPr>
-              <a:t>Ask 1 — A small permanent EA team</a:t>
-            </a:r>
-          </a:p>
-        </p:txBody>
-      </p:sp>
-      <p:sp>
-        <p:nvSpPr>
-          <p:cNvPr id="4" name="TextBox 3"/>
-          <p:cNvSpPr txBox="1"/>
-          <p:nvPr/>
-        </p:nvSpPr>
-        <p:spPr>
-          <a:xfrm>
-            <a:off x="658368" y="1645920"/>
-            <a:ext cx="2286000" cy="548640"/>
-          </a:xfrm>
-          <a:prstGeom prst="rect">
-            <a:avLst/>
-          </a:prstGeom>
-          <a:noFill/>
-        </p:spPr>
-        <p:txBody>
-          <a:bodyPr wrap="square">
-            <a:spAutoFit/>
-          </a:bodyPr>
-          <a:lstStyle/>
-          <a:p>
-            <a:r>
-              <a:rPr sz="1300" b="1" i="0">
-                <a:solidFill>
-                  <a:srgbClr val="006E96"/>
-                </a:solidFill>
-                <a:latin typeface="Arial"/>
-              </a:rPr>
-              <a:t>SIZE</a:t>
-            </a:r>
-          </a:p>
-        </p:txBody>
-      </p:sp>
-      <p:sp>
-        <p:nvSpPr>
-          <p:cNvPr id="5" name="TextBox 4"/>
-          <p:cNvSpPr txBox="1"/>
-          <p:nvPr/>
-        </p:nvSpPr>
-        <p:spPr>
-          <a:xfrm>
-            <a:off x="3017520" y="1627632"/>
-            <a:ext cx="8412480" cy="1051560"/>
-          </a:xfrm>
-          <a:prstGeom prst="rect">
-            <a:avLst/>
-          </a:prstGeom>
-          <a:noFill/>
-        </p:spPr>
-        <p:txBody>
-          <a:bodyPr wrap="square">
-            <a:spAutoFit/>
-          </a:bodyPr>
-          <a:lstStyle/>
-          <a:p>
-            <a:r>
-              <a:rPr sz="1700" b="0" i="0">
-                <a:solidFill>
-                  <a:srgbClr val="1A1A1A"/>
-                </a:solidFill>
-                <a:latin typeface="Arial"/>
-              </a:rPr>
-              <a:t>2 to 4 senior architects — permanent, reporting to your CDO or equivalent</a:t>
-            </a:r>
-          </a:p>
-        </p:txBody>
-      </p:sp>
-      <p:sp>
-        <p:nvSpPr>
-          <p:cNvPr id="6" name="TextBox 5"/>
-          <p:cNvSpPr txBox="1"/>
-          <p:nvPr/>
-        </p:nvSpPr>
-        <p:spPr>
-          <a:xfrm>
-            <a:off x="658368" y="2724912"/>
-            <a:ext cx="2286000" cy="548640"/>
-          </a:xfrm>
-          <a:prstGeom prst="rect">
-            <a:avLst/>
-          </a:prstGeom>
-          <a:noFill/>
-        </p:spPr>
-        <p:txBody>
-          <a:bodyPr wrap="square">
-            <a:spAutoFit/>
-          </a:bodyPr>
-          <a:lstStyle/>
-          <a:p>
-            <a:r>
-              <a:rPr sz="1300" b="1" i="0">
-                <a:solidFill>
-                  <a:srgbClr val="006E96"/>
-                </a:solidFill>
-                <a:latin typeface="Arial"/>
-              </a:rPr>
-              <a:t>TYPICALLY</a:t>
-            </a:r>
-          </a:p>
-        </p:txBody>
-      </p:sp>
-      <p:sp>
-        <p:nvSpPr>
-          <p:cNvPr id="7" name="TextBox 6"/>
-          <p:cNvSpPr txBox="1"/>
-          <p:nvPr/>
-        </p:nvSpPr>
-        <p:spPr>
-          <a:xfrm>
-            <a:off x="3017520" y="2706624"/>
-            <a:ext cx="8412480" cy="1051560"/>
-          </a:xfrm>
-          <a:prstGeom prst="rect">
-            <a:avLst/>
-          </a:prstGeom>
-          <a:noFill/>
-        </p:spPr>
-        <p:txBody>
-          <a:bodyPr wrap="square">
-            <a:spAutoFit/>
-          </a:bodyPr>
-          <a:lstStyle/>
-          <a:p>
-            <a:r>
-              <a:rPr sz="1700" b="0" i="0">
-                <a:solidFill>
-                  <a:srgbClr val="1A1A1A"/>
-                </a:solidFill>
-                <a:latin typeface="Arial"/>
-              </a:rPr>
-              <a:t>A chief architect, domain architects, a methodology lead. Smaller countries: 2 people, each carrying several domains.</a:t>
-            </a:r>
-          </a:p>
-        </p:txBody>
-      </p:sp>
-      <p:sp>
-        <p:nvSpPr>
-          <p:cNvPr id="8" name="TextBox 7"/>
-          <p:cNvSpPr txBox="1"/>
-          <p:nvPr/>
-        </p:nvSpPr>
-        <p:spPr>
-          <a:xfrm>
-            <a:off x="658368" y="3803904"/>
-            <a:ext cx="2286000" cy="548640"/>
-          </a:xfrm>
-          <a:prstGeom prst="rect">
-            <a:avLst/>
-          </a:prstGeom>
-          <a:noFill/>
-        </p:spPr>
-        <p:txBody>
-          <a:bodyPr wrap="square">
-            <a:spAutoFit/>
-          </a:bodyPr>
-          <a:lstStyle/>
-          <a:p>
-            <a:r>
-              <a:rPr sz="1300" b="1" i="0">
-                <a:solidFill>
-                  <a:srgbClr val="006E96"/>
-                </a:solidFill>
-                <a:latin typeface="Arial"/>
-              </a:rPr>
-              <a:t>NOT</a:t>
-            </a:r>
-          </a:p>
-        </p:txBody>
-      </p:sp>
-      <p:sp>
-        <p:nvSpPr>
-          <p:cNvPr id="9" name="TextBox 8"/>
-          <p:cNvSpPr txBox="1"/>
-          <p:nvPr/>
-        </p:nvSpPr>
-        <p:spPr>
-          <a:xfrm>
-            <a:off x="3017520" y="3785616"/>
-            <a:ext cx="8412480" cy="1051560"/>
-          </a:xfrm>
-          <a:prstGeom prst="rect">
-            <a:avLst/>
-          </a:prstGeom>
-          <a:noFill/>
-        </p:spPr>
-        <p:txBody>
-          <a:bodyPr wrap="square">
-            <a:spAutoFit/>
-          </a:bodyPr>
-          <a:lstStyle/>
-          <a:p>
-            <a:r>
-              <a:rPr sz="1700" b="0" i="0">
-                <a:solidFill>
-                  <a:srgbClr val="1A1A1A"/>
-                </a:solidFill>
-                <a:latin typeface="Arial"/>
-              </a:rPr>
-              <a:t>Consultants. Not a temporary unit.</a:t>
-            </a:r>
-          </a:p>
-        </p:txBody>
-      </p:sp>
-      <p:sp>
-        <p:nvSpPr>
-          <p:cNvPr id="10" name="TextBox 9"/>
-          <p:cNvSpPr txBox="1"/>
-          <p:nvPr/>
-        </p:nvSpPr>
-        <p:spPr>
-          <a:xfrm>
-            <a:off x="658368" y="4882896"/>
-            <a:ext cx="2286000" cy="548640"/>
-          </a:xfrm>
-          <a:prstGeom prst="rect">
-            <a:avLst/>
-          </a:prstGeom>
-          <a:noFill/>
-        </p:spPr>
-        <p:txBody>
-          <a:bodyPr wrap="square">
-            <a:spAutoFit/>
-          </a:bodyPr>
-          <a:lstStyle/>
-          <a:p>
-            <a:r>
-              <a:rPr sz="1300" b="1" i="0">
-                <a:solidFill>
-                  <a:srgbClr val="006E96"/>
-                </a:solidFill>
-                <a:latin typeface="Arial"/>
-              </a:rPr>
-              <a:t>THE POINT</a:t>
-            </a:r>
-          </a:p>
-        </p:txBody>
-      </p:sp>
-      <p:sp>
-        <p:nvSpPr>
-          <p:cNvPr id="11" name="TextBox 10"/>
-          <p:cNvSpPr txBox="1"/>
-          <p:nvPr/>
-        </p:nvSpPr>
-        <p:spPr>
-          <a:xfrm>
-            <a:off x="3017520" y="4864608"/>
-            <a:ext cx="8412480" cy="1051560"/>
-          </a:xfrm>
-          <a:prstGeom prst="rect">
-            <a:avLst/>
-          </a:prstGeom>
-          <a:noFill/>
-        </p:spPr>
-        <p:txBody>
-          <a:bodyPr wrap="square">
-            <a:spAutoFit/>
-          </a:bodyPr>
-          <a:lstStyle/>
-          <a:p>
-            <a:r>
-              <a:rPr sz="1700" b="1" i="0">
-                <a:solidFill>
-                  <a:srgbClr val="1A1A1A"/>
-                </a:solidFill>
-                <a:latin typeface="Arial"/>
-              </a:rPr>
-              <a:t>The institutional home of architecture — it exists whether or not any single programme is running.</a:t>
-            </a:r>
-          </a:p>
-        </p:txBody>
-      </p:sp>
-      <p:sp>
-        <p:nvSpPr>
-          <p:cNvPr id="12" name="TextBox 11"/>
-          <p:cNvSpPr txBox="1"/>
-          <p:nvPr/>
-        </p:nvSpPr>
-        <p:spPr>
-          <a:xfrm>
-            <a:off x="457200" y="6473952"/>
-            <a:ext cx="7772400" cy="292608"/>
-          </a:xfrm>
-          <a:prstGeom prst="rect">
-            <a:avLst/>
-          </a:prstGeom>
-          <a:noFill/>
-        </p:spPr>
-        <p:txBody>
-          <a:bodyPr wrap="square">
-            <a:spAutoFit/>
-          </a:bodyPr>
-          <a:lstStyle/>
-          <a:p>
-            <a:r>
-              <a:rPr sz="900" b="0" i="0">
-                <a:solidFill>
-                  <a:srgbClr val="595959"/>
-                </a:solidFill>
-                <a:latin typeface="Arial"/>
-              </a:rPr>
-              <a:t>1.7 · What you will need from your minister</a:t>
-            </a:r>
-          </a:p>
-        </p:txBody>
-      </p:sp>
-    </p:spTree>
-  </p:cSld>
-  <p:clrMapOvr>
-    <a:masterClrMapping/>
-  </p:clrMapOvr>
-</p:sld>
-</file>
-
-<file path=ppt/slides/slide45.xml><?xml version="1.0" encoding="utf-8"?>
-<p:sld xmlns:a="http://schemas.openxmlformats.org/drawingml/2006/main" xmlns:p="http://schemas.openxmlformats.org/presentationml/2006/main" xmlns:r="http://schemas.openxmlformats.org/officeDocument/2006/relationships">
-  <p:cSld>
-    <p:spTree>
-      <p:nvGrpSpPr>
-        <p:cNvPr id="1" name=""/>
-        <p:cNvGrpSpPr/>
-        <p:nvPr/>
-      </p:nvGrpSpPr>
-      <p:grpSpPr/>
-      <p:sp>
-        <p:nvSpPr>
-          <p:cNvPr id="2" name="Rectangle 1"/>
-          <p:cNvSpPr/>
-          <p:nvPr/>
-        </p:nvSpPr>
-        <p:spPr>
-          <a:xfrm>
-            <a:off x="457200" y="384048"/>
-            <a:ext cx="45720" cy="256032"/>
-          </a:xfrm>
-          <a:prstGeom prst="rect">
-            <a:avLst/>
-          </a:prstGeom>
-          <a:solidFill>
-            <a:srgbClr val="009CD6"/>
-          </a:solidFill>
-          <a:ln>
-            <a:noFill/>
-          </a:ln>
-          <a:effectLst/>
-        </p:spPr>
-        <p:style>
-          <a:lnRef idx="1">
-            <a:schemeClr val="accent1"/>
-          </a:lnRef>
-          <a:fillRef idx="3">
-            <a:schemeClr val="accent1"/>
-          </a:fillRef>
-          <a:effectRef idx="2">
-            <a:schemeClr val="accent1"/>
-          </a:effectRef>
-          <a:fontRef idx="minor">
-            <a:schemeClr val="lt1"/>
-          </a:fontRef>
-        </p:style>
-        <p:txBody>
-          <a:bodyPr rtlCol="0" anchor="ctr"/>
-          <a:lstStyle/>
-          <a:p>
-            <a:pPr algn="ctr"/>
-          </a:p>
-        </p:txBody>
-      </p:sp>
-      <p:sp>
-        <p:nvSpPr>
-          <p:cNvPr id="3" name="TextBox 2"/>
-          <p:cNvSpPr txBox="1"/>
-          <p:nvPr/>
-        </p:nvSpPr>
-        <p:spPr>
-          <a:xfrm>
-            <a:off x="621792" y="274320"/>
-            <a:ext cx="11247120" cy="914400"/>
-          </a:xfrm>
-          <a:prstGeom prst="rect">
-            <a:avLst/>
-          </a:prstGeom>
-          <a:noFill/>
-        </p:spPr>
-        <p:txBody>
-          <a:bodyPr wrap="square">
-            <a:spAutoFit/>
-          </a:bodyPr>
-          <a:lstStyle/>
-          <a:p>
-            <a:r>
-              <a:rPr sz="2800" b="1" i="0">
-                <a:solidFill>
-                  <a:srgbClr val="1A1A1A"/>
-                </a:solidFill>
-                <a:latin typeface="Arial"/>
-              </a:rPr>
-              <a:t>Ask 2 — An EA Board with binding authority</a:t>
-            </a:r>
-          </a:p>
-        </p:txBody>
-      </p:sp>
-      <p:sp>
-        <p:nvSpPr>
-          <p:cNvPr id="4" name="TextBox 3"/>
-          <p:cNvSpPr txBox="1"/>
-          <p:nvPr/>
-        </p:nvSpPr>
-        <p:spPr>
-          <a:xfrm>
-            <a:off x="658368" y="1645920"/>
-            <a:ext cx="2286000" cy="548640"/>
-          </a:xfrm>
-          <a:prstGeom prst="rect">
-            <a:avLst/>
-          </a:prstGeom>
-          <a:noFill/>
-        </p:spPr>
-        <p:txBody>
-          <a:bodyPr wrap="square">
-            <a:spAutoFit/>
-          </a:bodyPr>
-          <a:lstStyle/>
-          <a:p>
-            <a:r>
-              <a:rPr sz="1300" b="1" i="0">
-                <a:solidFill>
-                  <a:srgbClr val="006E96"/>
-                </a:solidFill>
-                <a:latin typeface="Arial"/>
-              </a:rPr>
-              <a:t>CHAIR</a:t>
-            </a:r>
-          </a:p>
-        </p:txBody>
-      </p:sp>
-      <p:sp>
-        <p:nvSpPr>
-          <p:cNvPr id="5" name="TextBox 4"/>
-          <p:cNvSpPr txBox="1"/>
-          <p:nvPr/>
-        </p:nvSpPr>
-        <p:spPr>
-          <a:xfrm>
-            <a:off x="3017520" y="1627632"/>
-            <a:ext cx="8412480" cy="1051560"/>
-          </a:xfrm>
-          <a:prstGeom prst="rect">
-            <a:avLst/>
-          </a:prstGeom>
-          <a:noFill/>
-        </p:spPr>
-        <p:txBody>
-          <a:bodyPr wrap="square">
-            <a:spAutoFit/>
-          </a:bodyPr>
-          <a:lstStyle/>
-          <a:p>
-            <a:r>
-              <a:rPr sz="1700" b="0" i="0">
-                <a:solidFill>
-                  <a:srgbClr val="1A1A1A"/>
-                </a:solidFill>
-                <a:latin typeface="Arial"/>
-              </a:rPr>
-              <a:t>Your CDO — or the minister directly</a:t>
-            </a:r>
-          </a:p>
-        </p:txBody>
-      </p:sp>
-      <p:sp>
-        <p:nvSpPr>
-          <p:cNvPr id="6" name="TextBox 5"/>
-          <p:cNvSpPr txBox="1"/>
-          <p:nvPr/>
-        </p:nvSpPr>
-        <p:spPr>
-          <a:xfrm>
-            <a:off x="658368" y="2724912"/>
-            <a:ext cx="2286000" cy="548640"/>
-          </a:xfrm>
-          <a:prstGeom prst="rect">
-            <a:avLst/>
-          </a:prstGeom>
-          <a:noFill/>
-        </p:spPr>
-        <p:txBody>
-          <a:bodyPr wrap="square">
-            <a:spAutoFit/>
-          </a:bodyPr>
-          <a:lstStyle/>
-          <a:p>
-            <a:r>
-              <a:rPr sz="1300" b="1" i="0">
-                <a:solidFill>
-                  <a:srgbClr val="006E96"/>
-                </a:solidFill>
-                <a:latin typeface="Arial"/>
-              </a:rPr>
-              <a:t>MEMBERS</a:t>
-            </a:r>
-          </a:p>
-        </p:txBody>
-      </p:sp>
-      <p:sp>
-        <p:nvSpPr>
-          <p:cNvPr id="7" name="TextBox 6"/>
-          <p:cNvSpPr txBox="1"/>
-          <p:nvPr/>
-        </p:nvSpPr>
-        <p:spPr>
-          <a:xfrm>
-            <a:off x="3017520" y="2706624"/>
-            <a:ext cx="8412480" cy="1051560"/>
-          </a:xfrm>
-          <a:prstGeom prst="rect">
-            <a:avLst/>
-          </a:prstGeom>
-          <a:noFill/>
-        </p:spPr>
-        <p:txBody>
-          <a:bodyPr wrap="square">
-            <a:spAutoFit/>
-          </a:bodyPr>
-          <a:lstStyle/>
-          <a:p>
-            <a:r>
-              <a:rPr sz="1700" b="0" i="0">
-                <a:solidFill>
-                  <a:srgbClr val="1A1A1A"/>
-                </a:solidFill>
-                <a:latin typeface="Arial"/>
-              </a:rPr>
-              <a:t>Sector ministry CIOs, owners of the major state registers, optionally an external advisor</a:t>
-            </a:r>
-          </a:p>
-        </p:txBody>
-      </p:sp>
-      <p:sp>
-        <p:nvSpPr>
-          <p:cNvPr id="8" name="TextBox 7"/>
-          <p:cNvSpPr txBox="1"/>
-          <p:nvPr/>
-        </p:nvSpPr>
-        <p:spPr>
-          <a:xfrm>
-            <a:off x="658368" y="3803904"/>
-            <a:ext cx="2286000" cy="548640"/>
-          </a:xfrm>
-          <a:prstGeom prst="rect">
-            <a:avLst/>
-          </a:prstGeom>
-          <a:noFill/>
-        </p:spPr>
-        <p:txBody>
-          <a:bodyPr wrap="square">
-            <a:spAutoFit/>
-          </a:bodyPr>
-          <a:lstStyle/>
-          <a:p>
-            <a:r>
-              <a:rPr sz="1300" b="1" i="0">
-                <a:solidFill>
-                  <a:srgbClr val="006E96"/>
-                </a:solidFill>
-                <a:latin typeface="Arial"/>
-              </a:rPr>
-              <a:t>CADENCE</a:t>
-            </a:r>
-          </a:p>
-        </p:txBody>
-      </p:sp>
-      <p:sp>
-        <p:nvSpPr>
-          <p:cNvPr id="9" name="TextBox 8"/>
-          <p:cNvSpPr txBox="1"/>
-          <p:nvPr/>
-        </p:nvSpPr>
-        <p:spPr>
-          <a:xfrm>
-            <a:off x="3017520" y="3785616"/>
-            <a:ext cx="8412480" cy="1051560"/>
-          </a:xfrm>
-          <a:prstGeom prst="rect">
-            <a:avLst/>
-          </a:prstGeom>
-          <a:noFill/>
-        </p:spPr>
-        <p:txBody>
-          <a:bodyPr wrap="square">
-            <a:spAutoFit/>
-          </a:bodyPr>
-          <a:lstStyle/>
-          <a:p>
-            <a:r>
-              <a:rPr sz="1700" b="0" i="0">
-                <a:solidFill>
-                  <a:srgbClr val="1A1A1A"/>
-                </a:solidFill>
-                <a:latin typeface="Arial"/>
-              </a:rPr>
-              <a:t>Quarterly main meetings; ad-hoc for urgent decisions</a:t>
-            </a:r>
-          </a:p>
-        </p:txBody>
-      </p:sp>
-      <p:sp>
-        <p:nvSpPr>
-          <p:cNvPr id="10" name="TextBox 9"/>
-          <p:cNvSpPr txBox="1"/>
-          <p:nvPr/>
-        </p:nvSpPr>
-        <p:spPr>
-          <a:xfrm>
-            <a:off x="658368" y="4882896"/>
-            <a:ext cx="2286000" cy="548640"/>
-          </a:xfrm>
-          <a:prstGeom prst="rect">
-            <a:avLst/>
-          </a:prstGeom>
-          <a:noFill/>
-        </p:spPr>
-        <p:txBody>
-          <a:bodyPr wrap="square">
-            <a:spAutoFit/>
-          </a:bodyPr>
-          <a:lstStyle/>
-          <a:p>
-            <a:r>
-              <a:rPr sz="1300" b="1" i="0">
-                <a:solidFill>
-                  <a:srgbClr val="006E96"/>
-                </a:solidFill>
-                <a:latin typeface="Arial"/>
-              </a:rPr>
-              <a:t>MANDATE</a:t>
-            </a:r>
-          </a:p>
-        </p:txBody>
-      </p:sp>
-      <p:sp>
-        <p:nvSpPr>
-          <p:cNvPr id="11" name="TextBox 10"/>
-          <p:cNvSpPr txBox="1"/>
-          <p:nvPr/>
-        </p:nvSpPr>
-        <p:spPr>
-          <a:xfrm>
-            <a:off x="3017520" y="4864608"/>
-            <a:ext cx="8412480" cy="1051560"/>
-          </a:xfrm>
-          <a:prstGeom prst="rect">
-            <a:avLst/>
-          </a:prstGeom>
-          <a:noFill/>
-        </p:spPr>
-        <p:txBody>
-          <a:bodyPr wrap="square">
-            <a:spAutoFit/>
-          </a:bodyPr>
-          <a:lstStyle/>
-          <a:p>
-            <a:r>
-              <a:rPr sz="1700" b="1" i="0">
-                <a:solidFill>
-                  <a:srgbClr val="1A1A1A"/>
-                </a:solidFill>
-                <a:latin typeface="Arial"/>
-              </a:rPr>
-              <a:t>BINDING — not advisory. Without binding authority, the EA becomes documentation nobody reads.</a:t>
-            </a:r>
-          </a:p>
-        </p:txBody>
-      </p:sp>
-      <p:sp>
-        <p:nvSpPr>
-          <p:cNvPr id="12" name="TextBox 11"/>
-          <p:cNvSpPr txBox="1"/>
-          <p:nvPr/>
-        </p:nvSpPr>
-        <p:spPr>
-          <a:xfrm>
-            <a:off x="457200" y="6473952"/>
-            <a:ext cx="7772400" cy="292608"/>
-          </a:xfrm>
-          <a:prstGeom prst="rect">
-            <a:avLst/>
-          </a:prstGeom>
-          <a:noFill/>
-        </p:spPr>
-        <p:txBody>
-          <a:bodyPr wrap="square">
-            <a:spAutoFit/>
-          </a:bodyPr>
-          <a:lstStyle/>
-          <a:p>
-            <a:r>
-              <a:rPr sz="900" b="0" i="0">
-                <a:solidFill>
-                  <a:srgbClr val="595959"/>
-                </a:solidFill>
-                <a:latin typeface="Arial"/>
-              </a:rPr>
-              <a:t>1.7 · What you will need from your minister</a:t>
-            </a:r>
-          </a:p>
-        </p:txBody>
-      </p:sp>
-    </p:spTree>
-  </p:cSld>
-  <p:clrMapOvr>
-    <a:masterClrMapping/>
-  </p:clrMapOvr>
-</p:sld>
-</file>
-
-<file path=ppt/slides/slide46.xml><?xml version="1.0" encoding="utf-8"?>
-<p:sld xmlns:a="http://schemas.openxmlformats.org/drawingml/2006/main" xmlns:p="http://schemas.openxmlformats.org/presentationml/2006/main" xmlns:r="http://schemas.openxmlformats.org/officeDocument/2006/relationships">
-  <p:cSld>
-    <p:spTree>
-      <p:nvGrpSpPr>
-        <p:cNvPr id="1" name=""/>
-        <p:cNvGrpSpPr/>
-        <p:nvPr/>
-      </p:nvGrpSpPr>
-      <p:grpSpPr/>
-      <p:sp>
-        <p:nvSpPr>
-          <p:cNvPr id="2" name="Rectangle 1"/>
-          <p:cNvSpPr/>
-          <p:nvPr/>
-        </p:nvSpPr>
-        <p:spPr>
-          <a:xfrm>
-            <a:off x="457200" y="384048"/>
-            <a:ext cx="45720" cy="256032"/>
-          </a:xfrm>
-          <a:prstGeom prst="rect">
-            <a:avLst/>
-          </a:prstGeom>
-          <a:solidFill>
-            <a:srgbClr val="009CD6"/>
-          </a:solidFill>
-          <a:ln>
-            <a:noFill/>
-          </a:ln>
-          <a:effectLst/>
-        </p:spPr>
-        <p:style>
-          <a:lnRef idx="1">
-            <a:schemeClr val="accent1"/>
-          </a:lnRef>
-          <a:fillRef idx="3">
-            <a:schemeClr val="accent1"/>
-          </a:fillRef>
-          <a:effectRef idx="2">
-            <a:schemeClr val="accent1"/>
-          </a:effectRef>
-          <a:fontRef idx="minor">
-            <a:schemeClr val="lt1"/>
-          </a:fontRef>
-        </p:style>
-        <p:txBody>
-          <a:bodyPr rtlCol="0" anchor="ctr"/>
-          <a:lstStyle/>
-          <a:p>
-            <a:pPr algn="ctr"/>
-          </a:p>
-        </p:txBody>
-      </p:sp>
-      <p:sp>
-        <p:nvSpPr>
-          <p:cNvPr id="3" name="TextBox 2"/>
-          <p:cNvSpPr txBox="1"/>
-          <p:nvPr/>
-        </p:nvSpPr>
-        <p:spPr>
-          <a:xfrm>
-            <a:off x="621792" y="274320"/>
-            <a:ext cx="11247120" cy="914400"/>
-          </a:xfrm>
-          <a:prstGeom prst="rect">
-            <a:avLst/>
-          </a:prstGeom>
-          <a:noFill/>
-        </p:spPr>
-        <p:txBody>
-          <a:bodyPr wrap="square">
-            <a:spAutoFit/>
-          </a:bodyPr>
-          <a:lstStyle/>
-          <a:p>
-            <a:r>
-              <a:rPr sz="2800" b="1" i="0">
-                <a:solidFill>
-                  <a:srgbClr val="1A1A1A"/>
-                </a:solidFill>
-                <a:latin typeface="Arial"/>
-              </a:rPr>
-              <a:t>Ask 3 — About 2% of digital budget, for five years</a:t>
-            </a:r>
-          </a:p>
-        </p:txBody>
-      </p:sp>
-      <p:sp>
-        <p:nvSpPr>
-          <p:cNvPr id="4" name="TextBox 3"/>
-          <p:cNvSpPr txBox="1"/>
-          <p:nvPr/>
-        </p:nvSpPr>
-        <p:spPr>
-          <a:xfrm>
-            <a:off x="658368" y="1645920"/>
-            <a:ext cx="2286000" cy="548640"/>
-          </a:xfrm>
-          <a:prstGeom prst="rect">
-            <a:avLst/>
-          </a:prstGeom>
-          <a:noFill/>
-        </p:spPr>
-        <p:txBody>
-          <a:bodyPr wrap="square">
-            <a:spAutoFit/>
-          </a:bodyPr>
-          <a:lstStyle/>
-          <a:p>
-            <a:r>
-              <a:rPr sz="1300" b="1" i="0">
-                <a:solidFill>
-                  <a:srgbClr val="006E96"/>
-                </a:solidFill>
-                <a:latin typeface="Arial"/>
-              </a:rPr>
-              <a:t>INITIAL ENGAGEMENT</a:t>
-            </a:r>
-          </a:p>
-        </p:txBody>
-      </p:sp>
-      <p:sp>
-        <p:nvSpPr>
-          <p:cNvPr id="5" name="TextBox 4"/>
-          <p:cNvSpPr txBox="1"/>
-          <p:nvPr/>
-        </p:nvSpPr>
-        <p:spPr>
-          <a:xfrm>
-            <a:off x="3017520" y="1627632"/>
-            <a:ext cx="8412480" cy="1051560"/>
-          </a:xfrm>
-          <a:prstGeom prst="rect">
-            <a:avLst/>
-          </a:prstGeom>
-          <a:noFill/>
-        </p:spPr>
-        <p:txBody>
-          <a:bodyPr wrap="square">
-            <a:spAutoFit/>
-          </a:bodyPr>
-          <a:lstStyle/>
-          <a:p>
-            <a:r>
-              <a:rPr sz="1700" b="0" i="0">
-                <a:solidFill>
-                  <a:srgbClr val="1A1A1A"/>
-                </a:solidFill>
-                <a:latin typeface="Arial"/>
-              </a:rPr>
-              <a:t>The first four phases — about 10 to 15 senior person-months over six months</a:t>
-            </a:r>
-          </a:p>
-        </p:txBody>
-      </p:sp>
-      <p:sp>
-        <p:nvSpPr>
-          <p:cNvPr id="6" name="TextBox 5"/>
-          <p:cNvSpPr txBox="1"/>
-          <p:nvPr/>
-        </p:nvSpPr>
-        <p:spPr>
-          <a:xfrm>
-            <a:off x="658368" y="2724912"/>
-            <a:ext cx="2286000" cy="548640"/>
-          </a:xfrm>
-          <a:prstGeom prst="rect">
-            <a:avLst/>
-          </a:prstGeom>
-          <a:noFill/>
-        </p:spPr>
-        <p:txBody>
-          <a:bodyPr wrap="square">
-            <a:spAutoFit/>
-          </a:bodyPr>
-          <a:lstStyle/>
-          <a:p>
-            <a:r>
-              <a:rPr sz="1300" b="1" i="0">
-                <a:solidFill>
-                  <a:srgbClr val="006E96"/>
-                </a:solidFill>
-                <a:latin typeface="Arial"/>
-              </a:rPr>
-              <a:t>PERMANENT PRACTICE</a:t>
-            </a:r>
-          </a:p>
-        </p:txBody>
-      </p:sp>
-      <p:sp>
-        <p:nvSpPr>
-          <p:cNvPr id="7" name="TextBox 6"/>
-          <p:cNvSpPr txBox="1"/>
-          <p:nvPr/>
-        </p:nvSpPr>
-        <p:spPr>
-          <a:xfrm>
-            <a:off x="3017520" y="2706624"/>
-            <a:ext cx="8412480" cy="1051560"/>
-          </a:xfrm>
-          <a:prstGeom prst="rect">
-            <a:avLst/>
-          </a:prstGeom>
-          <a:noFill/>
-        </p:spPr>
-        <p:txBody>
-          <a:bodyPr wrap="square">
-            <a:spAutoFit/>
-          </a:bodyPr>
-          <a:lstStyle/>
-          <a:p>
-            <a:r>
-              <a:rPr sz="1700" b="0" i="0">
-                <a:solidFill>
-                  <a:srgbClr val="1A1A1A"/>
-                </a:solidFill>
-                <a:latin typeface="Arial"/>
-              </a:rPr>
-              <a:t>Your 2 to 4 architects, ongoing</a:t>
-            </a:r>
-          </a:p>
-        </p:txBody>
-      </p:sp>
-      <p:sp>
-        <p:nvSpPr>
-          <p:cNvPr id="8" name="TextBox 7"/>
-          <p:cNvSpPr txBox="1"/>
-          <p:nvPr/>
-        </p:nvSpPr>
-        <p:spPr>
-          <a:xfrm>
-            <a:off x="658368" y="3803904"/>
-            <a:ext cx="2286000" cy="548640"/>
-          </a:xfrm>
-          <a:prstGeom prst="rect">
-            <a:avLst/>
-          </a:prstGeom>
-          <a:noFill/>
-        </p:spPr>
-        <p:txBody>
-          <a:bodyPr wrap="square">
-            <a:spAutoFit/>
-          </a:bodyPr>
-          <a:lstStyle/>
-          <a:p>
-            <a:r>
-              <a:rPr sz="1300" b="1" i="0">
-                <a:solidFill>
-                  <a:srgbClr val="006E96"/>
-                </a:solidFill>
-                <a:latin typeface="Arial"/>
-              </a:rPr>
-              <a:t>GOVERNANCE OVERHEAD</a:t>
-            </a:r>
-          </a:p>
-        </p:txBody>
-      </p:sp>
-      <p:sp>
-        <p:nvSpPr>
-          <p:cNvPr id="9" name="TextBox 8"/>
-          <p:cNvSpPr txBox="1"/>
-          <p:nvPr/>
-        </p:nvSpPr>
-        <p:spPr>
-          <a:xfrm>
-            <a:off x="3017520" y="3785616"/>
-            <a:ext cx="8412480" cy="1051560"/>
-          </a:xfrm>
-          <a:prstGeom prst="rect">
-            <a:avLst/>
-          </a:prstGeom>
-          <a:noFill/>
-        </p:spPr>
-        <p:txBody>
-          <a:bodyPr wrap="square">
-            <a:spAutoFit/>
-          </a:bodyPr>
-          <a:lstStyle/>
-          <a:p>
-            <a:r>
-              <a:rPr sz="1700" b="0" i="0">
-                <a:solidFill>
-                  <a:srgbClr val="1A1A1A"/>
-                </a:solidFill>
-                <a:latin typeface="Arial"/>
-              </a:rPr>
-              <a:t>Board time, occasional external review</a:t>
-            </a:r>
-          </a:p>
-        </p:txBody>
-      </p:sp>
-      <p:sp>
-        <p:nvSpPr>
-          <p:cNvPr id="10" name="TextBox 9"/>
-          <p:cNvSpPr txBox="1"/>
-          <p:nvPr/>
-        </p:nvSpPr>
-        <p:spPr>
-          <a:xfrm>
-            <a:off x="658368" y="4882896"/>
-            <a:ext cx="2286000" cy="548640"/>
-          </a:xfrm>
-          <a:prstGeom prst="rect">
-            <a:avLst/>
-          </a:prstGeom>
-          <a:noFill/>
-        </p:spPr>
-        <p:txBody>
-          <a:bodyPr wrap="square">
-            <a:spAutoFit/>
-          </a:bodyPr>
-          <a:lstStyle/>
-          <a:p>
-            <a:r>
-              <a:rPr sz="1300" b="1" i="0">
-                <a:solidFill>
-                  <a:srgbClr val="006E96"/>
-                </a:solidFill>
-                <a:latin typeface="Arial"/>
-              </a:rPr>
-              <a:t>THE FRAMING</a:t>
-            </a:r>
-          </a:p>
-        </p:txBody>
-      </p:sp>
-      <p:sp>
-        <p:nvSpPr>
-          <p:cNvPr id="11" name="TextBox 10"/>
-          <p:cNvSpPr txBox="1"/>
-          <p:nvPr/>
-        </p:nvSpPr>
-        <p:spPr>
-          <a:xfrm>
-            <a:off x="3017520" y="4864608"/>
-            <a:ext cx="8412480" cy="1051560"/>
-          </a:xfrm>
-          <a:prstGeom prst="rect">
-            <a:avLst/>
-          </a:prstGeom>
-          <a:noFill/>
-        </p:spPr>
-        <p:txBody>
-          <a:bodyPr wrap="square">
-            <a:spAutoFit/>
-          </a:bodyPr>
-          <a:lstStyle/>
-          <a:p>
-            <a:r>
-              <a:rPr sz="1700" b="1" i="0">
-                <a:solidFill>
-                  <a:srgbClr val="1A1A1A"/>
-                </a:solidFill>
-                <a:latin typeface="Arial"/>
-              </a:rPr>
-              <a:t>A five-year envelope, not an annual line that disappears when priorities shift. Every other digital programme runs more efficiently when this 2% is in place.</a:t>
-            </a:r>
-          </a:p>
-        </p:txBody>
-      </p:sp>
-      <p:sp>
-        <p:nvSpPr>
-          <p:cNvPr id="12" name="TextBox 11"/>
-          <p:cNvSpPr txBox="1"/>
-          <p:nvPr/>
-        </p:nvSpPr>
-        <p:spPr>
-          <a:xfrm>
-            <a:off x="457200" y="6473952"/>
-            <a:ext cx="7772400" cy="292608"/>
-          </a:xfrm>
-          <a:prstGeom prst="rect">
-            <a:avLst/>
-          </a:prstGeom>
-          <a:noFill/>
-        </p:spPr>
-        <p:txBody>
-          <a:bodyPr wrap="square">
-            <a:spAutoFit/>
-          </a:bodyPr>
-          <a:lstStyle/>
-          <a:p>
-            <a:r>
-              <a:rPr sz="900" b="0" i="0">
-                <a:solidFill>
-                  <a:srgbClr val="595959"/>
-                </a:solidFill>
-                <a:latin typeface="Arial"/>
-              </a:rPr>
-              <a:t>1.7 · What you will need from your minister</a:t>
-            </a:r>
-          </a:p>
-        </p:txBody>
-      </p:sp>
-    </p:spTree>
-  </p:cSld>
-  <p:clrMapOvr>
-    <a:masterClrMapping/>
-  </p:clrMapOvr>
-</p:sld>
-</file>
-
-<file path=ppt/slides/slide47.xml><?xml version="1.0" encoding="utf-8"?>
-<p:sld xmlns:a="http://schemas.openxmlformats.org/drawingml/2006/main" xmlns:p="http://schemas.openxmlformats.org/presentationml/2006/main" xmlns:r="http://schemas.openxmlformats.org/officeDocument/2006/relationships">
-  <p:cSld>
-    <p:spTree>
-      <p:nvGrpSpPr>
-        <p:cNvPr id="1" name=""/>
-        <p:cNvGrpSpPr/>
-        <p:nvPr/>
-      </p:nvGrpSpPr>
-      <p:grpSpPr/>
-      <p:sp>
-        <p:nvSpPr>
-          <p:cNvPr id="2" name="Rectangle 1"/>
-          <p:cNvSpPr/>
-          <p:nvPr/>
-        </p:nvSpPr>
-        <p:spPr>
-          <a:xfrm>
-            <a:off x="457200" y="384048"/>
-            <a:ext cx="45720" cy="256032"/>
-          </a:xfrm>
-          <a:prstGeom prst="rect">
-            <a:avLst/>
-          </a:prstGeom>
-          <a:solidFill>
-            <a:srgbClr val="009CD6"/>
-          </a:solidFill>
-          <a:ln>
-            <a:noFill/>
-          </a:ln>
-          <a:effectLst/>
-        </p:spPr>
-        <p:style>
-          <a:lnRef idx="1">
-            <a:schemeClr val="accent1"/>
-          </a:lnRef>
-          <a:fillRef idx="3">
-            <a:schemeClr val="accent1"/>
-          </a:fillRef>
-          <a:effectRef idx="2">
-            <a:schemeClr val="accent1"/>
-          </a:effectRef>
-          <a:fontRef idx="minor">
-            <a:schemeClr val="lt1"/>
-          </a:fontRef>
-        </p:style>
-        <p:txBody>
-          <a:bodyPr rtlCol="0" anchor="ctr"/>
-          <a:lstStyle/>
-          <a:p>
-            <a:pPr algn="ctr"/>
-          </a:p>
-        </p:txBody>
-      </p:sp>
-      <p:sp>
-        <p:nvSpPr>
-          <p:cNvPr id="3" name="TextBox 2"/>
-          <p:cNvSpPr txBox="1"/>
-          <p:nvPr/>
-        </p:nvSpPr>
-        <p:spPr>
-          <a:xfrm>
-            <a:off x="621792" y="274320"/>
-            <a:ext cx="11247120" cy="914400"/>
-          </a:xfrm>
-          <a:prstGeom prst="rect">
-            <a:avLst/>
-          </a:prstGeom>
-          <a:noFill/>
-        </p:spPr>
-        <p:txBody>
-          <a:bodyPr wrap="square">
-            <a:spAutoFit/>
-          </a:bodyPr>
-          <a:lstStyle/>
-          <a:p>
-            <a:r>
-              <a:rPr sz="2800" b="1" i="0">
-                <a:solidFill>
-                  <a:srgbClr val="1A1A1A"/>
-                </a:solidFill>
-                <a:latin typeface="Arial"/>
-              </a:rPr>
-              <a:t>Ask 4 — One promise: the team stays protected</a:t>
-            </a:r>
-          </a:p>
-        </p:txBody>
-      </p:sp>
-      <p:sp>
-        <p:nvSpPr>
-          <p:cNvPr id="4" name="Rounded Rectangle 3"/>
-          <p:cNvSpPr/>
-          <p:nvPr/>
-        </p:nvSpPr>
-        <p:spPr>
-          <a:xfrm>
-            <a:off x="658368" y="1645920"/>
-            <a:ext cx="10881360" cy="2377440"/>
-          </a:xfrm>
-          <a:prstGeom prst="roundRect">
-            <a:avLst>
-              <a:gd name="adj" fmla="val 4500"/>
-            </a:avLst>
-          </a:prstGeom>
-          <a:solidFill>
-            <a:srgbClr val="009CD6"/>
-          </a:solidFill>
-          <a:ln>
-            <a:noFill/>
-          </a:ln>
-          <a:effectLst/>
-        </p:spPr>
-        <p:style>
-          <a:lnRef idx="1">
-            <a:schemeClr val="accent1"/>
-          </a:lnRef>
-          <a:fillRef idx="3">
-            <a:schemeClr val="accent1"/>
-          </a:fillRef>
-          <a:effectRef idx="2">
-            <a:schemeClr val="accent1"/>
-          </a:effectRef>
-          <a:fontRef idx="minor">
-            <a:schemeClr val="lt1"/>
-          </a:fontRef>
-        </p:style>
-        <p:txBody>
-          <a:bodyPr rtlCol="0" anchor="ctr"/>
-          <a:lstStyle/>
-          <a:p>
-            <a:pPr algn="ctr"/>
-          </a:p>
-        </p:txBody>
-      </p:sp>
-      <p:sp>
-        <p:nvSpPr>
-          <p:cNvPr id="5" name="TextBox 4"/>
-          <p:cNvSpPr txBox="1"/>
-          <p:nvPr/>
-        </p:nvSpPr>
-        <p:spPr>
-          <a:xfrm>
-            <a:off x="978407" y="1883664"/>
-            <a:ext cx="10241280" cy="2103120"/>
-          </a:xfrm>
-          <a:prstGeom prst="rect">
-            <a:avLst/>
-          </a:prstGeom>
-          <a:noFill/>
-        </p:spPr>
-        <p:txBody>
-          <a:bodyPr wrap="square">
-            <a:spAutoFit/>
-          </a:bodyPr>
-          <a:lstStyle/>
-          <a:p>
-            <a:pPr>
-              <a:spcAft>
-                <a:spcPts val="700"/>
-              </a:spcAft>
-            </a:pPr>
-            <a:r>
-              <a:rPr sz="2400" b="1" i="0">
-                <a:solidFill>
-                  <a:srgbClr val="FFFFFF"/>
-                </a:solidFill>
-                <a:latin typeface="Arial"/>
-              </a:rPr>
-              <a:t>The EA team will not be pulled onto the urgent project of the week.</a:t>
-            </a:r>
-          </a:p>
-          <a:p>
-            <a:pPr>
-              <a:spcAft>
-                <a:spcPts val="700"/>
-              </a:spcAft>
-            </a:pPr>
-            <a:r>
-              <a:rPr sz="1800" b="0" i="0">
-                <a:solidFill>
-                  <a:srgbClr val="FFFFFF"/>
-                </a:solidFill>
-                <a:latin typeface="Arial"/>
-              </a:rPr>
-              <a:t>Not by you. Not by the minister. Not by anyone in cabinet.</a:t>
-            </a:r>
-          </a:p>
-        </p:txBody>
-      </p:sp>
-      <p:sp>
-        <p:nvSpPr>
-          <p:cNvPr id="6" name="TextBox 5"/>
-          <p:cNvSpPr txBox="1"/>
-          <p:nvPr/>
-        </p:nvSpPr>
-        <p:spPr>
-          <a:xfrm>
-            <a:off x="658368" y="4389120"/>
-            <a:ext cx="10881360" cy="1554480"/>
-          </a:xfrm>
-          <a:prstGeom prst="rect">
-            <a:avLst/>
-          </a:prstGeom>
-          <a:noFill/>
-        </p:spPr>
-        <p:txBody>
-          <a:bodyPr wrap="square">
-            <a:spAutoFit/>
-          </a:bodyPr>
-          <a:lstStyle/>
-          <a:p>
-            <a:pPr>
-              <a:spcAft>
-                <a:spcPts val="800"/>
-              </a:spcAft>
-            </a:pPr>
-            <a:r>
-              <a:rPr sz="1800" b="1" i="0">
-                <a:solidFill>
-                  <a:srgbClr val="1A1A1A"/>
-                </a:solidFill>
-                <a:latin typeface="Arial"/>
-              </a:rPr>
-              <a:t>This is the most commonly broken promise — and the one that quietly kills EA programmes in their second year.</a:t>
-            </a:r>
-          </a:p>
-          <a:p>
-            <a:pPr>
-              <a:spcAft>
-                <a:spcPts val="800"/>
-              </a:spcAft>
-            </a:pPr>
-            <a:r>
-              <a:rPr sz="1600" b="0" i="0">
-                <a:solidFill>
-                  <a:srgbClr val="595959"/>
-                </a:solidFill>
-                <a:latin typeface="Arial"/>
-              </a:rPr>
-              <a:t>Get it in writing if you can. Recommit it whenever the minister changes.</a:t>
-            </a:r>
-          </a:p>
-        </p:txBody>
-      </p:sp>
-      <p:sp>
-        <p:nvSpPr>
-          <p:cNvPr id="7" name="TextBox 6"/>
-          <p:cNvSpPr txBox="1"/>
-          <p:nvPr/>
-        </p:nvSpPr>
-        <p:spPr>
-          <a:xfrm>
-            <a:off x="457200" y="6473952"/>
-            <a:ext cx="7772400" cy="292608"/>
-          </a:xfrm>
-          <a:prstGeom prst="rect">
-            <a:avLst/>
-          </a:prstGeom>
-          <a:noFill/>
-        </p:spPr>
-        <p:txBody>
-          <a:bodyPr wrap="square">
-            <a:spAutoFit/>
-          </a:bodyPr>
-          <a:lstStyle/>
-          <a:p>
-            <a:r>
-              <a:rPr sz="900" b="0" i="0">
-                <a:solidFill>
-                  <a:srgbClr val="595959"/>
-                </a:solidFill>
-                <a:latin typeface="Arial"/>
-              </a:rPr>
-              <a:t>1.7 · What you will need from your minister</a:t>
-            </a:r>
-          </a:p>
-        </p:txBody>
-      </p:sp>
-    </p:spTree>
-  </p:cSld>
-  <p:clrMapOvr>
-    <a:masterClrMapping/>
-  </p:clrMapOvr>
-</p:sld>
-</file>
-
-<file path=ppt/slides/slide48.xml><?xml version="1.0" encoding="utf-8"?>
-<p:sld xmlns:a="http://schemas.openxmlformats.org/drawingml/2006/main" xmlns:p="http://schemas.openxmlformats.org/presentationml/2006/main" xmlns:r="http://schemas.openxmlformats.org/officeDocument/2006/relationships">
-  <p:cSld>
-    <p:spTree>
-      <p:nvGrpSpPr>
-        <p:cNvPr id="1" name=""/>
-        <p:cNvGrpSpPr/>
-        <p:nvPr/>
-      </p:nvGrpSpPr>
-      <p:grpSpPr/>
-      <p:sp>
-        <p:nvSpPr>
-          <p:cNvPr id="2" name="Rectangle 1"/>
-          <p:cNvSpPr/>
-          <p:nvPr/>
-        </p:nvSpPr>
-        <p:spPr>
-          <a:xfrm>
-            <a:off x="457200" y="384048"/>
-            <a:ext cx="45720" cy="256032"/>
-          </a:xfrm>
-          <a:prstGeom prst="rect">
-            <a:avLst/>
-          </a:prstGeom>
-          <a:solidFill>
-            <a:srgbClr val="009CD6"/>
-          </a:solidFill>
-          <a:ln>
-            <a:noFill/>
-          </a:ln>
-          <a:effectLst/>
-        </p:spPr>
-        <p:style>
-          <a:lnRef idx="1">
-            <a:schemeClr val="accent1"/>
-          </a:lnRef>
-          <a:fillRef idx="3">
-            <a:schemeClr val="accent1"/>
-          </a:fillRef>
-          <a:effectRef idx="2">
-            <a:schemeClr val="accent1"/>
-          </a:effectRef>
-          <a:fontRef idx="minor">
-            <a:schemeClr val="lt1"/>
-          </a:fontRef>
-        </p:style>
-        <p:txBody>
-          <a:bodyPr rtlCol="0" anchor="ctr"/>
-          <a:lstStyle/>
-          <a:p>
-            <a:pPr algn="ctr"/>
-          </a:p>
-        </p:txBody>
-      </p:sp>
-      <p:sp>
-        <p:nvSpPr>
-          <p:cNvPr id="3" name="TextBox 2"/>
-          <p:cNvSpPr txBox="1"/>
-          <p:nvPr/>
-        </p:nvSpPr>
-        <p:spPr>
-          <a:xfrm>
-            <a:off x="621792" y="274320"/>
-            <a:ext cx="11247120" cy="914400"/>
-          </a:xfrm>
-          <a:prstGeom prst="rect">
-            <a:avLst/>
-          </a:prstGeom>
-          <a:noFill/>
-        </p:spPr>
-        <p:txBody>
-          <a:bodyPr wrap="square">
-            <a:spAutoFit/>
-          </a:bodyPr>
-          <a:lstStyle/>
-          <a:p>
-            <a:r>
-              <a:rPr sz="2800" b="1" i="0">
-                <a:solidFill>
-                  <a:srgbClr val="1A1A1A"/>
-                </a:solidFill>
-                <a:latin typeface="Arial"/>
-              </a:rPr>
-              <a:t>Be honest about the time horizon</a:t>
-            </a:r>
-          </a:p>
-        </p:txBody>
-      </p:sp>
-      <p:sp>
-        <p:nvSpPr>
-          <p:cNvPr id="4" name="TextBox 3"/>
-          <p:cNvSpPr txBox="1"/>
-          <p:nvPr/>
-        </p:nvSpPr>
-        <p:spPr>
-          <a:xfrm>
-            <a:off x="658368" y="1463040"/>
-            <a:ext cx="10984687" cy="1082039"/>
-          </a:xfrm>
-          <a:prstGeom prst="rect">
-            <a:avLst/>
-          </a:prstGeom>
-          <a:noFill/>
-        </p:spPr>
-        <p:txBody>
-          <a:bodyPr wrap="square">
-            <a:spAutoFit/>
-          </a:bodyPr>
-          <a:lstStyle/>
-          <a:p>
-            <a:pPr>
-              <a:spcAft>
-                <a:spcPts val="300"/>
-              </a:spcAft>
-            </a:pPr>
-            <a:r>
-              <a:rPr sz="2400" b="1" i="0">
-                <a:solidFill>
-                  <a:srgbClr val="1A1A1A"/>
-                </a:solidFill>
-                <a:latin typeface="Arial"/>
-              </a:rPr>
-              <a:t>6 months</a:t>
-            </a:r>
-          </a:p>
-          <a:p>
-            <a:pPr>
-              <a:spcAft>
-                <a:spcPts val="300"/>
-              </a:spcAft>
-            </a:pPr>
-            <a:r>
-              <a:rPr sz="1700" b="0" i="0">
-                <a:solidFill>
-                  <a:srgbClr val="595959"/>
-                </a:solidFill>
-                <a:latin typeface="Arial"/>
-              </a:rPr>
-              <a:t>to an approved roadmap</a:t>
-            </a:r>
-          </a:p>
-        </p:txBody>
-      </p:sp>
-      <p:sp>
-        <p:nvSpPr>
-          <p:cNvPr id="5" name="Rectangle 4"/>
-          <p:cNvSpPr/>
-          <p:nvPr/>
-        </p:nvSpPr>
-        <p:spPr>
-          <a:xfrm>
-            <a:off x="621792" y="2549652"/>
-            <a:ext cx="10881360" cy="12700"/>
-          </a:xfrm>
-          <a:prstGeom prst="rect">
-            <a:avLst/>
-          </a:prstGeom>
-          <a:solidFill>
-            <a:srgbClr val="DDECF4"/>
-          </a:solidFill>
-          <a:ln>
-            <a:noFill/>
-          </a:ln>
-          <a:effectLst/>
-        </p:spPr>
-        <p:style>
-          <a:lnRef idx="1">
-            <a:schemeClr val="accent1"/>
-          </a:lnRef>
-          <a:fillRef idx="3">
-            <a:schemeClr val="accent1"/>
-          </a:fillRef>
-          <a:effectRef idx="2">
-            <a:schemeClr val="accent1"/>
-          </a:effectRef>
-          <a:fontRef idx="minor">
-            <a:schemeClr val="lt1"/>
-          </a:fontRef>
-        </p:style>
-        <p:txBody>
-          <a:bodyPr rtlCol="0" anchor="ctr"/>
-          <a:lstStyle/>
-          <a:p>
-            <a:pPr algn="ctr"/>
-          </a:p>
-        </p:txBody>
-      </p:sp>
-      <p:sp>
-        <p:nvSpPr>
-          <p:cNvPr id="6" name="TextBox 5"/>
-          <p:cNvSpPr txBox="1"/>
-          <p:nvPr/>
-        </p:nvSpPr>
-        <p:spPr>
-          <a:xfrm>
-            <a:off x="658368" y="2590799"/>
-            <a:ext cx="10984687" cy="1082039"/>
-          </a:xfrm>
-          <a:prstGeom prst="rect">
-            <a:avLst/>
-          </a:prstGeom>
-          <a:noFill/>
-        </p:spPr>
-        <p:txBody>
-          <a:bodyPr wrap="square">
-            <a:spAutoFit/>
-          </a:bodyPr>
-          <a:lstStyle/>
-          <a:p>
-            <a:pPr>
-              <a:spcAft>
-                <a:spcPts val="300"/>
-              </a:spcAft>
-            </a:pPr>
-            <a:r>
-              <a:rPr sz="2400" b="1" i="0">
-                <a:solidFill>
-                  <a:srgbClr val="1A1A1A"/>
-                </a:solidFill>
-                <a:latin typeface="Arial"/>
-              </a:rPr>
-              <a:t>18 to 24 months</a:t>
-            </a:r>
-          </a:p>
-          <a:p>
-            <a:pPr>
-              <a:spcAft>
-                <a:spcPts val="300"/>
-              </a:spcAft>
-            </a:pPr>
-            <a:r>
-              <a:rPr sz="1700" b="0" i="0">
-                <a:solidFill>
-                  <a:srgbClr val="595959"/>
-                </a:solidFill>
-                <a:latin typeface="Arial"/>
-              </a:rPr>
-              <a:t>to a fully operating practice</a:t>
-            </a:r>
-          </a:p>
-        </p:txBody>
-      </p:sp>
-      <p:sp>
-        <p:nvSpPr>
-          <p:cNvPr id="7" name="Rectangle 6"/>
-          <p:cNvSpPr/>
-          <p:nvPr/>
-        </p:nvSpPr>
-        <p:spPr>
-          <a:xfrm>
-            <a:off x="621792" y="3677412"/>
-            <a:ext cx="10881360" cy="12700"/>
-          </a:xfrm>
-          <a:prstGeom prst="rect">
-            <a:avLst/>
-          </a:prstGeom>
-          <a:solidFill>
-            <a:srgbClr val="DDECF4"/>
-          </a:solidFill>
-          <a:ln>
-            <a:noFill/>
-          </a:ln>
-          <a:effectLst/>
-        </p:spPr>
-        <p:style>
-          <a:lnRef idx="1">
-            <a:schemeClr val="accent1"/>
-          </a:lnRef>
-          <a:fillRef idx="3">
-            <a:schemeClr val="accent1"/>
-          </a:fillRef>
-          <a:effectRef idx="2">
-            <a:schemeClr val="accent1"/>
-          </a:effectRef>
-          <a:fontRef idx="minor">
-            <a:schemeClr val="lt1"/>
-          </a:fontRef>
-        </p:style>
-        <p:txBody>
-          <a:bodyPr rtlCol="0" anchor="ctr"/>
-          <a:lstStyle/>
-          <a:p>
-            <a:pPr algn="ctr"/>
-          </a:p>
-        </p:txBody>
-      </p:sp>
-      <p:sp>
-        <p:nvSpPr>
-          <p:cNvPr id="8" name="TextBox 7"/>
-          <p:cNvSpPr txBox="1"/>
-          <p:nvPr/>
-        </p:nvSpPr>
-        <p:spPr>
-          <a:xfrm>
-            <a:off x="658368" y="3718560"/>
-            <a:ext cx="10984687" cy="1082039"/>
-          </a:xfrm>
-          <a:prstGeom prst="rect">
-            <a:avLst/>
-          </a:prstGeom>
-          <a:noFill/>
-        </p:spPr>
-        <p:txBody>
-          <a:bodyPr wrap="square">
-            <a:spAutoFit/>
-          </a:bodyPr>
-          <a:lstStyle/>
-          <a:p>
-            <a:pPr>
-              <a:spcAft>
-                <a:spcPts val="300"/>
-              </a:spcAft>
-            </a:pPr>
-            <a:r>
-              <a:rPr sz="2400" b="1" i="0">
-                <a:solidFill>
-                  <a:srgbClr val="1A1A1A"/>
-                </a:solidFill>
-                <a:latin typeface="Arial"/>
-              </a:rPr>
-              <a:t>5+ years</a:t>
-            </a:r>
-          </a:p>
-          <a:p>
-            <a:pPr>
-              <a:spcAft>
-                <a:spcPts val="300"/>
-              </a:spcAft>
-            </a:pPr>
-            <a:r>
-              <a:rPr sz="1700" b="0" i="0">
-                <a:solidFill>
-                  <a:srgbClr val="595959"/>
-                </a:solidFill>
-                <a:latin typeface="Arial"/>
-              </a:rPr>
-              <a:t>to mature governance</a:t>
-            </a:r>
-          </a:p>
-        </p:txBody>
-      </p:sp>
-      <p:sp>
-        <p:nvSpPr>
-          <p:cNvPr id="9" name="TextBox 8"/>
-          <p:cNvSpPr txBox="1"/>
-          <p:nvPr/>
-        </p:nvSpPr>
-        <p:spPr>
-          <a:xfrm>
-            <a:off x="658368" y="5029200"/>
-            <a:ext cx="10881360" cy="1188720"/>
-          </a:xfrm>
-          <a:prstGeom prst="rect">
-            <a:avLst/>
-          </a:prstGeom>
-          <a:noFill/>
-        </p:spPr>
-        <p:txBody>
-          <a:bodyPr wrap="square">
-            <a:spAutoFit/>
-          </a:bodyPr>
-          <a:lstStyle/>
-          <a:p>
-            <a:pPr>
-              <a:spcAft>
-                <a:spcPts val="600"/>
-              </a:spcAft>
-            </a:pPr>
-            <a:r>
-              <a:rPr sz="1900" b="1" i="0">
-                <a:solidFill>
-                  <a:srgbClr val="1A1A1A"/>
-                </a:solidFill>
-                <a:latin typeface="Arial"/>
-              </a:rPr>
-              <a:t>The minister who launches this work will not be the one who completes it.</a:t>
-            </a:r>
-          </a:p>
-          <a:p>
-            <a:pPr>
-              <a:spcAft>
-                <a:spcPts val="600"/>
-              </a:spcAft>
-            </a:pPr>
-            <a:r>
-              <a:rPr sz="1500" b="0" i="0">
-                <a:solidFill>
-                  <a:srgbClr val="595959"/>
-                </a:solidFill>
-                <a:latin typeface="Arial"/>
-              </a:rPr>
-              <a:t>A minister who hears that as a problem is sponsoring a deliverable, not an EA. A minister who hears it as a feature is the right minister.</a:t>
-            </a:r>
-          </a:p>
-        </p:txBody>
-      </p:sp>
-      <p:sp>
-        <p:nvSpPr>
-          <p:cNvPr id="10" name="TextBox 9"/>
-          <p:cNvSpPr txBox="1"/>
-          <p:nvPr/>
-        </p:nvSpPr>
-        <p:spPr>
-          <a:xfrm>
-            <a:off x="457200" y="6473952"/>
-            <a:ext cx="7772400" cy="292608"/>
-          </a:xfrm>
-          <a:prstGeom prst="rect">
-            <a:avLst/>
-          </a:prstGeom>
-          <a:noFill/>
-        </p:spPr>
-        <p:txBody>
-          <a:bodyPr wrap="square">
-            <a:spAutoFit/>
-          </a:bodyPr>
-          <a:lstStyle/>
-          <a:p>
-            <a:r>
-              <a:rPr sz="900" b="0" i="0">
-                <a:solidFill>
-                  <a:srgbClr val="595959"/>
-                </a:solidFill>
-                <a:latin typeface="Arial"/>
-              </a:rPr>
-              <a:t>1.7 · What you will need from your minister</a:t>
-            </a:r>
-          </a:p>
-        </p:txBody>
-      </p:sp>
-    </p:spTree>
-  </p:cSld>
-  <p:clrMapOvr>
-    <a:masterClrMapping/>
-  </p:clrMapOvr>
-</p:sld>
-</file>
-
 <file path=ppt/slides/slide49.xml><?xml version="1.0" encoding="utf-8"?>
 <p:sld xmlns:a="http://schemas.openxmlformats.org/drawingml/2006/main" xmlns:p="http://schemas.openxmlformats.org/presentationml/2006/main" xmlns:r="http://schemas.openxmlformats.org/officeDocument/2006/relationships">
   <p:cSld>
@@ -14833,58 +11827,14 @@
       <p:grpSpPr/>
       <p:sp>
         <p:nvSpPr>
-          <p:cNvPr id="2" name="Rectangle 1"/>
-          <p:cNvSpPr/>
-          <p:nvPr/>
-        </p:nvSpPr>
-        <p:spPr>
-          <a:xfrm>
-            <a:off x="457200" y="384048"/>
-            <a:ext cx="45720" cy="256032"/>
-          </a:xfrm>
-          <a:prstGeom prst="rect">
-            <a:avLst/>
-          </a:prstGeom>
-          <a:solidFill>
-            <a:srgbClr val="009CD6"/>
-          </a:solidFill>
-          <a:ln>
-            <a:noFill/>
-          </a:ln>
-          <a:effectLst/>
-        </p:spPr>
-        <p:style>
-          <a:lnRef idx="1">
-            <a:schemeClr val="accent1"/>
-          </a:lnRef>
-          <a:fillRef idx="3">
-            <a:schemeClr val="accent1"/>
-          </a:fillRef>
-          <a:effectRef idx="2">
-            <a:schemeClr val="accent1"/>
-          </a:effectRef>
-          <a:fontRef idx="minor">
-            <a:schemeClr val="lt1"/>
-          </a:fontRef>
-        </p:style>
-        <p:txBody>
-          <a:bodyPr rtlCol="0" anchor="ctr"/>
-          <a:lstStyle/>
-          <a:p>
-            <a:pPr algn="ctr"/>
-          </a:p>
-        </p:txBody>
-      </p:sp>
-      <p:sp>
-        <p:nvSpPr>
-          <p:cNvPr id="3" name="TextBox 2"/>
+          <p:cNvPr id="2" name="TextBox 1"/>
           <p:cNvSpPr txBox="1"/>
           <p:nvPr/>
         </p:nvSpPr>
         <p:spPr>
           <a:xfrm>
-            <a:off x="621792" y="274320"/>
-            <a:ext cx="11247120" cy="914400"/>
+            <a:off x="822960" y="822960"/>
+            <a:ext cx="7315200" cy="457200"/>
           </a:xfrm>
           <a:prstGeom prst="rect">
             <a:avLst/>
@@ -14898,27 +11848,95 @@
           <a:lstStyle/>
           <a:p>
             <a:r>
-              <a:rPr sz="2800" b="1" i="0">
+              <a:rPr sz="1200" b="1" i="0">
+                <a:solidFill>
+                  <a:srgbClr val="595959"/>
+                </a:solidFill>
+                <a:latin typeface="Arial"/>
+              </a:rPr>
+              <a:t>KP1 · MODULE 1 · VIDEO 1.7</a:t>
+            </a:r>
+          </a:p>
+        </p:txBody>
+      </p:sp>
+      <p:sp>
+        <p:nvSpPr>
+          <p:cNvPr id="3" name="TextBox 2"/>
+          <p:cNvSpPr txBox="1"/>
+          <p:nvPr/>
+        </p:nvSpPr>
+        <p:spPr>
+          <a:xfrm>
+            <a:off x="822960" y="1828800"/>
+            <a:ext cx="2011680" cy="1097280"/>
+          </a:xfrm>
+          <a:prstGeom prst="rect">
+            <a:avLst/>
+          </a:prstGeom>
+          <a:noFill/>
+        </p:spPr>
+        <p:txBody>
+          <a:bodyPr wrap="square">
+            <a:spAutoFit/>
+          </a:bodyPr>
+          <a:lstStyle/>
+          <a:p>
+            <a:r>
+              <a:rPr sz="6000" b="1" i="0">
+                <a:solidFill>
+                  <a:srgbClr val="009CD6"/>
+                </a:solidFill>
+                <a:latin typeface="Arial"/>
+              </a:rPr>
+              <a:t>1.7</a:t>
+            </a:r>
+          </a:p>
+        </p:txBody>
+      </p:sp>
+      <p:sp>
+        <p:nvSpPr>
+          <p:cNvPr id="4" name="TextBox 3"/>
+          <p:cNvSpPr txBox="1"/>
+          <p:nvPr/>
+        </p:nvSpPr>
+        <p:spPr>
+          <a:xfrm>
+            <a:off x="822960" y="2880360"/>
+            <a:ext cx="9601200" cy="1371600"/>
+          </a:xfrm>
+          <a:prstGeom prst="rect">
+            <a:avLst/>
+          </a:prstGeom>
+          <a:noFill/>
+        </p:spPr>
+        <p:txBody>
+          <a:bodyPr wrap="square">
+            <a:spAutoFit/>
+          </a:bodyPr>
+          <a:lstStyle/>
+          <a:p>
+            <a:r>
+              <a:rPr sz="3400" b="1" i="0">
                 <a:solidFill>
                   <a:srgbClr val="1A1A1A"/>
                 </a:solidFill>
                 <a:latin typeface="Arial"/>
               </a:rPr>
-              <a:t>Four very different governments have committed to this</a:t>
-            </a:r>
-          </a:p>
-        </p:txBody>
-      </p:sp>
-      <p:sp>
-        <p:nvSpPr>
-          <p:cNvPr id="4" name="TextBox 3"/>
+              <a:t>What you will need from your minister</a:t>
+            </a:r>
+          </a:p>
+        </p:txBody>
+      </p:sp>
+      <p:sp>
+        <p:nvSpPr>
+          <p:cNvPr id="5" name="TextBox 4"/>
           <p:cNvSpPr txBox="1"/>
           <p:nvPr/>
         </p:nvSpPr>
         <p:spPr>
           <a:xfrm>
-            <a:off x="658368" y="1417320"/>
-            <a:ext cx="10984687" cy="1165860"/>
+            <a:off x="822960" y="4343400"/>
+            <a:ext cx="9875520" cy="1554480"/>
           </a:xfrm>
           <a:prstGeom prst="rect">
             <a:avLst/>
@@ -14931,80 +11949,15 @@
           </a:bodyPr>
           <a:lstStyle/>
           <a:p>
-            <a:pPr>
-              <a:spcAft>
-                <a:spcPts val="300"/>
-              </a:spcAft>
-            </a:pPr>
-            <a:r>
-              <a:rPr sz="1800" b="1" i="0">
-                <a:solidFill>
-                  <a:srgbClr val="1A1A1A"/>
-                </a:solidFill>
-                <a:latin typeface="Arial"/>
-              </a:rPr>
-              <a:t>Rwanda — small country, strong centre</a:t>
-            </a:r>
-          </a:p>
-          <a:p>
-            <a:pPr>
-              <a:spcAft>
-                <a:spcPts val="300"/>
-              </a:spcAft>
-            </a:pPr>
-            <a:r>
-              <a:rPr sz="1500" b="0" i="0">
+            <a:r>
+              <a:rPr sz="1700" b="0" i="1">
                 <a:solidFill>
                   <a:srgbClr val="595959"/>
                 </a:solidFill>
                 <a:latin typeface="Arial"/>
               </a:rPr>
-              <a:t>Irembo as the one citizen-services platform; a national ID linked across services.</a:t>
-            </a:r>
-          </a:p>
-        </p:txBody>
-      </p:sp>
-      <p:sp>
-        <p:nvSpPr>
-          <p:cNvPr id="5" name="Rectangle 4"/>
-          <p:cNvSpPr/>
-          <p:nvPr/>
-        </p:nvSpPr>
-        <p:spPr>
-          <a:xfrm>
-            <a:off x="621792" y="2587752"/>
-            <a:ext cx="10881360" cy="12700"/>
-          </a:xfrm>
-          <a:prstGeom prst="rect">
-            <a:avLst/>
-          </a:prstGeom>
-          <a:solidFill>
-            <a:srgbClr val="DDECF4"/>
-          </a:solidFill>
-          <a:ln>
-            <a:noFill/>
-          </a:ln>
-          <a:effectLst/>
-        </p:spPr>
-        <p:style>
-          <a:lnRef idx="1">
-            <a:schemeClr val="accent1"/>
-          </a:lnRef>
-          <a:fillRef idx="3">
-            <a:schemeClr val="accent1"/>
-          </a:fillRef>
-          <a:effectRef idx="2">
-            <a:schemeClr val="accent1"/>
-          </a:effectRef>
-          <a:fontRef idx="minor">
-            <a:schemeClr val="lt1"/>
-          </a:fontRef>
-        </p:style>
-        <p:txBody>
-          <a:bodyPr rtlCol="0" anchor="ctr"/>
-          <a:lstStyle/>
-          <a:p>
-            <a:pPr algn="ctr"/>
+              <a:t>Four asks. A small permanent EA team. An EA Board with real authority. About two per cent of digital budget, sustained for five years. And one promise — that the team will not be pulled onto the urgent project of the week.</a:t>
+            </a:r>
           </a:p>
         </p:txBody>
       </p:sp>
@@ -15016,8 +11969,8 @@
         </p:nvSpPr>
         <p:spPr>
           <a:xfrm>
-            <a:off x="658368" y="2628900"/>
-            <a:ext cx="10984687" cy="1165860"/>
+            <a:off x="822960" y="5989320"/>
+            <a:ext cx="7315200" cy="365760"/>
           </a:xfrm>
           <a:prstGeom prst="rect">
             <a:avLst/>
@@ -15030,267 +11983,14 @@
           </a:bodyPr>
           <a:lstStyle/>
           <a:p>
-            <a:pPr>
-              <a:spcAft>
-                <a:spcPts val="300"/>
-              </a:spcAft>
-            </a:pPr>
-            <a:r>
-              <a:rPr sz="1800" b="1" i="0">
-                <a:solidFill>
-                  <a:srgbClr val="1A1A1A"/>
-                </a:solidFill>
-                <a:latin typeface="Arial"/>
-              </a:rPr>
-              <a:t>Kenya — one-stop centres and a unifying identity programme</a:t>
-            </a:r>
-          </a:p>
-          <a:p>
-            <a:pPr>
-              <a:spcAft>
-                <a:spcPts val="300"/>
-              </a:spcAft>
-            </a:pPr>
-            <a:r>
-              <a:rPr sz="1500" b="0" i="0">
+            <a:r>
+              <a:rPr sz="1200" b="0" i="0">
                 <a:solidFill>
                   <a:srgbClr val="595959"/>
                 </a:solidFill>
                 <a:latin typeface="Arial"/>
               </a:rPr>
-              <a:t>Huduma Centres and Huduma Namba. Results mixed and openly debated — which is what makes the obstacles useful to you.</a:t>
-            </a:r>
-          </a:p>
-        </p:txBody>
-      </p:sp>
-      <p:sp>
-        <p:nvSpPr>
-          <p:cNvPr id="7" name="Rectangle 6"/>
-          <p:cNvSpPr/>
-          <p:nvPr/>
-        </p:nvSpPr>
-        <p:spPr>
-          <a:xfrm>
-            <a:off x="621792" y="3799332"/>
-            <a:ext cx="10881360" cy="12700"/>
-          </a:xfrm>
-          <a:prstGeom prst="rect">
-            <a:avLst/>
-          </a:prstGeom>
-          <a:solidFill>
-            <a:srgbClr val="DDECF4"/>
-          </a:solidFill>
-          <a:ln>
-            <a:noFill/>
-          </a:ln>
-          <a:effectLst/>
-        </p:spPr>
-        <p:style>
-          <a:lnRef idx="1">
-            <a:schemeClr val="accent1"/>
-          </a:lnRef>
-          <a:fillRef idx="3">
-            <a:schemeClr val="accent1"/>
-          </a:fillRef>
-          <a:effectRef idx="2">
-            <a:schemeClr val="accent1"/>
-          </a:effectRef>
-          <a:fontRef idx="minor">
-            <a:schemeClr val="lt1"/>
-          </a:fontRef>
-        </p:style>
-        <p:txBody>
-          <a:bodyPr rtlCol="0" anchor="ctr"/>
-          <a:lstStyle/>
-          <a:p>
-            <a:pPr algn="ctr"/>
-          </a:p>
-        </p:txBody>
-      </p:sp>
-      <p:sp>
-        <p:nvSpPr>
-          <p:cNvPr id="8" name="TextBox 7"/>
-          <p:cNvSpPr txBox="1"/>
-          <p:nvPr/>
-        </p:nvSpPr>
-        <p:spPr>
-          <a:xfrm>
-            <a:off x="658368" y="3840480"/>
-            <a:ext cx="10984687" cy="1165860"/>
-          </a:xfrm>
-          <a:prstGeom prst="rect">
-            <a:avLst/>
-          </a:prstGeom>
-          <a:noFill/>
-        </p:spPr>
-        <p:txBody>
-          <a:bodyPr wrap="square">
-            <a:spAutoFit/>
-          </a:bodyPr>
-          <a:lstStyle/>
-          <a:p>
-            <a:pPr>
-              <a:spcAft>
-                <a:spcPts val="300"/>
-              </a:spcAft>
-            </a:pPr>
-            <a:r>
-              <a:rPr sz="1800" b="1" i="0">
-                <a:solidFill>
-                  <a:srgbClr val="1A1A1A"/>
-                </a:solidFill>
-                <a:latin typeface="Arial"/>
-              </a:rPr>
-              <a:t>South Africa — federal</a:t>
-            </a:r>
-          </a:p>
-          <a:p>
-            <a:pPr>
-              <a:spcAft>
-                <a:spcPts val="300"/>
-              </a:spcAft>
-            </a:pPr>
-            <a:r>
-              <a:rPr sz="1500" b="0" i="0">
-                <a:solidFill>
-                  <a:srgbClr val="595959"/>
-                </a:solidFill>
-                <a:latin typeface="Arial"/>
-              </a:rPr>
-              <a:t>Coordinated through SITA and shared standards that agencies adopt, not a single architecture imposed from the top.</a:t>
-            </a:r>
-          </a:p>
-        </p:txBody>
-      </p:sp>
-      <p:sp>
-        <p:nvSpPr>
-          <p:cNvPr id="9" name="Rectangle 8"/>
-          <p:cNvSpPr/>
-          <p:nvPr/>
-        </p:nvSpPr>
-        <p:spPr>
-          <a:xfrm>
-            <a:off x="621792" y="5010912"/>
-            <a:ext cx="10881360" cy="12700"/>
-          </a:xfrm>
-          <a:prstGeom prst="rect">
-            <a:avLst/>
-          </a:prstGeom>
-          <a:solidFill>
-            <a:srgbClr val="DDECF4"/>
-          </a:solidFill>
-          <a:ln>
-            <a:noFill/>
-          </a:ln>
-          <a:effectLst/>
-        </p:spPr>
-        <p:style>
-          <a:lnRef idx="1">
-            <a:schemeClr val="accent1"/>
-          </a:lnRef>
-          <a:fillRef idx="3">
-            <a:schemeClr val="accent1"/>
-          </a:fillRef>
-          <a:effectRef idx="2">
-            <a:schemeClr val="accent1"/>
-          </a:effectRef>
-          <a:fontRef idx="minor">
-            <a:schemeClr val="lt1"/>
-          </a:fontRef>
-        </p:style>
-        <p:txBody>
-          <a:bodyPr rtlCol="0" anchor="ctr"/>
-          <a:lstStyle/>
-          <a:p>
-            <a:pPr algn="ctr"/>
-          </a:p>
-        </p:txBody>
-      </p:sp>
-      <p:sp>
-        <p:nvSpPr>
-          <p:cNvPr id="10" name="TextBox 9"/>
-          <p:cNvSpPr txBox="1"/>
-          <p:nvPr/>
-        </p:nvSpPr>
-        <p:spPr>
-          <a:xfrm>
-            <a:off x="658368" y="5052059"/>
-            <a:ext cx="10984687" cy="1165860"/>
-          </a:xfrm>
-          <a:prstGeom prst="rect">
-            <a:avLst/>
-          </a:prstGeom>
-          <a:noFill/>
-        </p:spPr>
-        <p:txBody>
-          <a:bodyPr wrap="square">
-            <a:spAutoFit/>
-          </a:bodyPr>
-          <a:lstStyle/>
-          <a:p>
-            <a:pPr>
-              <a:spcAft>
-                <a:spcPts val="300"/>
-              </a:spcAft>
-            </a:pPr>
-            <a:r>
-              <a:rPr sz="1800" b="1" i="0">
-                <a:solidFill>
-                  <a:srgbClr val="1A1A1A"/>
-                </a:solidFill>
-                <a:latin typeface="Arial"/>
-              </a:rPr>
-              <a:t>Estonia — mature</a:t>
-            </a:r>
-          </a:p>
-          <a:p>
-            <a:pPr>
-              <a:spcAft>
-                <a:spcPts val="300"/>
-              </a:spcAft>
-            </a:pPr>
-            <a:r>
-              <a:rPr sz="1500" b="0" i="0">
-                <a:solidFill>
-                  <a:srgbClr val="595959"/>
-                </a:solidFill>
-                <a:latin typeface="Arial"/>
-              </a:rPr>
-              <a:t>Distributed registries on X-Road, the once-only principle, almost every service online. A polestar, not a template.</a:t>
-            </a:r>
-          </a:p>
-        </p:txBody>
-      </p:sp>
-      <p:sp>
-        <p:nvSpPr>
-          <p:cNvPr id="11" name="TextBox 10"/>
-          <p:cNvSpPr txBox="1"/>
-          <p:nvPr/>
-        </p:nvSpPr>
-        <p:spPr>
-          <a:xfrm>
-            <a:off x="457200" y="6473952"/>
-            <a:ext cx="7772400" cy="292608"/>
-          </a:xfrm>
-          <a:prstGeom prst="rect">
-            <a:avLst/>
-          </a:prstGeom>
-          <a:noFill/>
-        </p:spPr>
-        <p:txBody>
-          <a:bodyPr wrap="square">
-            <a:spAutoFit/>
-          </a:bodyPr>
-          <a:lstStyle/>
-          <a:p>
-            <a:r>
-              <a:rPr sz="900" b="0" i="0">
-                <a:solidFill>
-                  <a:srgbClr val="595959"/>
-                </a:solidFill>
-                <a:latin typeface="Arial"/>
-              </a:rPr>
-              <a:t>1.7 · What you will need from your minister</a:t>
+              <a:t>standalone video · voice-over on text slides</a:t>
             </a:r>
           </a:p>
         </p:txBody>
@@ -15315,58 +12015,14 @@
       <p:grpSpPr/>
       <p:sp>
         <p:nvSpPr>
-          <p:cNvPr id="2" name="Rectangle 1"/>
-          <p:cNvSpPr/>
-          <p:nvPr/>
-        </p:nvSpPr>
-        <p:spPr>
-          <a:xfrm>
-            <a:off x="457200" y="384048"/>
-            <a:ext cx="45720" cy="256032"/>
-          </a:xfrm>
-          <a:prstGeom prst="rect">
-            <a:avLst/>
-          </a:prstGeom>
-          <a:solidFill>
-            <a:srgbClr val="009CD6"/>
-          </a:solidFill>
-          <a:ln>
-            <a:noFill/>
-          </a:ln>
-          <a:effectLst/>
-        </p:spPr>
-        <p:style>
-          <a:lnRef idx="1">
-            <a:schemeClr val="accent1"/>
-          </a:lnRef>
-          <a:fillRef idx="3">
-            <a:schemeClr val="accent1"/>
-          </a:fillRef>
-          <a:effectRef idx="2">
-            <a:schemeClr val="accent1"/>
-          </a:effectRef>
-          <a:fontRef idx="minor">
-            <a:schemeClr val="lt1"/>
-          </a:fontRef>
-        </p:style>
-        <p:txBody>
-          <a:bodyPr rtlCol="0" anchor="ctr"/>
-          <a:lstStyle/>
-          <a:p>
-            <a:pPr algn="ctr"/>
-          </a:p>
-        </p:txBody>
-      </p:sp>
-      <p:sp>
-        <p:nvSpPr>
-          <p:cNvPr id="3" name="TextBox 2"/>
+          <p:cNvPr id="2" name="TextBox 1"/>
           <p:cNvSpPr txBox="1"/>
           <p:nvPr/>
         </p:nvSpPr>
         <p:spPr>
           <a:xfrm>
-            <a:off x="621792" y="274320"/>
-            <a:ext cx="11247120" cy="914400"/>
+            <a:off x="1005840" y="1325880"/>
+            <a:ext cx="5486400" cy="365760"/>
           </a:xfrm>
           <a:prstGeom prst="rect">
             <a:avLst/>
@@ -15380,13 +12036,47 @@
           <a:lstStyle/>
           <a:p>
             <a:r>
-              <a:rPr sz="2800" b="1" i="0">
+              <a:rPr sz="1200" b="1" i="0">
+                <a:solidFill>
+                  <a:srgbClr val="006E96"/>
+                </a:solidFill>
+                <a:latin typeface="Arial"/>
+              </a:rPr>
+              <a:t>WHERE WE START</a:t>
+            </a:r>
+          </a:p>
+        </p:txBody>
+      </p:sp>
+      <p:sp>
+        <p:nvSpPr>
+          <p:cNvPr id="3" name="TextBox 2"/>
+          <p:cNvSpPr txBox="1"/>
+          <p:nvPr/>
+        </p:nvSpPr>
+        <p:spPr>
+          <a:xfrm>
+            <a:off x="1005840" y="1783080"/>
+            <a:ext cx="10149840" cy="1737360"/>
+          </a:xfrm>
+          <a:prstGeom prst="rect">
+            <a:avLst/>
+          </a:prstGeom>
+          <a:noFill/>
+        </p:spPr>
+        <p:txBody>
+          <a:bodyPr wrap="square">
+            <a:spAutoFit/>
+          </a:bodyPr>
+          <a:lstStyle/>
+          <a:p>
+            <a:r>
+              <a:rPr sz="3000" b="1" i="0">
                 <a:solidFill>
                   <a:srgbClr val="1A1A1A"/>
                 </a:solidFill>
                 <a:latin typeface="Arial"/>
               </a:rPr>
-              <a:t>The same four elements show in all four</a:t>
+              <a:t>Your minister is convinced. Now the harder part.</a:t>
             </a:r>
           </a:p>
         </p:txBody>
@@ -15399,8 +12089,8 @@
         </p:nvSpPr>
         <p:spPr>
           <a:xfrm>
-            <a:off x="658368" y="1417320"/>
-            <a:ext cx="10984687" cy="1051560"/>
+            <a:off x="1005840" y="3611880"/>
+            <a:ext cx="10149840" cy="2377440"/>
           </a:xfrm>
           <a:prstGeom prst="rect">
             <a:avLst/>
@@ -15415,371 +12105,40 @@
           <a:p>
             <a:pPr>
               <a:spcAft>
-                <a:spcPts val="300"/>
+                <a:spcPts val="800"/>
               </a:spcAft>
             </a:pPr>
             <a:r>
-              <a:rPr sz="1900" b="1" i="0">
-                <a:solidFill>
-                  <a:srgbClr val="1A1A1A"/>
-                </a:solidFill>
-                <a:latin typeface="Arial"/>
-              </a:rPr>
-              <a:t>A small central team with real authority</a:t>
-            </a:r>
-          </a:p>
-          <a:p>
-            <a:pPr>
-              <a:spcAft>
-                <a:spcPts val="300"/>
-              </a:spcAft>
-            </a:pPr>
-            <a:r>
-              <a:rPr sz="1500" b="0" i="0">
+              <a:rPr sz="1700" b="0" i="0">
                 <a:solidFill>
                   <a:srgbClr val="595959"/>
                 </a:solidFill>
                 <a:latin typeface="Arial"/>
               </a:rPr>
-              <a:t>Ask 1 — the small permanent EA team. Rwanda coordinates centrally; South Africa does it through SITA.</a:t>
-            </a:r>
-          </a:p>
-        </p:txBody>
-      </p:sp>
-      <p:sp>
-        <p:nvSpPr>
-          <p:cNvPr id="5" name="Rectangle 4"/>
-          <p:cNvSpPr/>
-          <p:nvPr/>
-        </p:nvSpPr>
-        <p:spPr>
-          <a:xfrm>
-            <a:off x="621792" y="2473452"/>
-            <a:ext cx="10881360" cy="12700"/>
-          </a:xfrm>
-          <a:prstGeom prst="rect">
-            <a:avLst/>
-          </a:prstGeom>
-          <a:solidFill>
-            <a:srgbClr val="DDECF4"/>
-          </a:solidFill>
-          <a:ln>
-            <a:noFill/>
-          </a:ln>
-          <a:effectLst/>
-        </p:spPr>
-        <p:style>
-          <a:lnRef idx="1">
-            <a:schemeClr val="accent1"/>
-          </a:lnRef>
-          <a:fillRef idx="3">
-            <a:schemeClr val="accent1"/>
-          </a:fillRef>
-          <a:effectRef idx="2">
-            <a:schemeClr val="accent1"/>
-          </a:effectRef>
-          <a:fontRef idx="minor">
-            <a:schemeClr val="lt1"/>
-          </a:fontRef>
-        </p:style>
-        <p:txBody>
-          <a:bodyPr rtlCol="0" anchor="ctr"/>
-          <a:lstStyle/>
-          <a:p>
-            <a:pPr algn="ctr"/>
-          </a:p>
-        </p:txBody>
-      </p:sp>
-      <p:sp>
-        <p:nvSpPr>
-          <p:cNvPr id="6" name="TextBox 5"/>
-          <p:cNvSpPr txBox="1"/>
-          <p:nvPr/>
-        </p:nvSpPr>
-        <p:spPr>
-          <a:xfrm>
-            <a:off x="658368" y="2514600"/>
-            <a:ext cx="10984687" cy="1051560"/>
-          </a:xfrm>
-          <a:prstGeom prst="rect">
-            <a:avLst/>
-          </a:prstGeom>
-          <a:noFill/>
-        </p:spPr>
-        <p:txBody>
-          <a:bodyPr wrap="square">
-            <a:spAutoFit/>
-          </a:bodyPr>
-          <a:lstStyle/>
+              <a:t>Four specific things the minister must commit to.</a:t>
+            </a:r>
+          </a:p>
           <a:p>
             <a:pPr>
               <a:spcAft>
-                <a:spcPts val="300"/>
+                <a:spcPts val="800"/>
               </a:spcAft>
             </a:pPr>
             <a:r>
-              <a:rPr sz="1900" b="1" i="0">
-                <a:solidFill>
-                  <a:srgbClr val="1A1A1A"/>
-                </a:solidFill>
-                <a:latin typeface="Arial"/>
-              </a:rPr>
-              <a:t>Binding governance, not advisory</a:t>
-            </a:r>
-          </a:p>
-          <a:p>
-            <a:pPr>
-              <a:spcAft>
-                <a:spcPts val="300"/>
-              </a:spcAft>
-            </a:pPr>
-            <a:r>
-              <a:rPr sz="1500" b="0" i="0">
+              <a:rPr sz="1700" b="0" i="0">
                 <a:solidFill>
                   <a:srgbClr val="595959"/>
                 </a:solidFill>
                 <a:latin typeface="Arial"/>
               </a:rPr>
-              <a:t>Ask 2 — an EA Board whose decisions hold. Where authority cannot be imposed, it is agreed and then binding.</a:t>
-            </a:r>
-          </a:p>
-        </p:txBody>
-      </p:sp>
-      <p:sp>
-        <p:nvSpPr>
-          <p:cNvPr id="7" name="Rectangle 6"/>
-          <p:cNvSpPr/>
-          <p:nvPr/>
-        </p:nvSpPr>
-        <p:spPr>
-          <a:xfrm>
-            <a:off x="621792" y="3570732"/>
-            <a:ext cx="10881360" cy="12700"/>
-          </a:xfrm>
-          <a:prstGeom prst="rect">
-            <a:avLst/>
-          </a:prstGeom>
-          <a:solidFill>
-            <a:srgbClr val="DDECF4"/>
-          </a:solidFill>
-          <a:ln>
-            <a:noFill/>
-          </a:ln>
-          <a:effectLst/>
-        </p:spPr>
-        <p:style>
-          <a:lnRef idx="1">
-            <a:schemeClr val="accent1"/>
-          </a:lnRef>
-          <a:fillRef idx="3">
-            <a:schemeClr val="accent1"/>
-          </a:fillRef>
-          <a:effectRef idx="2">
-            <a:schemeClr val="accent1"/>
-          </a:effectRef>
-          <a:fontRef idx="minor">
-            <a:schemeClr val="lt1"/>
-          </a:fontRef>
-        </p:style>
-        <p:txBody>
-          <a:bodyPr rtlCol="0" anchor="ctr"/>
-          <a:lstStyle/>
-          <a:p>
-            <a:pPr algn="ctr"/>
-          </a:p>
-        </p:txBody>
-      </p:sp>
-      <p:sp>
-        <p:nvSpPr>
-          <p:cNvPr id="8" name="TextBox 7"/>
-          <p:cNvSpPr txBox="1"/>
-          <p:nvPr/>
-        </p:nvSpPr>
-        <p:spPr>
-          <a:xfrm>
-            <a:off x="658368" y="3611880"/>
-            <a:ext cx="10984687" cy="1051560"/>
-          </a:xfrm>
-          <a:prstGeom prst="rect">
-            <a:avLst/>
-          </a:prstGeom>
-          <a:noFill/>
-        </p:spPr>
-        <p:txBody>
-          <a:bodyPr wrap="square">
-            <a:spAutoFit/>
-          </a:bodyPr>
-          <a:lstStyle/>
-          <a:p>
-            <a:pPr>
-              <a:spcAft>
-                <a:spcPts val="300"/>
-              </a:spcAft>
-            </a:pPr>
-            <a:r>
-              <a:rPr sz="1900" b="1" i="0">
-                <a:solidFill>
-                  <a:srgbClr val="1A1A1A"/>
-                </a:solidFill>
-                <a:latin typeface="Arial"/>
-              </a:rPr>
-              <a:t>A published framework other agencies adopt</a:t>
-            </a:r>
-          </a:p>
-          <a:p>
-            <a:pPr>
-              <a:spcAft>
-                <a:spcPts val="300"/>
-              </a:spcAft>
-            </a:pPr>
-            <a:r>
-              <a:rPr sz="1500" b="0" i="0">
-                <a:solidFill>
-                  <a:srgbClr val="595959"/>
-                </a:solidFill>
-                <a:latin typeface="Arial"/>
-              </a:rPr>
-              <a:t>Ask 3 — the sustained envelope. A framework stays adopted only while someone is funded to maintain it.</a:t>
-            </a:r>
-          </a:p>
-        </p:txBody>
-      </p:sp>
-      <p:sp>
-        <p:nvSpPr>
-          <p:cNvPr id="9" name="Rectangle 8"/>
-          <p:cNvSpPr/>
-          <p:nvPr/>
-        </p:nvSpPr>
-        <p:spPr>
-          <a:xfrm>
-            <a:off x="621792" y="4668012"/>
-            <a:ext cx="10881360" cy="12700"/>
-          </a:xfrm>
-          <a:prstGeom prst="rect">
-            <a:avLst/>
-          </a:prstGeom>
-          <a:solidFill>
-            <a:srgbClr val="DDECF4"/>
-          </a:solidFill>
-          <a:ln>
-            <a:noFill/>
-          </a:ln>
-          <a:effectLst/>
-        </p:spPr>
-        <p:style>
-          <a:lnRef idx="1">
-            <a:schemeClr val="accent1"/>
-          </a:lnRef>
-          <a:fillRef idx="3">
-            <a:schemeClr val="accent1"/>
-          </a:fillRef>
-          <a:effectRef idx="2">
-            <a:schemeClr val="accent1"/>
-          </a:effectRef>
-          <a:fontRef idx="minor">
-            <a:schemeClr val="lt1"/>
-          </a:fontRef>
-        </p:style>
-        <p:txBody>
-          <a:bodyPr rtlCol="0" anchor="ctr"/>
-          <a:lstStyle/>
-          <a:p>
-            <a:pPr algn="ctr"/>
-          </a:p>
-        </p:txBody>
-      </p:sp>
-      <p:sp>
-        <p:nvSpPr>
-          <p:cNvPr id="10" name="TextBox 9"/>
-          <p:cNvSpPr txBox="1"/>
-          <p:nvPr/>
-        </p:nvSpPr>
-        <p:spPr>
-          <a:xfrm>
-            <a:off x="658368" y="4709159"/>
-            <a:ext cx="10984687" cy="1051560"/>
-          </a:xfrm>
-          <a:prstGeom prst="rect">
-            <a:avLst/>
-          </a:prstGeom>
-          <a:noFill/>
-        </p:spPr>
-        <p:txBody>
-          <a:bodyPr wrap="square">
-            <a:spAutoFit/>
-          </a:bodyPr>
-          <a:lstStyle/>
-          <a:p>
-            <a:pPr>
-              <a:spcAft>
-                <a:spcPts val="300"/>
-              </a:spcAft>
-            </a:pPr>
-            <a:r>
-              <a:rPr sz="1900" b="1" i="0">
-                <a:solidFill>
-                  <a:srgbClr val="1A1A1A"/>
-                </a:solidFill>
-                <a:latin typeface="Arial"/>
-              </a:rPr>
-              <a:t>A multi-year horizon, results visible in months</a:t>
-            </a:r>
-          </a:p>
-          <a:p>
-            <a:pPr>
-              <a:spcAft>
-                <a:spcPts val="300"/>
-              </a:spcAft>
-            </a:pPr>
-            <a:r>
-              <a:rPr sz="1500" b="0" i="0">
-                <a:solidFill>
-                  <a:srgbClr val="595959"/>
-                </a:solidFill>
-                <a:latin typeface="Arial"/>
-              </a:rPr>
-              <a:t>Ask 4 — the promise. Estonia took two decades; Rwanda showed results inside months. Both protected the team.</a:t>
-            </a:r>
-          </a:p>
-        </p:txBody>
-      </p:sp>
-      <p:sp>
-        <p:nvSpPr>
-          <p:cNvPr id="11" name="TextBox 10"/>
-          <p:cNvSpPr txBox="1"/>
-          <p:nvPr/>
-        </p:nvSpPr>
-        <p:spPr>
-          <a:xfrm>
-            <a:off x="658368" y="5852160"/>
-            <a:ext cx="10881360" cy="457200"/>
-          </a:xfrm>
-          <a:prstGeom prst="rect">
-            <a:avLst/>
-          </a:prstGeom>
-          <a:noFill/>
-        </p:spPr>
-        <p:txBody>
-          <a:bodyPr wrap="square">
-            <a:spAutoFit/>
-          </a:bodyPr>
-          <a:lstStyle/>
-          <a:p>
-            <a:r>
-              <a:rPr sz="1450" b="0" i="0">
-                <a:solidFill>
-                  <a:srgbClr val="595959"/>
-                </a:solidFill>
-                <a:latin typeface="Arial"/>
-              </a:rPr>
-              <a:t>Different sizes, different constitutions — the same four elements, which are the four asks in four real governments.</a:t>
-            </a:r>
-          </a:p>
-        </p:txBody>
-      </p:sp>
-      <p:sp>
-        <p:nvSpPr>
-          <p:cNvPr id="12" name="TextBox 11"/>
+              <a:t>Each one is necessary — without any one of them the EA programme will struggle.</a:t>
+            </a:r>
+          </a:p>
+        </p:txBody>
+      </p:sp>
+      <p:sp>
+        <p:nvSpPr>
+          <p:cNvPr id="5" name="TextBox 4"/>
           <p:cNvSpPr txBox="1"/>
           <p:nvPr/>
         </p:nvSpPr>
@@ -15807,6 +12166,41 @@
                 <a:latin typeface="Arial"/>
               </a:rPr>
               <a:t>1.7 · What you will need from your minister</a:t>
+            </a:r>
+          </a:p>
+        </p:txBody>
+      </p:sp>
+      <p:sp>
+        <p:nvSpPr>
+          <p:cNvPr id="6" name="TextBox 5"/>
+          <p:cNvSpPr txBox="1"/>
+          <p:nvPr/>
+        </p:nvSpPr>
+        <p:spPr>
+          <a:xfrm>
+            <a:off x="10058400" y="6473952"/>
+            <a:ext cx="1673352" cy="292608"/>
+          </a:xfrm>
+          <a:prstGeom prst="rect">
+            <a:avLst/>
+          </a:prstGeom>
+          <a:noFill/>
+        </p:spPr>
+        <p:txBody>
+          <a:bodyPr wrap="square">
+            <a:spAutoFit/>
+          </a:bodyPr>
+          <a:lstStyle/>
+          <a:p>
+            <a:pPr algn="r"/>
+            <a:r>
+              <a:rPr sz="900" b="0" i="0">
+                <a:solidFill>
+                  <a:srgbClr val="595959"/>
+                </a:solidFill>
+                <a:latin typeface="Arial"/>
+              </a:rPr>
+              <a:t>www.itu.int</a:t>
             </a:r>
           </a:p>
         </p:txBody>
@@ -15831,6 +12225,2934 @@
       <p:grpSpPr/>
       <p:sp>
         <p:nvSpPr>
+          <p:cNvPr id="2" name="Rectangle 1"/>
+          <p:cNvSpPr/>
+          <p:nvPr/>
+        </p:nvSpPr>
+        <p:spPr>
+          <a:xfrm>
+            <a:off x="457200" y="384048"/>
+            <a:ext cx="45720" cy="256032"/>
+          </a:xfrm>
+          <a:prstGeom prst="rect">
+            <a:avLst/>
+          </a:prstGeom>
+          <a:solidFill>
+            <a:srgbClr val="009CD6"/>
+          </a:solidFill>
+          <a:ln>
+            <a:noFill/>
+          </a:ln>
+          <a:effectLst/>
+        </p:spPr>
+        <p:style>
+          <a:lnRef idx="1">
+            <a:schemeClr val="accent1"/>
+          </a:lnRef>
+          <a:fillRef idx="3">
+            <a:schemeClr val="accent1"/>
+          </a:fillRef>
+          <a:effectRef idx="2">
+            <a:schemeClr val="accent1"/>
+          </a:effectRef>
+          <a:fontRef idx="minor">
+            <a:schemeClr val="lt1"/>
+          </a:fontRef>
+        </p:style>
+        <p:txBody>
+          <a:bodyPr rtlCol="0" anchor="ctr"/>
+          <a:lstStyle/>
+          <a:p>
+            <a:pPr algn="ctr"/>
+          </a:p>
+        </p:txBody>
+      </p:sp>
+      <p:sp>
+        <p:nvSpPr>
+          <p:cNvPr id="3" name="TextBox 2"/>
+          <p:cNvSpPr txBox="1"/>
+          <p:nvPr/>
+        </p:nvSpPr>
+        <p:spPr>
+          <a:xfrm>
+            <a:off x="621792" y="274320"/>
+            <a:ext cx="11247120" cy="914400"/>
+          </a:xfrm>
+          <a:prstGeom prst="rect">
+            <a:avLst/>
+          </a:prstGeom>
+          <a:noFill/>
+        </p:spPr>
+        <p:txBody>
+          <a:bodyPr wrap="square">
+            <a:spAutoFit/>
+          </a:bodyPr>
+          <a:lstStyle/>
+          <a:p>
+            <a:r>
+              <a:rPr sz="2800" b="1" i="0">
+                <a:solidFill>
+                  <a:srgbClr val="1A1A1A"/>
+                </a:solidFill>
+                <a:latin typeface="Arial"/>
+              </a:rPr>
+              <a:t>Ask 1 — A small permanent EA team</a:t>
+            </a:r>
+          </a:p>
+        </p:txBody>
+      </p:sp>
+      <p:sp>
+        <p:nvSpPr>
+          <p:cNvPr id="4" name="TextBox 3"/>
+          <p:cNvSpPr txBox="1"/>
+          <p:nvPr/>
+        </p:nvSpPr>
+        <p:spPr>
+          <a:xfrm>
+            <a:off x="658368" y="1645920"/>
+            <a:ext cx="2286000" cy="548640"/>
+          </a:xfrm>
+          <a:prstGeom prst="rect">
+            <a:avLst/>
+          </a:prstGeom>
+          <a:noFill/>
+        </p:spPr>
+        <p:txBody>
+          <a:bodyPr wrap="square">
+            <a:spAutoFit/>
+          </a:bodyPr>
+          <a:lstStyle/>
+          <a:p>
+            <a:r>
+              <a:rPr sz="1300" b="1" i="0">
+                <a:solidFill>
+                  <a:srgbClr val="006E96"/>
+                </a:solidFill>
+                <a:latin typeface="Arial"/>
+              </a:rPr>
+              <a:t>SIZE</a:t>
+            </a:r>
+          </a:p>
+        </p:txBody>
+      </p:sp>
+      <p:sp>
+        <p:nvSpPr>
+          <p:cNvPr id="5" name="TextBox 4"/>
+          <p:cNvSpPr txBox="1"/>
+          <p:nvPr/>
+        </p:nvSpPr>
+        <p:spPr>
+          <a:xfrm>
+            <a:off x="3017520" y="1627632"/>
+            <a:ext cx="8412480" cy="1051560"/>
+          </a:xfrm>
+          <a:prstGeom prst="rect">
+            <a:avLst/>
+          </a:prstGeom>
+          <a:noFill/>
+        </p:spPr>
+        <p:txBody>
+          <a:bodyPr wrap="square">
+            <a:spAutoFit/>
+          </a:bodyPr>
+          <a:lstStyle/>
+          <a:p>
+            <a:r>
+              <a:rPr sz="1700" b="0" i="0">
+                <a:solidFill>
+                  <a:srgbClr val="1A1A1A"/>
+                </a:solidFill>
+                <a:latin typeface="Arial"/>
+              </a:rPr>
+              <a:t>2 to 4 senior architects — permanent, reporting to your CDO or equivalent</a:t>
+            </a:r>
+          </a:p>
+        </p:txBody>
+      </p:sp>
+      <p:sp>
+        <p:nvSpPr>
+          <p:cNvPr id="6" name="TextBox 5"/>
+          <p:cNvSpPr txBox="1"/>
+          <p:nvPr/>
+        </p:nvSpPr>
+        <p:spPr>
+          <a:xfrm>
+            <a:off x="658368" y="2724912"/>
+            <a:ext cx="2286000" cy="548640"/>
+          </a:xfrm>
+          <a:prstGeom prst="rect">
+            <a:avLst/>
+          </a:prstGeom>
+          <a:noFill/>
+        </p:spPr>
+        <p:txBody>
+          <a:bodyPr wrap="square">
+            <a:spAutoFit/>
+          </a:bodyPr>
+          <a:lstStyle/>
+          <a:p>
+            <a:r>
+              <a:rPr sz="1300" b="1" i="0">
+                <a:solidFill>
+                  <a:srgbClr val="006E96"/>
+                </a:solidFill>
+                <a:latin typeface="Arial"/>
+              </a:rPr>
+              <a:t>TYPICALLY</a:t>
+            </a:r>
+          </a:p>
+        </p:txBody>
+      </p:sp>
+      <p:sp>
+        <p:nvSpPr>
+          <p:cNvPr id="7" name="TextBox 6"/>
+          <p:cNvSpPr txBox="1"/>
+          <p:nvPr/>
+        </p:nvSpPr>
+        <p:spPr>
+          <a:xfrm>
+            <a:off x="3017520" y="2706624"/>
+            <a:ext cx="8412480" cy="1051560"/>
+          </a:xfrm>
+          <a:prstGeom prst="rect">
+            <a:avLst/>
+          </a:prstGeom>
+          <a:noFill/>
+        </p:spPr>
+        <p:txBody>
+          <a:bodyPr wrap="square">
+            <a:spAutoFit/>
+          </a:bodyPr>
+          <a:lstStyle/>
+          <a:p>
+            <a:r>
+              <a:rPr sz="1700" b="0" i="0">
+                <a:solidFill>
+                  <a:srgbClr val="1A1A1A"/>
+                </a:solidFill>
+                <a:latin typeface="Arial"/>
+              </a:rPr>
+              <a:t>A chief architect, domain architects, a methodology lead. Smaller countries: 2 people, each carrying several domains.</a:t>
+            </a:r>
+          </a:p>
+        </p:txBody>
+      </p:sp>
+      <p:sp>
+        <p:nvSpPr>
+          <p:cNvPr id="8" name="TextBox 7"/>
+          <p:cNvSpPr txBox="1"/>
+          <p:nvPr/>
+        </p:nvSpPr>
+        <p:spPr>
+          <a:xfrm>
+            <a:off x="658368" y="3803904"/>
+            <a:ext cx="2286000" cy="548640"/>
+          </a:xfrm>
+          <a:prstGeom prst="rect">
+            <a:avLst/>
+          </a:prstGeom>
+          <a:noFill/>
+        </p:spPr>
+        <p:txBody>
+          <a:bodyPr wrap="square">
+            <a:spAutoFit/>
+          </a:bodyPr>
+          <a:lstStyle/>
+          <a:p>
+            <a:r>
+              <a:rPr sz="1300" b="1" i="0">
+                <a:solidFill>
+                  <a:srgbClr val="006E96"/>
+                </a:solidFill>
+                <a:latin typeface="Arial"/>
+              </a:rPr>
+              <a:t>NOT</a:t>
+            </a:r>
+          </a:p>
+        </p:txBody>
+      </p:sp>
+      <p:sp>
+        <p:nvSpPr>
+          <p:cNvPr id="9" name="TextBox 8"/>
+          <p:cNvSpPr txBox="1"/>
+          <p:nvPr/>
+        </p:nvSpPr>
+        <p:spPr>
+          <a:xfrm>
+            <a:off x="3017520" y="3785616"/>
+            <a:ext cx="8412480" cy="1051560"/>
+          </a:xfrm>
+          <a:prstGeom prst="rect">
+            <a:avLst/>
+          </a:prstGeom>
+          <a:noFill/>
+        </p:spPr>
+        <p:txBody>
+          <a:bodyPr wrap="square">
+            <a:spAutoFit/>
+          </a:bodyPr>
+          <a:lstStyle/>
+          <a:p>
+            <a:r>
+              <a:rPr sz="1700" b="0" i="0">
+                <a:solidFill>
+                  <a:srgbClr val="1A1A1A"/>
+                </a:solidFill>
+                <a:latin typeface="Arial"/>
+              </a:rPr>
+              <a:t>Consultants. Not a temporary unit.</a:t>
+            </a:r>
+          </a:p>
+        </p:txBody>
+      </p:sp>
+      <p:sp>
+        <p:nvSpPr>
+          <p:cNvPr id="10" name="TextBox 9"/>
+          <p:cNvSpPr txBox="1"/>
+          <p:nvPr/>
+        </p:nvSpPr>
+        <p:spPr>
+          <a:xfrm>
+            <a:off x="658368" y="4882896"/>
+            <a:ext cx="2286000" cy="548640"/>
+          </a:xfrm>
+          <a:prstGeom prst="rect">
+            <a:avLst/>
+          </a:prstGeom>
+          <a:noFill/>
+        </p:spPr>
+        <p:txBody>
+          <a:bodyPr wrap="square">
+            <a:spAutoFit/>
+          </a:bodyPr>
+          <a:lstStyle/>
+          <a:p>
+            <a:r>
+              <a:rPr sz="1300" b="1" i="0">
+                <a:solidFill>
+                  <a:srgbClr val="006E96"/>
+                </a:solidFill>
+                <a:latin typeface="Arial"/>
+              </a:rPr>
+              <a:t>THE POINT</a:t>
+            </a:r>
+          </a:p>
+        </p:txBody>
+      </p:sp>
+      <p:sp>
+        <p:nvSpPr>
+          <p:cNvPr id="11" name="TextBox 10"/>
+          <p:cNvSpPr txBox="1"/>
+          <p:nvPr/>
+        </p:nvSpPr>
+        <p:spPr>
+          <a:xfrm>
+            <a:off x="3017520" y="4864608"/>
+            <a:ext cx="8412480" cy="1051560"/>
+          </a:xfrm>
+          <a:prstGeom prst="rect">
+            <a:avLst/>
+          </a:prstGeom>
+          <a:noFill/>
+        </p:spPr>
+        <p:txBody>
+          <a:bodyPr wrap="square">
+            <a:spAutoFit/>
+          </a:bodyPr>
+          <a:lstStyle/>
+          <a:p>
+            <a:r>
+              <a:rPr sz="1700" b="1" i="0">
+                <a:solidFill>
+                  <a:srgbClr val="1A1A1A"/>
+                </a:solidFill>
+                <a:latin typeface="Arial"/>
+              </a:rPr>
+              <a:t>The institutional home of architecture — it exists whether or not any single programme is running.</a:t>
+            </a:r>
+          </a:p>
+        </p:txBody>
+      </p:sp>
+      <p:sp>
+        <p:nvSpPr>
+          <p:cNvPr id="12" name="TextBox 11"/>
+          <p:cNvSpPr txBox="1"/>
+          <p:nvPr/>
+        </p:nvSpPr>
+        <p:spPr>
+          <a:xfrm>
+            <a:off x="457200" y="6473952"/>
+            <a:ext cx="7772400" cy="292608"/>
+          </a:xfrm>
+          <a:prstGeom prst="rect">
+            <a:avLst/>
+          </a:prstGeom>
+          <a:noFill/>
+        </p:spPr>
+        <p:txBody>
+          <a:bodyPr wrap="square">
+            <a:spAutoFit/>
+          </a:bodyPr>
+          <a:lstStyle/>
+          <a:p>
+            <a:r>
+              <a:rPr sz="900" b="0" i="0">
+                <a:solidFill>
+                  <a:srgbClr val="595959"/>
+                </a:solidFill>
+                <a:latin typeface="Arial"/>
+              </a:rPr>
+              <a:t>1.7 · What you will need from your minister</a:t>
+            </a:r>
+          </a:p>
+        </p:txBody>
+      </p:sp>
+    </p:spTree>
+  </p:cSld>
+  <p:clrMapOvr>
+    <a:masterClrMapping/>
+  </p:clrMapOvr>
+</p:sld>
+</file>
+
+<file path=ppt/slides/slide52.xml><?xml version="1.0" encoding="utf-8"?>
+<p:sld xmlns:a="http://schemas.openxmlformats.org/drawingml/2006/main" xmlns:p="http://schemas.openxmlformats.org/presentationml/2006/main" xmlns:r="http://schemas.openxmlformats.org/officeDocument/2006/relationships">
+  <p:cSld>
+    <p:spTree>
+      <p:nvGrpSpPr>
+        <p:cNvPr id="1" name=""/>
+        <p:cNvGrpSpPr/>
+        <p:nvPr/>
+      </p:nvGrpSpPr>
+      <p:grpSpPr/>
+      <p:sp>
+        <p:nvSpPr>
+          <p:cNvPr id="2" name="Rectangle 1"/>
+          <p:cNvSpPr/>
+          <p:nvPr/>
+        </p:nvSpPr>
+        <p:spPr>
+          <a:xfrm>
+            <a:off x="457200" y="384048"/>
+            <a:ext cx="45720" cy="256032"/>
+          </a:xfrm>
+          <a:prstGeom prst="rect">
+            <a:avLst/>
+          </a:prstGeom>
+          <a:solidFill>
+            <a:srgbClr val="009CD6"/>
+          </a:solidFill>
+          <a:ln>
+            <a:noFill/>
+          </a:ln>
+          <a:effectLst/>
+        </p:spPr>
+        <p:style>
+          <a:lnRef idx="1">
+            <a:schemeClr val="accent1"/>
+          </a:lnRef>
+          <a:fillRef idx="3">
+            <a:schemeClr val="accent1"/>
+          </a:fillRef>
+          <a:effectRef idx="2">
+            <a:schemeClr val="accent1"/>
+          </a:effectRef>
+          <a:fontRef idx="minor">
+            <a:schemeClr val="lt1"/>
+          </a:fontRef>
+        </p:style>
+        <p:txBody>
+          <a:bodyPr rtlCol="0" anchor="ctr"/>
+          <a:lstStyle/>
+          <a:p>
+            <a:pPr algn="ctr"/>
+          </a:p>
+        </p:txBody>
+      </p:sp>
+      <p:sp>
+        <p:nvSpPr>
+          <p:cNvPr id="3" name="TextBox 2"/>
+          <p:cNvSpPr txBox="1"/>
+          <p:nvPr/>
+        </p:nvSpPr>
+        <p:spPr>
+          <a:xfrm>
+            <a:off x="621792" y="274320"/>
+            <a:ext cx="11247120" cy="914400"/>
+          </a:xfrm>
+          <a:prstGeom prst="rect">
+            <a:avLst/>
+          </a:prstGeom>
+          <a:noFill/>
+        </p:spPr>
+        <p:txBody>
+          <a:bodyPr wrap="square">
+            <a:spAutoFit/>
+          </a:bodyPr>
+          <a:lstStyle/>
+          <a:p>
+            <a:r>
+              <a:rPr sz="2800" b="1" i="0">
+                <a:solidFill>
+                  <a:srgbClr val="1A1A1A"/>
+                </a:solidFill>
+                <a:latin typeface="Arial"/>
+              </a:rPr>
+              <a:t>Ask 2 — An EA Board with binding authority</a:t>
+            </a:r>
+          </a:p>
+        </p:txBody>
+      </p:sp>
+      <p:sp>
+        <p:nvSpPr>
+          <p:cNvPr id="4" name="TextBox 3"/>
+          <p:cNvSpPr txBox="1"/>
+          <p:nvPr/>
+        </p:nvSpPr>
+        <p:spPr>
+          <a:xfrm>
+            <a:off x="658368" y="1645920"/>
+            <a:ext cx="2286000" cy="548640"/>
+          </a:xfrm>
+          <a:prstGeom prst="rect">
+            <a:avLst/>
+          </a:prstGeom>
+          <a:noFill/>
+        </p:spPr>
+        <p:txBody>
+          <a:bodyPr wrap="square">
+            <a:spAutoFit/>
+          </a:bodyPr>
+          <a:lstStyle/>
+          <a:p>
+            <a:r>
+              <a:rPr sz="1300" b="1" i="0">
+                <a:solidFill>
+                  <a:srgbClr val="006E96"/>
+                </a:solidFill>
+                <a:latin typeface="Arial"/>
+              </a:rPr>
+              <a:t>CHAIR</a:t>
+            </a:r>
+          </a:p>
+        </p:txBody>
+      </p:sp>
+      <p:sp>
+        <p:nvSpPr>
+          <p:cNvPr id="5" name="TextBox 4"/>
+          <p:cNvSpPr txBox="1"/>
+          <p:nvPr/>
+        </p:nvSpPr>
+        <p:spPr>
+          <a:xfrm>
+            <a:off x="3017520" y="1627632"/>
+            <a:ext cx="8412480" cy="1051560"/>
+          </a:xfrm>
+          <a:prstGeom prst="rect">
+            <a:avLst/>
+          </a:prstGeom>
+          <a:noFill/>
+        </p:spPr>
+        <p:txBody>
+          <a:bodyPr wrap="square">
+            <a:spAutoFit/>
+          </a:bodyPr>
+          <a:lstStyle/>
+          <a:p>
+            <a:r>
+              <a:rPr sz="1700" b="0" i="0">
+                <a:solidFill>
+                  <a:srgbClr val="1A1A1A"/>
+                </a:solidFill>
+                <a:latin typeface="Arial"/>
+              </a:rPr>
+              <a:t>Your CDO — or the minister directly</a:t>
+            </a:r>
+          </a:p>
+        </p:txBody>
+      </p:sp>
+      <p:sp>
+        <p:nvSpPr>
+          <p:cNvPr id="6" name="TextBox 5"/>
+          <p:cNvSpPr txBox="1"/>
+          <p:nvPr/>
+        </p:nvSpPr>
+        <p:spPr>
+          <a:xfrm>
+            <a:off x="658368" y="2724912"/>
+            <a:ext cx="2286000" cy="548640"/>
+          </a:xfrm>
+          <a:prstGeom prst="rect">
+            <a:avLst/>
+          </a:prstGeom>
+          <a:noFill/>
+        </p:spPr>
+        <p:txBody>
+          <a:bodyPr wrap="square">
+            <a:spAutoFit/>
+          </a:bodyPr>
+          <a:lstStyle/>
+          <a:p>
+            <a:r>
+              <a:rPr sz="1300" b="1" i="0">
+                <a:solidFill>
+                  <a:srgbClr val="006E96"/>
+                </a:solidFill>
+                <a:latin typeface="Arial"/>
+              </a:rPr>
+              <a:t>MEMBERS</a:t>
+            </a:r>
+          </a:p>
+        </p:txBody>
+      </p:sp>
+      <p:sp>
+        <p:nvSpPr>
+          <p:cNvPr id="7" name="TextBox 6"/>
+          <p:cNvSpPr txBox="1"/>
+          <p:nvPr/>
+        </p:nvSpPr>
+        <p:spPr>
+          <a:xfrm>
+            <a:off x="3017520" y="2706624"/>
+            <a:ext cx="8412480" cy="1051560"/>
+          </a:xfrm>
+          <a:prstGeom prst="rect">
+            <a:avLst/>
+          </a:prstGeom>
+          <a:noFill/>
+        </p:spPr>
+        <p:txBody>
+          <a:bodyPr wrap="square">
+            <a:spAutoFit/>
+          </a:bodyPr>
+          <a:lstStyle/>
+          <a:p>
+            <a:r>
+              <a:rPr sz="1700" b="0" i="0">
+                <a:solidFill>
+                  <a:srgbClr val="1A1A1A"/>
+                </a:solidFill>
+                <a:latin typeface="Arial"/>
+              </a:rPr>
+              <a:t>Sector ministry CIOs, owners of the major state registers, optionally an external advisor</a:t>
+            </a:r>
+          </a:p>
+        </p:txBody>
+      </p:sp>
+      <p:sp>
+        <p:nvSpPr>
+          <p:cNvPr id="8" name="TextBox 7"/>
+          <p:cNvSpPr txBox="1"/>
+          <p:nvPr/>
+        </p:nvSpPr>
+        <p:spPr>
+          <a:xfrm>
+            <a:off x="658368" y="3803904"/>
+            <a:ext cx="2286000" cy="548640"/>
+          </a:xfrm>
+          <a:prstGeom prst="rect">
+            <a:avLst/>
+          </a:prstGeom>
+          <a:noFill/>
+        </p:spPr>
+        <p:txBody>
+          <a:bodyPr wrap="square">
+            <a:spAutoFit/>
+          </a:bodyPr>
+          <a:lstStyle/>
+          <a:p>
+            <a:r>
+              <a:rPr sz="1300" b="1" i="0">
+                <a:solidFill>
+                  <a:srgbClr val="006E96"/>
+                </a:solidFill>
+                <a:latin typeface="Arial"/>
+              </a:rPr>
+              <a:t>CADENCE</a:t>
+            </a:r>
+          </a:p>
+        </p:txBody>
+      </p:sp>
+      <p:sp>
+        <p:nvSpPr>
+          <p:cNvPr id="9" name="TextBox 8"/>
+          <p:cNvSpPr txBox="1"/>
+          <p:nvPr/>
+        </p:nvSpPr>
+        <p:spPr>
+          <a:xfrm>
+            <a:off x="3017520" y="3785616"/>
+            <a:ext cx="8412480" cy="1051560"/>
+          </a:xfrm>
+          <a:prstGeom prst="rect">
+            <a:avLst/>
+          </a:prstGeom>
+          <a:noFill/>
+        </p:spPr>
+        <p:txBody>
+          <a:bodyPr wrap="square">
+            <a:spAutoFit/>
+          </a:bodyPr>
+          <a:lstStyle/>
+          <a:p>
+            <a:r>
+              <a:rPr sz="1700" b="0" i="0">
+                <a:solidFill>
+                  <a:srgbClr val="1A1A1A"/>
+                </a:solidFill>
+                <a:latin typeface="Arial"/>
+              </a:rPr>
+              <a:t>Quarterly main meetings; ad-hoc for urgent decisions</a:t>
+            </a:r>
+          </a:p>
+        </p:txBody>
+      </p:sp>
+      <p:sp>
+        <p:nvSpPr>
+          <p:cNvPr id="10" name="TextBox 9"/>
+          <p:cNvSpPr txBox="1"/>
+          <p:nvPr/>
+        </p:nvSpPr>
+        <p:spPr>
+          <a:xfrm>
+            <a:off x="658368" y="4882896"/>
+            <a:ext cx="2286000" cy="548640"/>
+          </a:xfrm>
+          <a:prstGeom prst="rect">
+            <a:avLst/>
+          </a:prstGeom>
+          <a:noFill/>
+        </p:spPr>
+        <p:txBody>
+          <a:bodyPr wrap="square">
+            <a:spAutoFit/>
+          </a:bodyPr>
+          <a:lstStyle/>
+          <a:p>
+            <a:r>
+              <a:rPr sz="1300" b="1" i="0">
+                <a:solidFill>
+                  <a:srgbClr val="006E96"/>
+                </a:solidFill>
+                <a:latin typeface="Arial"/>
+              </a:rPr>
+              <a:t>MANDATE</a:t>
+            </a:r>
+          </a:p>
+        </p:txBody>
+      </p:sp>
+      <p:sp>
+        <p:nvSpPr>
+          <p:cNvPr id="11" name="TextBox 10"/>
+          <p:cNvSpPr txBox="1"/>
+          <p:nvPr/>
+        </p:nvSpPr>
+        <p:spPr>
+          <a:xfrm>
+            <a:off x="3017520" y="4864608"/>
+            <a:ext cx="8412480" cy="1051560"/>
+          </a:xfrm>
+          <a:prstGeom prst="rect">
+            <a:avLst/>
+          </a:prstGeom>
+          <a:noFill/>
+        </p:spPr>
+        <p:txBody>
+          <a:bodyPr wrap="square">
+            <a:spAutoFit/>
+          </a:bodyPr>
+          <a:lstStyle/>
+          <a:p>
+            <a:r>
+              <a:rPr sz="1700" b="1" i="0">
+                <a:solidFill>
+                  <a:srgbClr val="1A1A1A"/>
+                </a:solidFill>
+                <a:latin typeface="Arial"/>
+              </a:rPr>
+              <a:t>BINDING — not advisory. Without binding authority, the EA becomes documentation nobody reads.</a:t>
+            </a:r>
+          </a:p>
+        </p:txBody>
+      </p:sp>
+      <p:sp>
+        <p:nvSpPr>
+          <p:cNvPr id="12" name="TextBox 11"/>
+          <p:cNvSpPr txBox="1"/>
+          <p:nvPr/>
+        </p:nvSpPr>
+        <p:spPr>
+          <a:xfrm>
+            <a:off x="457200" y="6473952"/>
+            <a:ext cx="7772400" cy="292608"/>
+          </a:xfrm>
+          <a:prstGeom prst="rect">
+            <a:avLst/>
+          </a:prstGeom>
+          <a:noFill/>
+        </p:spPr>
+        <p:txBody>
+          <a:bodyPr wrap="square">
+            <a:spAutoFit/>
+          </a:bodyPr>
+          <a:lstStyle/>
+          <a:p>
+            <a:r>
+              <a:rPr sz="900" b="0" i="0">
+                <a:solidFill>
+                  <a:srgbClr val="595959"/>
+                </a:solidFill>
+                <a:latin typeface="Arial"/>
+              </a:rPr>
+              <a:t>1.7 · What you will need from your minister</a:t>
+            </a:r>
+          </a:p>
+        </p:txBody>
+      </p:sp>
+    </p:spTree>
+  </p:cSld>
+  <p:clrMapOvr>
+    <a:masterClrMapping/>
+  </p:clrMapOvr>
+</p:sld>
+</file>
+
+<file path=ppt/slides/slide53.xml><?xml version="1.0" encoding="utf-8"?>
+<p:sld xmlns:a="http://schemas.openxmlformats.org/drawingml/2006/main" xmlns:p="http://schemas.openxmlformats.org/presentationml/2006/main" xmlns:r="http://schemas.openxmlformats.org/officeDocument/2006/relationships">
+  <p:cSld>
+    <p:spTree>
+      <p:nvGrpSpPr>
+        <p:cNvPr id="1" name=""/>
+        <p:cNvGrpSpPr/>
+        <p:nvPr/>
+      </p:nvGrpSpPr>
+      <p:grpSpPr/>
+      <p:sp>
+        <p:nvSpPr>
+          <p:cNvPr id="2" name="Rectangle 1"/>
+          <p:cNvSpPr/>
+          <p:nvPr/>
+        </p:nvSpPr>
+        <p:spPr>
+          <a:xfrm>
+            <a:off x="457200" y="384048"/>
+            <a:ext cx="45720" cy="256032"/>
+          </a:xfrm>
+          <a:prstGeom prst="rect">
+            <a:avLst/>
+          </a:prstGeom>
+          <a:solidFill>
+            <a:srgbClr val="009CD6"/>
+          </a:solidFill>
+          <a:ln>
+            <a:noFill/>
+          </a:ln>
+          <a:effectLst/>
+        </p:spPr>
+        <p:style>
+          <a:lnRef idx="1">
+            <a:schemeClr val="accent1"/>
+          </a:lnRef>
+          <a:fillRef idx="3">
+            <a:schemeClr val="accent1"/>
+          </a:fillRef>
+          <a:effectRef idx="2">
+            <a:schemeClr val="accent1"/>
+          </a:effectRef>
+          <a:fontRef idx="minor">
+            <a:schemeClr val="lt1"/>
+          </a:fontRef>
+        </p:style>
+        <p:txBody>
+          <a:bodyPr rtlCol="0" anchor="ctr"/>
+          <a:lstStyle/>
+          <a:p>
+            <a:pPr algn="ctr"/>
+          </a:p>
+        </p:txBody>
+      </p:sp>
+      <p:sp>
+        <p:nvSpPr>
+          <p:cNvPr id="3" name="TextBox 2"/>
+          <p:cNvSpPr txBox="1"/>
+          <p:nvPr/>
+        </p:nvSpPr>
+        <p:spPr>
+          <a:xfrm>
+            <a:off x="621792" y="274320"/>
+            <a:ext cx="11247120" cy="914400"/>
+          </a:xfrm>
+          <a:prstGeom prst="rect">
+            <a:avLst/>
+          </a:prstGeom>
+          <a:noFill/>
+        </p:spPr>
+        <p:txBody>
+          <a:bodyPr wrap="square">
+            <a:spAutoFit/>
+          </a:bodyPr>
+          <a:lstStyle/>
+          <a:p>
+            <a:r>
+              <a:rPr sz="2800" b="1" i="0">
+                <a:solidFill>
+                  <a:srgbClr val="1A1A1A"/>
+                </a:solidFill>
+                <a:latin typeface="Arial"/>
+              </a:rPr>
+              <a:t>Ask 3 — About 2% of digital budget, for five years</a:t>
+            </a:r>
+          </a:p>
+        </p:txBody>
+      </p:sp>
+      <p:sp>
+        <p:nvSpPr>
+          <p:cNvPr id="4" name="TextBox 3"/>
+          <p:cNvSpPr txBox="1"/>
+          <p:nvPr/>
+        </p:nvSpPr>
+        <p:spPr>
+          <a:xfrm>
+            <a:off x="658368" y="1645920"/>
+            <a:ext cx="2286000" cy="548640"/>
+          </a:xfrm>
+          <a:prstGeom prst="rect">
+            <a:avLst/>
+          </a:prstGeom>
+          <a:noFill/>
+        </p:spPr>
+        <p:txBody>
+          <a:bodyPr wrap="square">
+            <a:spAutoFit/>
+          </a:bodyPr>
+          <a:lstStyle/>
+          <a:p>
+            <a:r>
+              <a:rPr sz="1300" b="1" i="0">
+                <a:solidFill>
+                  <a:srgbClr val="006E96"/>
+                </a:solidFill>
+                <a:latin typeface="Arial"/>
+              </a:rPr>
+              <a:t>INITIAL ENGAGEMENT</a:t>
+            </a:r>
+          </a:p>
+        </p:txBody>
+      </p:sp>
+      <p:sp>
+        <p:nvSpPr>
+          <p:cNvPr id="5" name="TextBox 4"/>
+          <p:cNvSpPr txBox="1"/>
+          <p:nvPr/>
+        </p:nvSpPr>
+        <p:spPr>
+          <a:xfrm>
+            <a:off x="3017520" y="1627632"/>
+            <a:ext cx="8412480" cy="1051560"/>
+          </a:xfrm>
+          <a:prstGeom prst="rect">
+            <a:avLst/>
+          </a:prstGeom>
+          <a:noFill/>
+        </p:spPr>
+        <p:txBody>
+          <a:bodyPr wrap="square">
+            <a:spAutoFit/>
+          </a:bodyPr>
+          <a:lstStyle/>
+          <a:p>
+            <a:r>
+              <a:rPr sz="1700" b="0" i="0">
+                <a:solidFill>
+                  <a:srgbClr val="1A1A1A"/>
+                </a:solidFill>
+                <a:latin typeface="Arial"/>
+              </a:rPr>
+              <a:t>The first four phases — about 10 to 15 senior person-months over six months</a:t>
+            </a:r>
+          </a:p>
+        </p:txBody>
+      </p:sp>
+      <p:sp>
+        <p:nvSpPr>
+          <p:cNvPr id="6" name="TextBox 5"/>
+          <p:cNvSpPr txBox="1"/>
+          <p:nvPr/>
+        </p:nvSpPr>
+        <p:spPr>
+          <a:xfrm>
+            <a:off x="658368" y="2724912"/>
+            <a:ext cx="2286000" cy="548640"/>
+          </a:xfrm>
+          <a:prstGeom prst="rect">
+            <a:avLst/>
+          </a:prstGeom>
+          <a:noFill/>
+        </p:spPr>
+        <p:txBody>
+          <a:bodyPr wrap="square">
+            <a:spAutoFit/>
+          </a:bodyPr>
+          <a:lstStyle/>
+          <a:p>
+            <a:r>
+              <a:rPr sz="1300" b="1" i="0">
+                <a:solidFill>
+                  <a:srgbClr val="006E96"/>
+                </a:solidFill>
+                <a:latin typeface="Arial"/>
+              </a:rPr>
+              <a:t>PERMANENT PRACTICE</a:t>
+            </a:r>
+          </a:p>
+        </p:txBody>
+      </p:sp>
+      <p:sp>
+        <p:nvSpPr>
+          <p:cNvPr id="7" name="TextBox 6"/>
+          <p:cNvSpPr txBox="1"/>
+          <p:nvPr/>
+        </p:nvSpPr>
+        <p:spPr>
+          <a:xfrm>
+            <a:off x="3017520" y="2706624"/>
+            <a:ext cx="8412480" cy="1051560"/>
+          </a:xfrm>
+          <a:prstGeom prst="rect">
+            <a:avLst/>
+          </a:prstGeom>
+          <a:noFill/>
+        </p:spPr>
+        <p:txBody>
+          <a:bodyPr wrap="square">
+            <a:spAutoFit/>
+          </a:bodyPr>
+          <a:lstStyle/>
+          <a:p>
+            <a:r>
+              <a:rPr sz="1700" b="0" i="0">
+                <a:solidFill>
+                  <a:srgbClr val="1A1A1A"/>
+                </a:solidFill>
+                <a:latin typeface="Arial"/>
+              </a:rPr>
+              <a:t>Your 2 to 4 architects, ongoing</a:t>
+            </a:r>
+          </a:p>
+        </p:txBody>
+      </p:sp>
+      <p:sp>
+        <p:nvSpPr>
+          <p:cNvPr id="8" name="TextBox 7"/>
+          <p:cNvSpPr txBox="1"/>
+          <p:nvPr/>
+        </p:nvSpPr>
+        <p:spPr>
+          <a:xfrm>
+            <a:off x="658368" y="3803904"/>
+            <a:ext cx="2286000" cy="548640"/>
+          </a:xfrm>
+          <a:prstGeom prst="rect">
+            <a:avLst/>
+          </a:prstGeom>
+          <a:noFill/>
+        </p:spPr>
+        <p:txBody>
+          <a:bodyPr wrap="square">
+            <a:spAutoFit/>
+          </a:bodyPr>
+          <a:lstStyle/>
+          <a:p>
+            <a:r>
+              <a:rPr sz="1300" b="1" i="0">
+                <a:solidFill>
+                  <a:srgbClr val="006E96"/>
+                </a:solidFill>
+                <a:latin typeface="Arial"/>
+              </a:rPr>
+              <a:t>GOVERNANCE OVERHEAD</a:t>
+            </a:r>
+          </a:p>
+        </p:txBody>
+      </p:sp>
+      <p:sp>
+        <p:nvSpPr>
+          <p:cNvPr id="9" name="TextBox 8"/>
+          <p:cNvSpPr txBox="1"/>
+          <p:nvPr/>
+        </p:nvSpPr>
+        <p:spPr>
+          <a:xfrm>
+            <a:off x="3017520" y="3785616"/>
+            <a:ext cx="8412480" cy="1051560"/>
+          </a:xfrm>
+          <a:prstGeom prst="rect">
+            <a:avLst/>
+          </a:prstGeom>
+          <a:noFill/>
+        </p:spPr>
+        <p:txBody>
+          <a:bodyPr wrap="square">
+            <a:spAutoFit/>
+          </a:bodyPr>
+          <a:lstStyle/>
+          <a:p>
+            <a:r>
+              <a:rPr sz="1700" b="0" i="0">
+                <a:solidFill>
+                  <a:srgbClr val="1A1A1A"/>
+                </a:solidFill>
+                <a:latin typeface="Arial"/>
+              </a:rPr>
+              <a:t>Board time, occasional external review</a:t>
+            </a:r>
+          </a:p>
+        </p:txBody>
+      </p:sp>
+      <p:sp>
+        <p:nvSpPr>
+          <p:cNvPr id="10" name="TextBox 9"/>
+          <p:cNvSpPr txBox="1"/>
+          <p:nvPr/>
+        </p:nvSpPr>
+        <p:spPr>
+          <a:xfrm>
+            <a:off x="658368" y="4882896"/>
+            <a:ext cx="2286000" cy="548640"/>
+          </a:xfrm>
+          <a:prstGeom prst="rect">
+            <a:avLst/>
+          </a:prstGeom>
+          <a:noFill/>
+        </p:spPr>
+        <p:txBody>
+          <a:bodyPr wrap="square">
+            <a:spAutoFit/>
+          </a:bodyPr>
+          <a:lstStyle/>
+          <a:p>
+            <a:r>
+              <a:rPr sz="1300" b="1" i="0">
+                <a:solidFill>
+                  <a:srgbClr val="006E96"/>
+                </a:solidFill>
+                <a:latin typeface="Arial"/>
+              </a:rPr>
+              <a:t>THE FRAMING</a:t>
+            </a:r>
+          </a:p>
+        </p:txBody>
+      </p:sp>
+      <p:sp>
+        <p:nvSpPr>
+          <p:cNvPr id="11" name="TextBox 10"/>
+          <p:cNvSpPr txBox="1"/>
+          <p:nvPr/>
+        </p:nvSpPr>
+        <p:spPr>
+          <a:xfrm>
+            <a:off x="3017520" y="4864608"/>
+            <a:ext cx="8412480" cy="1051560"/>
+          </a:xfrm>
+          <a:prstGeom prst="rect">
+            <a:avLst/>
+          </a:prstGeom>
+          <a:noFill/>
+        </p:spPr>
+        <p:txBody>
+          <a:bodyPr wrap="square">
+            <a:spAutoFit/>
+          </a:bodyPr>
+          <a:lstStyle/>
+          <a:p>
+            <a:r>
+              <a:rPr sz="1700" b="1" i="0">
+                <a:solidFill>
+                  <a:srgbClr val="1A1A1A"/>
+                </a:solidFill>
+                <a:latin typeface="Arial"/>
+              </a:rPr>
+              <a:t>A five-year envelope, not an annual line that disappears when priorities shift. Every other digital programme runs more efficiently when this 2% is in place.</a:t>
+            </a:r>
+          </a:p>
+        </p:txBody>
+      </p:sp>
+      <p:sp>
+        <p:nvSpPr>
+          <p:cNvPr id="12" name="TextBox 11"/>
+          <p:cNvSpPr txBox="1"/>
+          <p:nvPr/>
+        </p:nvSpPr>
+        <p:spPr>
+          <a:xfrm>
+            <a:off x="457200" y="6473952"/>
+            <a:ext cx="7772400" cy="292608"/>
+          </a:xfrm>
+          <a:prstGeom prst="rect">
+            <a:avLst/>
+          </a:prstGeom>
+          <a:noFill/>
+        </p:spPr>
+        <p:txBody>
+          <a:bodyPr wrap="square">
+            <a:spAutoFit/>
+          </a:bodyPr>
+          <a:lstStyle/>
+          <a:p>
+            <a:r>
+              <a:rPr sz="900" b="0" i="0">
+                <a:solidFill>
+                  <a:srgbClr val="595959"/>
+                </a:solidFill>
+                <a:latin typeface="Arial"/>
+              </a:rPr>
+              <a:t>1.7 · What you will need from your minister</a:t>
+            </a:r>
+          </a:p>
+        </p:txBody>
+      </p:sp>
+    </p:spTree>
+  </p:cSld>
+  <p:clrMapOvr>
+    <a:masterClrMapping/>
+  </p:clrMapOvr>
+</p:sld>
+</file>
+
+<file path=ppt/slides/slide54.xml><?xml version="1.0" encoding="utf-8"?>
+<p:sld xmlns:a="http://schemas.openxmlformats.org/drawingml/2006/main" xmlns:p="http://schemas.openxmlformats.org/presentationml/2006/main" xmlns:r="http://schemas.openxmlformats.org/officeDocument/2006/relationships">
+  <p:cSld>
+    <p:spTree>
+      <p:nvGrpSpPr>
+        <p:cNvPr id="1" name=""/>
+        <p:cNvGrpSpPr/>
+        <p:nvPr/>
+      </p:nvGrpSpPr>
+      <p:grpSpPr/>
+      <p:sp>
+        <p:nvSpPr>
+          <p:cNvPr id="2" name="Rectangle 1"/>
+          <p:cNvSpPr/>
+          <p:nvPr/>
+        </p:nvSpPr>
+        <p:spPr>
+          <a:xfrm>
+            <a:off x="457200" y="384048"/>
+            <a:ext cx="45720" cy="256032"/>
+          </a:xfrm>
+          <a:prstGeom prst="rect">
+            <a:avLst/>
+          </a:prstGeom>
+          <a:solidFill>
+            <a:srgbClr val="009CD6"/>
+          </a:solidFill>
+          <a:ln>
+            <a:noFill/>
+          </a:ln>
+          <a:effectLst/>
+        </p:spPr>
+        <p:style>
+          <a:lnRef idx="1">
+            <a:schemeClr val="accent1"/>
+          </a:lnRef>
+          <a:fillRef idx="3">
+            <a:schemeClr val="accent1"/>
+          </a:fillRef>
+          <a:effectRef idx="2">
+            <a:schemeClr val="accent1"/>
+          </a:effectRef>
+          <a:fontRef idx="minor">
+            <a:schemeClr val="lt1"/>
+          </a:fontRef>
+        </p:style>
+        <p:txBody>
+          <a:bodyPr rtlCol="0" anchor="ctr"/>
+          <a:lstStyle/>
+          <a:p>
+            <a:pPr algn="ctr"/>
+          </a:p>
+        </p:txBody>
+      </p:sp>
+      <p:sp>
+        <p:nvSpPr>
+          <p:cNvPr id="3" name="TextBox 2"/>
+          <p:cNvSpPr txBox="1"/>
+          <p:nvPr/>
+        </p:nvSpPr>
+        <p:spPr>
+          <a:xfrm>
+            <a:off x="621792" y="274320"/>
+            <a:ext cx="11247120" cy="914400"/>
+          </a:xfrm>
+          <a:prstGeom prst="rect">
+            <a:avLst/>
+          </a:prstGeom>
+          <a:noFill/>
+        </p:spPr>
+        <p:txBody>
+          <a:bodyPr wrap="square">
+            <a:spAutoFit/>
+          </a:bodyPr>
+          <a:lstStyle/>
+          <a:p>
+            <a:r>
+              <a:rPr sz="2800" b="1" i="0">
+                <a:solidFill>
+                  <a:srgbClr val="1A1A1A"/>
+                </a:solidFill>
+                <a:latin typeface="Arial"/>
+              </a:rPr>
+              <a:t>Ask 4 — One promise: the team stays protected</a:t>
+            </a:r>
+          </a:p>
+        </p:txBody>
+      </p:sp>
+      <p:sp>
+        <p:nvSpPr>
+          <p:cNvPr id="4" name="Rounded Rectangle 3"/>
+          <p:cNvSpPr/>
+          <p:nvPr/>
+        </p:nvSpPr>
+        <p:spPr>
+          <a:xfrm>
+            <a:off x="658368" y="1645920"/>
+            <a:ext cx="10881360" cy="2377440"/>
+          </a:xfrm>
+          <a:prstGeom prst="roundRect">
+            <a:avLst>
+              <a:gd name="adj" fmla="val 4500"/>
+            </a:avLst>
+          </a:prstGeom>
+          <a:solidFill>
+            <a:srgbClr val="009CD6"/>
+          </a:solidFill>
+          <a:ln>
+            <a:noFill/>
+          </a:ln>
+          <a:effectLst/>
+        </p:spPr>
+        <p:style>
+          <a:lnRef idx="1">
+            <a:schemeClr val="accent1"/>
+          </a:lnRef>
+          <a:fillRef idx="3">
+            <a:schemeClr val="accent1"/>
+          </a:fillRef>
+          <a:effectRef idx="2">
+            <a:schemeClr val="accent1"/>
+          </a:effectRef>
+          <a:fontRef idx="minor">
+            <a:schemeClr val="lt1"/>
+          </a:fontRef>
+        </p:style>
+        <p:txBody>
+          <a:bodyPr rtlCol="0" anchor="ctr"/>
+          <a:lstStyle/>
+          <a:p>
+            <a:pPr algn="ctr"/>
+          </a:p>
+        </p:txBody>
+      </p:sp>
+      <p:sp>
+        <p:nvSpPr>
+          <p:cNvPr id="5" name="TextBox 4"/>
+          <p:cNvSpPr txBox="1"/>
+          <p:nvPr/>
+        </p:nvSpPr>
+        <p:spPr>
+          <a:xfrm>
+            <a:off x="978407" y="1883664"/>
+            <a:ext cx="10241280" cy="2103120"/>
+          </a:xfrm>
+          <a:prstGeom prst="rect">
+            <a:avLst/>
+          </a:prstGeom>
+          <a:noFill/>
+        </p:spPr>
+        <p:txBody>
+          <a:bodyPr wrap="square">
+            <a:spAutoFit/>
+          </a:bodyPr>
+          <a:lstStyle/>
+          <a:p>
+            <a:pPr>
+              <a:spcAft>
+                <a:spcPts val="700"/>
+              </a:spcAft>
+            </a:pPr>
+            <a:r>
+              <a:rPr sz="2400" b="1" i="0">
+                <a:solidFill>
+                  <a:srgbClr val="FFFFFF"/>
+                </a:solidFill>
+                <a:latin typeface="Arial"/>
+              </a:rPr>
+              <a:t>The EA team will not be pulled onto the urgent project of the week.</a:t>
+            </a:r>
+          </a:p>
+          <a:p>
+            <a:pPr>
+              <a:spcAft>
+                <a:spcPts val="700"/>
+              </a:spcAft>
+            </a:pPr>
+            <a:r>
+              <a:rPr sz="1800" b="0" i="0">
+                <a:solidFill>
+                  <a:srgbClr val="FFFFFF"/>
+                </a:solidFill>
+                <a:latin typeface="Arial"/>
+              </a:rPr>
+              <a:t>Not by you. Not by the minister. Not by anyone in cabinet.</a:t>
+            </a:r>
+          </a:p>
+        </p:txBody>
+      </p:sp>
+      <p:sp>
+        <p:nvSpPr>
+          <p:cNvPr id="6" name="TextBox 5"/>
+          <p:cNvSpPr txBox="1"/>
+          <p:nvPr/>
+        </p:nvSpPr>
+        <p:spPr>
+          <a:xfrm>
+            <a:off x="658368" y="4389120"/>
+            <a:ext cx="10881360" cy="1554480"/>
+          </a:xfrm>
+          <a:prstGeom prst="rect">
+            <a:avLst/>
+          </a:prstGeom>
+          <a:noFill/>
+        </p:spPr>
+        <p:txBody>
+          <a:bodyPr wrap="square">
+            <a:spAutoFit/>
+          </a:bodyPr>
+          <a:lstStyle/>
+          <a:p>
+            <a:pPr>
+              <a:spcAft>
+                <a:spcPts val="800"/>
+              </a:spcAft>
+            </a:pPr>
+            <a:r>
+              <a:rPr sz="1800" b="1" i="0">
+                <a:solidFill>
+                  <a:srgbClr val="1A1A1A"/>
+                </a:solidFill>
+                <a:latin typeface="Arial"/>
+              </a:rPr>
+              <a:t>This is the most commonly broken promise — and the one that quietly kills EA programmes in their second year.</a:t>
+            </a:r>
+          </a:p>
+          <a:p>
+            <a:pPr>
+              <a:spcAft>
+                <a:spcPts val="800"/>
+              </a:spcAft>
+            </a:pPr>
+            <a:r>
+              <a:rPr sz="1600" b="0" i="0">
+                <a:solidFill>
+                  <a:srgbClr val="595959"/>
+                </a:solidFill>
+                <a:latin typeface="Arial"/>
+              </a:rPr>
+              <a:t>Get it in writing if you can. Recommit it whenever the minister changes.</a:t>
+            </a:r>
+          </a:p>
+        </p:txBody>
+      </p:sp>
+      <p:sp>
+        <p:nvSpPr>
+          <p:cNvPr id="7" name="TextBox 6"/>
+          <p:cNvSpPr txBox="1"/>
+          <p:nvPr/>
+        </p:nvSpPr>
+        <p:spPr>
+          <a:xfrm>
+            <a:off x="457200" y="6473952"/>
+            <a:ext cx="7772400" cy="292608"/>
+          </a:xfrm>
+          <a:prstGeom prst="rect">
+            <a:avLst/>
+          </a:prstGeom>
+          <a:noFill/>
+        </p:spPr>
+        <p:txBody>
+          <a:bodyPr wrap="square">
+            <a:spAutoFit/>
+          </a:bodyPr>
+          <a:lstStyle/>
+          <a:p>
+            <a:r>
+              <a:rPr sz="900" b="0" i="0">
+                <a:solidFill>
+                  <a:srgbClr val="595959"/>
+                </a:solidFill>
+                <a:latin typeface="Arial"/>
+              </a:rPr>
+              <a:t>1.7 · What you will need from your minister</a:t>
+            </a:r>
+          </a:p>
+        </p:txBody>
+      </p:sp>
+    </p:spTree>
+  </p:cSld>
+  <p:clrMapOvr>
+    <a:masterClrMapping/>
+  </p:clrMapOvr>
+</p:sld>
+</file>
+
+<file path=ppt/slides/slide55.xml><?xml version="1.0" encoding="utf-8"?>
+<p:sld xmlns:a="http://schemas.openxmlformats.org/drawingml/2006/main" xmlns:p="http://schemas.openxmlformats.org/presentationml/2006/main" xmlns:r="http://schemas.openxmlformats.org/officeDocument/2006/relationships">
+  <p:cSld>
+    <p:spTree>
+      <p:nvGrpSpPr>
+        <p:cNvPr id="1" name=""/>
+        <p:cNvGrpSpPr/>
+        <p:nvPr/>
+      </p:nvGrpSpPr>
+      <p:grpSpPr/>
+      <p:sp>
+        <p:nvSpPr>
+          <p:cNvPr id="2" name="Rectangle 1"/>
+          <p:cNvSpPr/>
+          <p:nvPr/>
+        </p:nvSpPr>
+        <p:spPr>
+          <a:xfrm>
+            <a:off x="457200" y="384048"/>
+            <a:ext cx="45720" cy="256032"/>
+          </a:xfrm>
+          <a:prstGeom prst="rect">
+            <a:avLst/>
+          </a:prstGeom>
+          <a:solidFill>
+            <a:srgbClr val="009CD6"/>
+          </a:solidFill>
+          <a:ln>
+            <a:noFill/>
+          </a:ln>
+          <a:effectLst/>
+        </p:spPr>
+        <p:style>
+          <a:lnRef idx="1">
+            <a:schemeClr val="accent1"/>
+          </a:lnRef>
+          <a:fillRef idx="3">
+            <a:schemeClr val="accent1"/>
+          </a:fillRef>
+          <a:effectRef idx="2">
+            <a:schemeClr val="accent1"/>
+          </a:effectRef>
+          <a:fontRef idx="minor">
+            <a:schemeClr val="lt1"/>
+          </a:fontRef>
+        </p:style>
+        <p:txBody>
+          <a:bodyPr rtlCol="0" anchor="ctr"/>
+          <a:lstStyle/>
+          <a:p>
+            <a:pPr algn="ctr"/>
+          </a:p>
+        </p:txBody>
+      </p:sp>
+      <p:sp>
+        <p:nvSpPr>
+          <p:cNvPr id="3" name="TextBox 2"/>
+          <p:cNvSpPr txBox="1"/>
+          <p:nvPr/>
+        </p:nvSpPr>
+        <p:spPr>
+          <a:xfrm>
+            <a:off x="621792" y="274320"/>
+            <a:ext cx="11247120" cy="914400"/>
+          </a:xfrm>
+          <a:prstGeom prst="rect">
+            <a:avLst/>
+          </a:prstGeom>
+          <a:noFill/>
+        </p:spPr>
+        <p:txBody>
+          <a:bodyPr wrap="square">
+            <a:spAutoFit/>
+          </a:bodyPr>
+          <a:lstStyle/>
+          <a:p>
+            <a:r>
+              <a:rPr sz="2800" b="1" i="0">
+                <a:solidFill>
+                  <a:srgbClr val="1A1A1A"/>
+                </a:solidFill>
+                <a:latin typeface="Arial"/>
+              </a:rPr>
+              <a:t>Be honest about the time horizon</a:t>
+            </a:r>
+          </a:p>
+        </p:txBody>
+      </p:sp>
+      <p:sp>
+        <p:nvSpPr>
+          <p:cNvPr id="4" name="TextBox 3"/>
+          <p:cNvSpPr txBox="1"/>
+          <p:nvPr/>
+        </p:nvSpPr>
+        <p:spPr>
+          <a:xfrm>
+            <a:off x="658368" y="1463040"/>
+            <a:ext cx="10984687" cy="1082039"/>
+          </a:xfrm>
+          <a:prstGeom prst="rect">
+            <a:avLst/>
+          </a:prstGeom>
+          <a:noFill/>
+        </p:spPr>
+        <p:txBody>
+          <a:bodyPr wrap="square">
+            <a:spAutoFit/>
+          </a:bodyPr>
+          <a:lstStyle/>
+          <a:p>
+            <a:pPr>
+              <a:spcAft>
+                <a:spcPts val="300"/>
+              </a:spcAft>
+            </a:pPr>
+            <a:r>
+              <a:rPr sz="2400" b="1" i="0">
+                <a:solidFill>
+                  <a:srgbClr val="1A1A1A"/>
+                </a:solidFill>
+                <a:latin typeface="Arial"/>
+              </a:rPr>
+              <a:t>6 months</a:t>
+            </a:r>
+          </a:p>
+          <a:p>
+            <a:pPr>
+              <a:spcAft>
+                <a:spcPts val="300"/>
+              </a:spcAft>
+            </a:pPr>
+            <a:r>
+              <a:rPr sz="1700" b="0" i="0">
+                <a:solidFill>
+                  <a:srgbClr val="595959"/>
+                </a:solidFill>
+                <a:latin typeface="Arial"/>
+              </a:rPr>
+              <a:t>to an approved roadmap</a:t>
+            </a:r>
+          </a:p>
+        </p:txBody>
+      </p:sp>
+      <p:sp>
+        <p:nvSpPr>
+          <p:cNvPr id="5" name="Rectangle 4"/>
+          <p:cNvSpPr/>
+          <p:nvPr/>
+        </p:nvSpPr>
+        <p:spPr>
+          <a:xfrm>
+            <a:off x="621792" y="2549652"/>
+            <a:ext cx="10881360" cy="12700"/>
+          </a:xfrm>
+          <a:prstGeom prst="rect">
+            <a:avLst/>
+          </a:prstGeom>
+          <a:solidFill>
+            <a:srgbClr val="DDECF4"/>
+          </a:solidFill>
+          <a:ln>
+            <a:noFill/>
+          </a:ln>
+          <a:effectLst/>
+        </p:spPr>
+        <p:style>
+          <a:lnRef idx="1">
+            <a:schemeClr val="accent1"/>
+          </a:lnRef>
+          <a:fillRef idx="3">
+            <a:schemeClr val="accent1"/>
+          </a:fillRef>
+          <a:effectRef idx="2">
+            <a:schemeClr val="accent1"/>
+          </a:effectRef>
+          <a:fontRef idx="minor">
+            <a:schemeClr val="lt1"/>
+          </a:fontRef>
+        </p:style>
+        <p:txBody>
+          <a:bodyPr rtlCol="0" anchor="ctr"/>
+          <a:lstStyle/>
+          <a:p>
+            <a:pPr algn="ctr"/>
+          </a:p>
+        </p:txBody>
+      </p:sp>
+      <p:sp>
+        <p:nvSpPr>
+          <p:cNvPr id="6" name="TextBox 5"/>
+          <p:cNvSpPr txBox="1"/>
+          <p:nvPr/>
+        </p:nvSpPr>
+        <p:spPr>
+          <a:xfrm>
+            <a:off x="658368" y="2590799"/>
+            <a:ext cx="10984687" cy="1082039"/>
+          </a:xfrm>
+          <a:prstGeom prst="rect">
+            <a:avLst/>
+          </a:prstGeom>
+          <a:noFill/>
+        </p:spPr>
+        <p:txBody>
+          <a:bodyPr wrap="square">
+            <a:spAutoFit/>
+          </a:bodyPr>
+          <a:lstStyle/>
+          <a:p>
+            <a:pPr>
+              <a:spcAft>
+                <a:spcPts val="300"/>
+              </a:spcAft>
+            </a:pPr>
+            <a:r>
+              <a:rPr sz="2400" b="1" i="0">
+                <a:solidFill>
+                  <a:srgbClr val="1A1A1A"/>
+                </a:solidFill>
+                <a:latin typeface="Arial"/>
+              </a:rPr>
+              <a:t>18 to 24 months</a:t>
+            </a:r>
+          </a:p>
+          <a:p>
+            <a:pPr>
+              <a:spcAft>
+                <a:spcPts val="300"/>
+              </a:spcAft>
+            </a:pPr>
+            <a:r>
+              <a:rPr sz="1700" b="0" i="0">
+                <a:solidFill>
+                  <a:srgbClr val="595959"/>
+                </a:solidFill>
+                <a:latin typeface="Arial"/>
+              </a:rPr>
+              <a:t>to a fully operating practice</a:t>
+            </a:r>
+          </a:p>
+        </p:txBody>
+      </p:sp>
+      <p:sp>
+        <p:nvSpPr>
+          <p:cNvPr id="7" name="Rectangle 6"/>
+          <p:cNvSpPr/>
+          <p:nvPr/>
+        </p:nvSpPr>
+        <p:spPr>
+          <a:xfrm>
+            <a:off x="621792" y="3677412"/>
+            <a:ext cx="10881360" cy="12700"/>
+          </a:xfrm>
+          <a:prstGeom prst="rect">
+            <a:avLst/>
+          </a:prstGeom>
+          <a:solidFill>
+            <a:srgbClr val="DDECF4"/>
+          </a:solidFill>
+          <a:ln>
+            <a:noFill/>
+          </a:ln>
+          <a:effectLst/>
+        </p:spPr>
+        <p:style>
+          <a:lnRef idx="1">
+            <a:schemeClr val="accent1"/>
+          </a:lnRef>
+          <a:fillRef idx="3">
+            <a:schemeClr val="accent1"/>
+          </a:fillRef>
+          <a:effectRef idx="2">
+            <a:schemeClr val="accent1"/>
+          </a:effectRef>
+          <a:fontRef idx="minor">
+            <a:schemeClr val="lt1"/>
+          </a:fontRef>
+        </p:style>
+        <p:txBody>
+          <a:bodyPr rtlCol="0" anchor="ctr"/>
+          <a:lstStyle/>
+          <a:p>
+            <a:pPr algn="ctr"/>
+          </a:p>
+        </p:txBody>
+      </p:sp>
+      <p:sp>
+        <p:nvSpPr>
+          <p:cNvPr id="8" name="TextBox 7"/>
+          <p:cNvSpPr txBox="1"/>
+          <p:nvPr/>
+        </p:nvSpPr>
+        <p:spPr>
+          <a:xfrm>
+            <a:off x="658368" y="3718560"/>
+            <a:ext cx="10984687" cy="1082039"/>
+          </a:xfrm>
+          <a:prstGeom prst="rect">
+            <a:avLst/>
+          </a:prstGeom>
+          <a:noFill/>
+        </p:spPr>
+        <p:txBody>
+          <a:bodyPr wrap="square">
+            <a:spAutoFit/>
+          </a:bodyPr>
+          <a:lstStyle/>
+          <a:p>
+            <a:pPr>
+              <a:spcAft>
+                <a:spcPts val="300"/>
+              </a:spcAft>
+            </a:pPr>
+            <a:r>
+              <a:rPr sz="2400" b="1" i="0">
+                <a:solidFill>
+                  <a:srgbClr val="1A1A1A"/>
+                </a:solidFill>
+                <a:latin typeface="Arial"/>
+              </a:rPr>
+              <a:t>5+ years</a:t>
+            </a:r>
+          </a:p>
+          <a:p>
+            <a:pPr>
+              <a:spcAft>
+                <a:spcPts val="300"/>
+              </a:spcAft>
+            </a:pPr>
+            <a:r>
+              <a:rPr sz="1700" b="0" i="0">
+                <a:solidFill>
+                  <a:srgbClr val="595959"/>
+                </a:solidFill>
+                <a:latin typeface="Arial"/>
+              </a:rPr>
+              <a:t>to mature governance</a:t>
+            </a:r>
+          </a:p>
+        </p:txBody>
+      </p:sp>
+      <p:sp>
+        <p:nvSpPr>
+          <p:cNvPr id="9" name="TextBox 8"/>
+          <p:cNvSpPr txBox="1"/>
+          <p:nvPr/>
+        </p:nvSpPr>
+        <p:spPr>
+          <a:xfrm>
+            <a:off x="658368" y="5029200"/>
+            <a:ext cx="10881360" cy="1188720"/>
+          </a:xfrm>
+          <a:prstGeom prst="rect">
+            <a:avLst/>
+          </a:prstGeom>
+          <a:noFill/>
+        </p:spPr>
+        <p:txBody>
+          <a:bodyPr wrap="square">
+            <a:spAutoFit/>
+          </a:bodyPr>
+          <a:lstStyle/>
+          <a:p>
+            <a:pPr>
+              <a:spcAft>
+                <a:spcPts val="600"/>
+              </a:spcAft>
+            </a:pPr>
+            <a:r>
+              <a:rPr sz="1900" b="1" i="0">
+                <a:solidFill>
+                  <a:srgbClr val="1A1A1A"/>
+                </a:solidFill>
+                <a:latin typeface="Arial"/>
+              </a:rPr>
+              <a:t>The minister who launches this work will not be the one who completes it.</a:t>
+            </a:r>
+          </a:p>
+          <a:p>
+            <a:pPr>
+              <a:spcAft>
+                <a:spcPts val="600"/>
+              </a:spcAft>
+            </a:pPr>
+            <a:r>
+              <a:rPr sz="1500" b="0" i="0">
+                <a:solidFill>
+                  <a:srgbClr val="595959"/>
+                </a:solidFill>
+                <a:latin typeface="Arial"/>
+              </a:rPr>
+              <a:t>A minister who hears that as a problem is sponsoring a deliverable, not an EA. A minister who hears it as a feature is the right minister.</a:t>
+            </a:r>
+          </a:p>
+        </p:txBody>
+      </p:sp>
+      <p:sp>
+        <p:nvSpPr>
+          <p:cNvPr id="10" name="TextBox 9"/>
+          <p:cNvSpPr txBox="1"/>
+          <p:nvPr/>
+        </p:nvSpPr>
+        <p:spPr>
+          <a:xfrm>
+            <a:off x="457200" y="6473952"/>
+            <a:ext cx="7772400" cy="292608"/>
+          </a:xfrm>
+          <a:prstGeom prst="rect">
+            <a:avLst/>
+          </a:prstGeom>
+          <a:noFill/>
+        </p:spPr>
+        <p:txBody>
+          <a:bodyPr wrap="square">
+            <a:spAutoFit/>
+          </a:bodyPr>
+          <a:lstStyle/>
+          <a:p>
+            <a:r>
+              <a:rPr sz="900" b="0" i="0">
+                <a:solidFill>
+                  <a:srgbClr val="595959"/>
+                </a:solidFill>
+                <a:latin typeface="Arial"/>
+              </a:rPr>
+              <a:t>1.7 · What you will need from your minister</a:t>
+            </a:r>
+          </a:p>
+        </p:txBody>
+      </p:sp>
+    </p:spTree>
+  </p:cSld>
+  <p:clrMapOvr>
+    <a:masterClrMapping/>
+  </p:clrMapOvr>
+</p:sld>
+</file>
+
+<file path=ppt/slides/slide56.xml><?xml version="1.0" encoding="utf-8"?>
+<p:sld xmlns:a="http://schemas.openxmlformats.org/drawingml/2006/main" xmlns:p="http://schemas.openxmlformats.org/presentationml/2006/main" xmlns:r="http://schemas.openxmlformats.org/officeDocument/2006/relationships">
+  <p:cSld>
+    <p:spTree>
+      <p:nvGrpSpPr>
+        <p:cNvPr id="1" name=""/>
+        <p:cNvGrpSpPr/>
+        <p:nvPr/>
+      </p:nvGrpSpPr>
+      <p:grpSpPr/>
+      <p:sp>
+        <p:nvSpPr>
+          <p:cNvPr id="2" name="Rectangle 1"/>
+          <p:cNvSpPr/>
+          <p:nvPr/>
+        </p:nvSpPr>
+        <p:spPr>
+          <a:xfrm>
+            <a:off x="457200" y="384048"/>
+            <a:ext cx="45720" cy="256032"/>
+          </a:xfrm>
+          <a:prstGeom prst="rect">
+            <a:avLst/>
+          </a:prstGeom>
+          <a:solidFill>
+            <a:srgbClr val="009CD6"/>
+          </a:solidFill>
+          <a:ln>
+            <a:noFill/>
+          </a:ln>
+          <a:effectLst/>
+        </p:spPr>
+        <p:style>
+          <a:lnRef idx="1">
+            <a:schemeClr val="accent1"/>
+          </a:lnRef>
+          <a:fillRef idx="3">
+            <a:schemeClr val="accent1"/>
+          </a:fillRef>
+          <a:effectRef idx="2">
+            <a:schemeClr val="accent1"/>
+          </a:effectRef>
+          <a:fontRef idx="minor">
+            <a:schemeClr val="lt1"/>
+          </a:fontRef>
+        </p:style>
+        <p:txBody>
+          <a:bodyPr rtlCol="0" anchor="ctr"/>
+          <a:lstStyle/>
+          <a:p>
+            <a:pPr algn="ctr"/>
+          </a:p>
+        </p:txBody>
+      </p:sp>
+      <p:sp>
+        <p:nvSpPr>
+          <p:cNvPr id="3" name="TextBox 2"/>
+          <p:cNvSpPr txBox="1"/>
+          <p:nvPr/>
+        </p:nvSpPr>
+        <p:spPr>
+          <a:xfrm>
+            <a:off x="621792" y="274320"/>
+            <a:ext cx="11247120" cy="914400"/>
+          </a:xfrm>
+          <a:prstGeom prst="rect">
+            <a:avLst/>
+          </a:prstGeom>
+          <a:noFill/>
+        </p:spPr>
+        <p:txBody>
+          <a:bodyPr wrap="square">
+            <a:spAutoFit/>
+          </a:bodyPr>
+          <a:lstStyle/>
+          <a:p>
+            <a:r>
+              <a:rPr sz="2800" b="1" i="0">
+                <a:solidFill>
+                  <a:srgbClr val="1A1A1A"/>
+                </a:solidFill>
+                <a:latin typeface="Arial"/>
+              </a:rPr>
+              <a:t>Four very different governments have committed to this</a:t>
+            </a:r>
+          </a:p>
+        </p:txBody>
+      </p:sp>
+      <p:sp>
+        <p:nvSpPr>
+          <p:cNvPr id="4" name="TextBox 3"/>
+          <p:cNvSpPr txBox="1"/>
+          <p:nvPr/>
+        </p:nvSpPr>
+        <p:spPr>
+          <a:xfrm>
+            <a:off x="658368" y="1417320"/>
+            <a:ext cx="10984687" cy="1165860"/>
+          </a:xfrm>
+          <a:prstGeom prst="rect">
+            <a:avLst/>
+          </a:prstGeom>
+          <a:noFill/>
+        </p:spPr>
+        <p:txBody>
+          <a:bodyPr wrap="square">
+            <a:spAutoFit/>
+          </a:bodyPr>
+          <a:lstStyle/>
+          <a:p>
+            <a:pPr>
+              <a:spcAft>
+                <a:spcPts val="300"/>
+              </a:spcAft>
+            </a:pPr>
+            <a:r>
+              <a:rPr sz="1800" b="1" i="0">
+                <a:solidFill>
+                  <a:srgbClr val="1A1A1A"/>
+                </a:solidFill>
+                <a:latin typeface="Arial"/>
+              </a:rPr>
+              <a:t>Rwanda — small country, strong centre</a:t>
+            </a:r>
+          </a:p>
+          <a:p>
+            <a:pPr>
+              <a:spcAft>
+                <a:spcPts val="300"/>
+              </a:spcAft>
+            </a:pPr>
+            <a:r>
+              <a:rPr sz="1500" b="0" i="0">
+                <a:solidFill>
+                  <a:srgbClr val="595959"/>
+                </a:solidFill>
+                <a:latin typeface="Arial"/>
+              </a:rPr>
+              <a:t>Irembo as the one citizen-services platform; a national ID linked across services.</a:t>
+            </a:r>
+          </a:p>
+        </p:txBody>
+      </p:sp>
+      <p:sp>
+        <p:nvSpPr>
+          <p:cNvPr id="5" name="Rectangle 4"/>
+          <p:cNvSpPr/>
+          <p:nvPr/>
+        </p:nvSpPr>
+        <p:spPr>
+          <a:xfrm>
+            <a:off x="621792" y="2587752"/>
+            <a:ext cx="10881360" cy="12700"/>
+          </a:xfrm>
+          <a:prstGeom prst="rect">
+            <a:avLst/>
+          </a:prstGeom>
+          <a:solidFill>
+            <a:srgbClr val="DDECF4"/>
+          </a:solidFill>
+          <a:ln>
+            <a:noFill/>
+          </a:ln>
+          <a:effectLst/>
+        </p:spPr>
+        <p:style>
+          <a:lnRef idx="1">
+            <a:schemeClr val="accent1"/>
+          </a:lnRef>
+          <a:fillRef idx="3">
+            <a:schemeClr val="accent1"/>
+          </a:fillRef>
+          <a:effectRef idx="2">
+            <a:schemeClr val="accent1"/>
+          </a:effectRef>
+          <a:fontRef idx="minor">
+            <a:schemeClr val="lt1"/>
+          </a:fontRef>
+        </p:style>
+        <p:txBody>
+          <a:bodyPr rtlCol="0" anchor="ctr"/>
+          <a:lstStyle/>
+          <a:p>
+            <a:pPr algn="ctr"/>
+          </a:p>
+        </p:txBody>
+      </p:sp>
+      <p:sp>
+        <p:nvSpPr>
+          <p:cNvPr id="6" name="TextBox 5"/>
+          <p:cNvSpPr txBox="1"/>
+          <p:nvPr/>
+        </p:nvSpPr>
+        <p:spPr>
+          <a:xfrm>
+            <a:off x="658368" y="2628900"/>
+            <a:ext cx="10984687" cy="1165860"/>
+          </a:xfrm>
+          <a:prstGeom prst="rect">
+            <a:avLst/>
+          </a:prstGeom>
+          <a:noFill/>
+        </p:spPr>
+        <p:txBody>
+          <a:bodyPr wrap="square">
+            <a:spAutoFit/>
+          </a:bodyPr>
+          <a:lstStyle/>
+          <a:p>
+            <a:pPr>
+              <a:spcAft>
+                <a:spcPts val="300"/>
+              </a:spcAft>
+            </a:pPr>
+            <a:r>
+              <a:rPr sz="1800" b="1" i="0">
+                <a:solidFill>
+                  <a:srgbClr val="1A1A1A"/>
+                </a:solidFill>
+                <a:latin typeface="Arial"/>
+              </a:rPr>
+              <a:t>Kenya — one-stop centres and a unifying identity programme</a:t>
+            </a:r>
+          </a:p>
+          <a:p>
+            <a:pPr>
+              <a:spcAft>
+                <a:spcPts val="300"/>
+              </a:spcAft>
+            </a:pPr>
+            <a:r>
+              <a:rPr sz="1500" b="0" i="0">
+                <a:solidFill>
+                  <a:srgbClr val="595959"/>
+                </a:solidFill>
+                <a:latin typeface="Arial"/>
+              </a:rPr>
+              <a:t>Huduma Centres and Huduma Namba. Results mixed and openly debated — which is what makes the obstacles useful to you.</a:t>
+            </a:r>
+          </a:p>
+        </p:txBody>
+      </p:sp>
+      <p:sp>
+        <p:nvSpPr>
+          <p:cNvPr id="7" name="Rectangle 6"/>
+          <p:cNvSpPr/>
+          <p:nvPr/>
+        </p:nvSpPr>
+        <p:spPr>
+          <a:xfrm>
+            <a:off x="621792" y="3799332"/>
+            <a:ext cx="10881360" cy="12700"/>
+          </a:xfrm>
+          <a:prstGeom prst="rect">
+            <a:avLst/>
+          </a:prstGeom>
+          <a:solidFill>
+            <a:srgbClr val="DDECF4"/>
+          </a:solidFill>
+          <a:ln>
+            <a:noFill/>
+          </a:ln>
+          <a:effectLst/>
+        </p:spPr>
+        <p:style>
+          <a:lnRef idx="1">
+            <a:schemeClr val="accent1"/>
+          </a:lnRef>
+          <a:fillRef idx="3">
+            <a:schemeClr val="accent1"/>
+          </a:fillRef>
+          <a:effectRef idx="2">
+            <a:schemeClr val="accent1"/>
+          </a:effectRef>
+          <a:fontRef idx="minor">
+            <a:schemeClr val="lt1"/>
+          </a:fontRef>
+        </p:style>
+        <p:txBody>
+          <a:bodyPr rtlCol="0" anchor="ctr"/>
+          <a:lstStyle/>
+          <a:p>
+            <a:pPr algn="ctr"/>
+          </a:p>
+        </p:txBody>
+      </p:sp>
+      <p:sp>
+        <p:nvSpPr>
+          <p:cNvPr id="8" name="TextBox 7"/>
+          <p:cNvSpPr txBox="1"/>
+          <p:nvPr/>
+        </p:nvSpPr>
+        <p:spPr>
+          <a:xfrm>
+            <a:off x="658368" y="3840480"/>
+            <a:ext cx="10984687" cy="1165860"/>
+          </a:xfrm>
+          <a:prstGeom prst="rect">
+            <a:avLst/>
+          </a:prstGeom>
+          <a:noFill/>
+        </p:spPr>
+        <p:txBody>
+          <a:bodyPr wrap="square">
+            <a:spAutoFit/>
+          </a:bodyPr>
+          <a:lstStyle/>
+          <a:p>
+            <a:pPr>
+              <a:spcAft>
+                <a:spcPts val="300"/>
+              </a:spcAft>
+            </a:pPr>
+            <a:r>
+              <a:rPr sz="1800" b="1" i="0">
+                <a:solidFill>
+                  <a:srgbClr val="1A1A1A"/>
+                </a:solidFill>
+                <a:latin typeface="Arial"/>
+              </a:rPr>
+              <a:t>South Africa — federal</a:t>
+            </a:r>
+          </a:p>
+          <a:p>
+            <a:pPr>
+              <a:spcAft>
+                <a:spcPts val="300"/>
+              </a:spcAft>
+            </a:pPr>
+            <a:r>
+              <a:rPr sz="1500" b="0" i="0">
+                <a:solidFill>
+                  <a:srgbClr val="595959"/>
+                </a:solidFill>
+                <a:latin typeface="Arial"/>
+              </a:rPr>
+              <a:t>Coordinated through SITA and shared standards that agencies adopt, not a single architecture imposed from the top.</a:t>
+            </a:r>
+          </a:p>
+        </p:txBody>
+      </p:sp>
+      <p:sp>
+        <p:nvSpPr>
+          <p:cNvPr id="9" name="Rectangle 8"/>
+          <p:cNvSpPr/>
+          <p:nvPr/>
+        </p:nvSpPr>
+        <p:spPr>
+          <a:xfrm>
+            <a:off x="621792" y="5010912"/>
+            <a:ext cx="10881360" cy="12700"/>
+          </a:xfrm>
+          <a:prstGeom prst="rect">
+            <a:avLst/>
+          </a:prstGeom>
+          <a:solidFill>
+            <a:srgbClr val="DDECF4"/>
+          </a:solidFill>
+          <a:ln>
+            <a:noFill/>
+          </a:ln>
+          <a:effectLst/>
+        </p:spPr>
+        <p:style>
+          <a:lnRef idx="1">
+            <a:schemeClr val="accent1"/>
+          </a:lnRef>
+          <a:fillRef idx="3">
+            <a:schemeClr val="accent1"/>
+          </a:fillRef>
+          <a:effectRef idx="2">
+            <a:schemeClr val="accent1"/>
+          </a:effectRef>
+          <a:fontRef idx="minor">
+            <a:schemeClr val="lt1"/>
+          </a:fontRef>
+        </p:style>
+        <p:txBody>
+          <a:bodyPr rtlCol="0" anchor="ctr"/>
+          <a:lstStyle/>
+          <a:p>
+            <a:pPr algn="ctr"/>
+          </a:p>
+        </p:txBody>
+      </p:sp>
+      <p:sp>
+        <p:nvSpPr>
+          <p:cNvPr id="10" name="TextBox 9"/>
+          <p:cNvSpPr txBox="1"/>
+          <p:nvPr/>
+        </p:nvSpPr>
+        <p:spPr>
+          <a:xfrm>
+            <a:off x="658368" y="5052059"/>
+            <a:ext cx="10984687" cy="1165860"/>
+          </a:xfrm>
+          <a:prstGeom prst="rect">
+            <a:avLst/>
+          </a:prstGeom>
+          <a:noFill/>
+        </p:spPr>
+        <p:txBody>
+          <a:bodyPr wrap="square">
+            <a:spAutoFit/>
+          </a:bodyPr>
+          <a:lstStyle/>
+          <a:p>
+            <a:pPr>
+              <a:spcAft>
+                <a:spcPts val="300"/>
+              </a:spcAft>
+            </a:pPr>
+            <a:r>
+              <a:rPr sz="1800" b="1" i="0">
+                <a:solidFill>
+                  <a:srgbClr val="1A1A1A"/>
+                </a:solidFill>
+                <a:latin typeface="Arial"/>
+              </a:rPr>
+              <a:t>Estonia — mature</a:t>
+            </a:r>
+          </a:p>
+          <a:p>
+            <a:pPr>
+              <a:spcAft>
+                <a:spcPts val="300"/>
+              </a:spcAft>
+            </a:pPr>
+            <a:r>
+              <a:rPr sz="1500" b="0" i="0">
+                <a:solidFill>
+                  <a:srgbClr val="595959"/>
+                </a:solidFill>
+                <a:latin typeface="Arial"/>
+              </a:rPr>
+              <a:t>Distributed registries on X-Road, the once-only principle, almost every service online. A polestar, not a template.</a:t>
+            </a:r>
+          </a:p>
+        </p:txBody>
+      </p:sp>
+      <p:sp>
+        <p:nvSpPr>
+          <p:cNvPr id="11" name="TextBox 10"/>
+          <p:cNvSpPr txBox="1"/>
+          <p:nvPr/>
+        </p:nvSpPr>
+        <p:spPr>
+          <a:xfrm>
+            <a:off x="457200" y="6473952"/>
+            <a:ext cx="7772400" cy="292608"/>
+          </a:xfrm>
+          <a:prstGeom prst="rect">
+            <a:avLst/>
+          </a:prstGeom>
+          <a:noFill/>
+        </p:spPr>
+        <p:txBody>
+          <a:bodyPr wrap="square">
+            <a:spAutoFit/>
+          </a:bodyPr>
+          <a:lstStyle/>
+          <a:p>
+            <a:r>
+              <a:rPr sz="900" b="0" i="0">
+                <a:solidFill>
+                  <a:srgbClr val="595959"/>
+                </a:solidFill>
+                <a:latin typeface="Arial"/>
+              </a:rPr>
+              <a:t>1.7 · What you will need from your minister</a:t>
+            </a:r>
+          </a:p>
+        </p:txBody>
+      </p:sp>
+    </p:spTree>
+  </p:cSld>
+  <p:clrMapOvr>
+    <a:masterClrMapping/>
+  </p:clrMapOvr>
+</p:sld>
+</file>
+
+<file path=ppt/slides/slide57.xml><?xml version="1.0" encoding="utf-8"?>
+<p:sld xmlns:a="http://schemas.openxmlformats.org/drawingml/2006/main" xmlns:p="http://schemas.openxmlformats.org/presentationml/2006/main" xmlns:r="http://schemas.openxmlformats.org/officeDocument/2006/relationships">
+  <p:cSld>
+    <p:spTree>
+      <p:nvGrpSpPr>
+        <p:cNvPr id="1" name=""/>
+        <p:cNvGrpSpPr/>
+        <p:nvPr/>
+      </p:nvGrpSpPr>
+      <p:grpSpPr/>
+      <p:sp>
+        <p:nvSpPr>
+          <p:cNvPr id="2" name="Rectangle 1"/>
+          <p:cNvSpPr/>
+          <p:nvPr/>
+        </p:nvSpPr>
+        <p:spPr>
+          <a:xfrm>
+            <a:off x="457200" y="384048"/>
+            <a:ext cx="45720" cy="256032"/>
+          </a:xfrm>
+          <a:prstGeom prst="rect">
+            <a:avLst/>
+          </a:prstGeom>
+          <a:solidFill>
+            <a:srgbClr val="009CD6"/>
+          </a:solidFill>
+          <a:ln>
+            <a:noFill/>
+          </a:ln>
+          <a:effectLst/>
+        </p:spPr>
+        <p:style>
+          <a:lnRef idx="1">
+            <a:schemeClr val="accent1"/>
+          </a:lnRef>
+          <a:fillRef idx="3">
+            <a:schemeClr val="accent1"/>
+          </a:fillRef>
+          <a:effectRef idx="2">
+            <a:schemeClr val="accent1"/>
+          </a:effectRef>
+          <a:fontRef idx="minor">
+            <a:schemeClr val="lt1"/>
+          </a:fontRef>
+        </p:style>
+        <p:txBody>
+          <a:bodyPr rtlCol="0" anchor="ctr"/>
+          <a:lstStyle/>
+          <a:p>
+            <a:pPr algn="ctr"/>
+          </a:p>
+        </p:txBody>
+      </p:sp>
+      <p:sp>
+        <p:nvSpPr>
+          <p:cNvPr id="3" name="TextBox 2"/>
+          <p:cNvSpPr txBox="1"/>
+          <p:nvPr/>
+        </p:nvSpPr>
+        <p:spPr>
+          <a:xfrm>
+            <a:off x="621792" y="274320"/>
+            <a:ext cx="11247120" cy="914400"/>
+          </a:xfrm>
+          <a:prstGeom prst="rect">
+            <a:avLst/>
+          </a:prstGeom>
+          <a:noFill/>
+        </p:spPr>
+        <p:txBody>
+          <a:bodyPr wrap="square">
+            <a:spAutoFit/>
+          </a:bodyPr>
+          <a:lstStyle/>
+          <a:p>
+            <a:r>
+              <a:rPr sz="2800" b="1" i="0">
+                <a:solidFill>
+                  <a:srgbClr val="1A1A1A"/>
+                </a:solidFill>
+                <a:latin typeface="Arial"/>
+              </a:rPr>
+              <a:t>The same four elements show in all four</a:t>
+            </a:r>
+          </a:p>
+        </p:txBody>
+      </p:sp>
+      <p:sp>
+        <p:nvSpPr>
+          <p:cNvPr id="4" name="TextBox 3"/>
+          <p:cNvSpPr txBox="1"/>
+          <p:nvPr/>
+        </p:nvSpPr>
+        <p:spPr>
+          <a:xfrm>
+            <a:off x="658368" y="1417320"/>
+            <a:ext cx="10984687" cy="1051560"/>
+          </a:xfrm>
+          <a:prstGeom prst="rect">
+            <a:avLst/>
+          </a:prstGeom>
+          <a:noFill/>
+        </p:spPr>
+        <p:txBody>
+          <a:bodyPr wrap="square">
+            <a:spAutoFit/>
+          </a:bodyPr>
+          <a:lstStyle/>
+          <a:p>
+            <a:pPr>
+              <a:spcAft>
+                <a:spcPts val="300"/>
+              </a:spcAft>
+            </a:pPr>
+            <a:r>
+              <a:rPr sz="1900" b="1" i="0">
+                <a:solidFill>
+                  <a:srgbClr val="1A1A1A"/>
+                </a:solidFill>
+                <a:latin typeface="Arial"/>
+              </a:rPr>
+              <a:t>A small central team with real authority</a:t>
+            </a:r>
+          </a:p>
+          <a:p>
+            <a:pPr>
+              <a:spcAft>
+                <a:spcPts val="300"/>
+              </a:spcAft>
+            </a:pPr>
+            <a:r>
+              <a:rPr sz="1500" b="0" i="0">
+                <a:solidFill>
+                  <a:srgbClr val="595959"/>
+                </a:solidFill>
+                <a:latin typeface="Arial"/>
+              </a:rPr>
+              <a:t>Ask 1 — the small permanent EA team. Rwanda coordinates centrally; South Africa does it through SITA.</a:t>
+            </a:r>
+          </a:p>
+        </p:txBody>
+      </p:sp>
+      <p:sp>
+        <p:nvSpPr>
+          <p:cNvPr id="5" name="Rectangle 4"/>
+          <p:cNvSpPr/>
+          <p:nvPr/>
+        </p:nvSpPr>
+        <p:spPr>
+          <a:xfrm>
+            <a:off x="621792" y="2473452"/>
+            <a:ext cx="10881360" cy="12700"/>
+          </a:xfrm>
+          <a:prstGeom prst="rect">
+            <a:avLst/>
+          </a:prstGeom>
+          <a:solidFill>
+            <a:srgbClr val="DDECF4"/>
+          </a:solidFill>
+          <a:ln>
+            <a:noFill/>
+          </a:ln>
+          <a:effectLst/>
+        </p:spPr>
+        <p:style>
+          <a:lnRef idx="1">
+            <a:schemeClr val="accent1"/>
+          </a:lnRef>
+          <a:fillRef idx="3">
+            <a:schemeClr val="accent1"/>
+          </a:fillRef>
+          <a:effectRef idx="2">
+            <a:schemeClr val="accent1"/>
+          </a:effectRef>
+          <a:fontRef idx="minor">
+            <a:schemeClr val="lt1"/>
+          </a:fontRef>
+        </p:style>
+        <p:txBody>
+          <a:bodyPr rtlCol="0" anchor="ctr"/>
+          <a:lstStyle/>
+          <a:p>
+            <a:pPr algn="ctr"/>
+          </a:p>
+        </p:txBody>
+      </p:sp>
+      <p:sp>
+        <p:nvSpPr>
+          <p:cNvPr id="6" name="TextBox 5"/>
+          <p:cNvSpPr txBox="1"/>
+          <p:nvPr/>
+        </p:nvSpPr>
+        <p:spPr>
+          <a:xfrm>
+            <a:off x="658368" y="2514600"/>
+            <a:ext cx="10984687" cy="1051560"/>
+          </a:xfrm>
+          <a:prstGeom prst="rect">
+            <a:avLst/>
+          </a:prstGeom>
+          <a:noFill/>
+        </p:spPr>
+        <p:txBody>
+          <a:bodyPr wrap="square">
+            <a:spAutoFit/>
+          </a:bodyPr>
+          <a:lstStyle/>
+          <a:p>
+            <a:pPr>
+              <a:spcAft>
+                <a:spcPts val="300"/>
+              </a:spcAft>
+            </a:pPr>
+            <a:r>
+              <a:rPr sz="1900" b="1" i="0">
+                <a:solidFill>
+                  <a:srgbClr val="1A1A1A"/>
+                </a:solidFill>
+                <a:latin typeface="Arial"/>
+              </a:rPr>
+              <a:t>Binding governance, not advisory</a:t>
+            </a:r>
+          </a:p>
+          <a:p>
+            <a:pPr>
+              <a:spcAft>
+                <a:spcPts val="300"/>
+              </a:spcAft>
+            </a:pPr>
+            <a:r>
+              <a:rPr sz="1500" b="0" i="0">
+                <a:solidFill>
+                  <a:srgbClr val="595959"/>
+                </a:solidFill>
+                <a:latin typeface="Arial"/>
+              </a:rPr>
+              <a:t>Ask 2 — an EA Board whose decisions hold. Where authority cannot be imposed, it is agreed and then binding.</a:t>
+            </a:r>
+          </a:p>
+        </p:txBody>
+      </p:sp>
+      <p:sp>
+        <p:nvSpPr>
+          <p:cNvPr id="7" name="Rectangle 6"/>
+          <p:cNvSpPr/>
+          <p:nvPr/>
+        </p:nvSpPr>
+        <p:spPr>
+          <a:xfrm>
+            <a:off x="621792" y="3570732"/>
+            <a:ext cx="10881360" cy="12700"/>
+          </a:xfrm>
+          <a:prstGeom prst="rect">
+            <a:avLst/>
+          </a:prstGeom>
+          <a:solidFill>
+            <a:srgbClr val="DDECF4"/>
+          </a:solidFill>
+          <a:ln>
+            <a:noFill/>
+          </a:ln>
+          <a:effectLst/>
+        </p:spPr>
+        <p:style>
+          <a:lnRef idx="1">
+            <a:schemeClr val="accent1"/>
+          </a:lnRef>
+          <a:fillRef idx="3">
+            <a:schemeClr val="accent1"/>
+          </a:fillRef>
+          <a:effectRef idx="2">
+            <a:schemeClr val="accent1"/>
+          </a:effectRef>
+          <a:fontRef idx="minor">
+            <a:schemeClr val="lt1"/>
+          </a:fontRef>
+        </p:style>
+        <p:txBody>
+          <a:bodyPr rtlCol="0" anchor="ctr"/>
+          <a:lstStyle/>
+          <a:p>
+            <a:pPr algn="ctr"/>
+          </a:p>
+        </p:txBody>
+      </p:sp>
+      <p:sp>
+        <p:nvSpPr>
+          <p:cNvPr id="8" name="TextBox 7"/>
+          <p:cNvSpPr txBox="1"/>
+          <p:nvPr/>
+        </p:nvSpPr>
+        <p:spPr>
+          <a:xfrm>
+            <a:off x="658368" y="3611880"/>
+            <a:ext cx="10984687" cy="1051560"/>
+          </a:xfrm>
+          <a:prstGeom prst="rect">
+            <a:avLst/>
+          </a:prstGeom>
+          <a:noFill/>
+        </p:spPr>
+        <p:txBody>
+          <a:bodyPr wrap="square">
+            <a:spAutoFit/>
+          </a:bodyPr>
+          <a:lstStyle/>
+          <a:p>
+            <a:pPr>
+              <a:spcAft>
+                <a:spcPts val="300"/>
+              </a:spcAft>
+            </a:pPr>
+            <a:r>
+              <a:rPr sz="1900" b="1" i="0">
+                <a:solidFill>
+                  <a:srgbClr val="1A1A1A"/>
+                </a:solidFill>
+                <a:latin typeface="Arial"/>
+              </a:rPr>
+              <a:t>A published framework other agencies adopt</a:t>
+            </a:r>
+          </a:p>
+          <a:p>
+            <a:pPr>
+              <a:spcAft>
+                <a:spcPts val="300"/>
+              </a:spcAft>
+            </a:pPr>
+            <a:r>
+              <a:rPr sz="1500" b="0" i="0">
+                <a:solidFill>
+                  <a:srgbClr val="595959"/>
+                </a:solidFill>
+                <a:latin typeface="Arial"/>
+              </a:rPr>
+              <a:t>Ask 3 — the sustained envelope. A framework stays adopted only while someone is funded to maintain it.</a:t>
+            </a:r>
+          </a:p>
+        </p:txBody>
+      </p:sp>
+      <p:sp>
+        <p:nvSpPr>
+          <p:cNvPr id="9" name="Rectangle 8"/>
+          <p:cNvSpPr/>
+          <p:nvPr/>
+        </p:nvSpPr>
+        <p:spPr>
+          <a:xfrm>
+            <a:off x="621792" y="4668012"/>
+            <a:ext cx="10881360" cy="12700"/>
+          </a:xfrm>
+          <a:prstGeom prst="rect">
+            <a:avLst/>
+          </a:prstGeom>
+          <a:solidFill>
+            <a:srgbClr val="DDECF4"/>
+          </a:solidFill>
+          <a:ln>
+            <a:noFill/>
+          </a:ln>
+          <a:effectLst/>
+        </p:spPr>
+        <p:style>
+          <a:lnRef idx="1">
+            <a:schemeClr val="accent1"/>
+          </a:lnRef>
+          <a:fillRef idx="3">
+            <a:schemeClr val="accent1"/>
+          </a:fillRef>
+          <a:effectRef idx="2">
+            <a:schemeClr val="accent1"/>
+          </a:effectRef>
+          <a:fontRef idx="minor">
+            <a:schemeClr val="lt1"/>
+          </a:fontRef>
+        </p:style>
+        <p:txBody>
+          <a:bodyPr rtlCol="0" anchor="ctr"/>
+          <a:lstStyle/>
+          <a:p>
+            <a:pPr algn="ctr"/>
+          </a:p>
+        </p:txBody>
+      </p:sp>
+      <p:sp>
+        <p:nvSpPr>
+          <p:cNvPr id="10" name="TextBox 9"/>
+          <p:cNvSpPr txBox="1"/>
+          <p:nvPr/>
+        </p:nvSpPr>
+        <p:spPr>
+          <a:xfrm>
+            <a:off x="658368" y="4709159"/>
+            <a:ext cx="10984687" cy="1051560"/>
+          </a:xfrm>
+          <a:prstGeom prst="rect">
+            <a:avLst/>
+          </a:prstGeom>
+          <a:noFill/>
+        </p:spPr>
+        <p:txBody>
+          <a:bodyPr wrap="square">
+            <a:spAutoFit/>
+          </a:bodyPr>
+          <a:lstStyle/>
+          <a:p>
+            <a:pPr>
+              <a:spcAft>
+                <a:spcPts val="300"/>
+              </a:spcAft>
+            </a:pPr>
+            <a:r>
+              <a:rPr sz="1900" b="1" i="0">
+                <a:solidFill>
+                  <a:srgbClr val="1A1A1A"/>
+                </a:solidFill>
+                <a:latin typeface="Arial"/>
+              </a:rPr>
+              <a:t>A multi-year horizon, results visible in months</a:t>
+            </a:r>
+          </a:p>
+          <a:p>
+            <a:pPr>
+              <a:spcAft>
+                <a:spcPts val="300"/>
+              </a:spcAft>
+            </a:pPr>
+            <a:r>
+              <a:rPr sz="1500" b="0" i="0">
+                <a:solidFill>
+                  <a:srgbClr val="595959"/>
+                </a:solidFill>
+                <a:latin typeface="Arial"/>
+              </a:rPr>
+              <a:t>Ask 4 — the promise. Estonia took two decades; Rwanda showed results inside months. Both protected the team.</a:t>
+            </a:r>
+          </a:p>
+        </p:txBody>
+      </p:sp>
+      <p:sp>
+        <p:nvSpPr>
+          <p:cNvPr id="11" name="TextBox 10"/>
+          <p:cNvSpPr txBox="1"/>
+          <p:nvPr/>
+        </p:nvSpPr>
+        <p:spPr>
+          <a:xfrm>
+            <a:off x="658368" y="5852160"/>
+            <a:ext cx="10881360" cy="457200"/>
+          </a:xfrm>
+          <a:prstGeom prst="rect">
+            <a:avLst/>
+          </a:prstGeom>
+          <a:noFill/>
+        </p:spPr>
+        <p:txBody>
+          <a:bodyPr wrap="square">
+            <a:spAutoFit/>
+          </a:bodyPr>
+          <a:lstStyle/>
+          <a:p>
+            <a:r>
+              <a:rPr sz="1450" b="0" i="0">
+                <a:solidFill>
+                  <a:srgbClr val="595959"/>
+                </a:solidFill>
+                <a:latin typeface="Arial"/>
+              </a:rPr>
+              <a:t>Different sizes, different constitutions — the same four elements, which are the four asks in four real governments.</a:t>
+            </a:r>
+          </a:p>
+        </p:txBody>
+      </p:sp>
+      <p:sp>
+        <p:nvSpPr>
+          <p:cNvPr id="12" name="TextBox 11"/>
+          <p:cNvSpPr txBox="1"/>
+          <p:nvPr/>
+        </p:nvSpPr>
+        <p:spPr>
+          <a:xfrm>
+            <a:off x="457200" y="6473952"/>
+            <a:ext cx="7772400" cy="292608"/>
+          </a:xfrm>
+          <a:prstGeom prst="rect">
+            <a:avLst/>
+          </a:prstGeom>
+          <a:noFill/>
+        </p:spPr>
+        <p:txBody>
+          <a:bodyPr wrap="square">
+            <a:spAutoFit/>
+          </a:bodyPr>
+          <a:lstStyle/>
+          <a:p>
+            <a:r>
+              <a:rPr sz="900" b="0" i="0">
+                <a:solidFill>
+                  <a:srgbClr val="595959"/>
+                </a:solidFill>
+                <a:latin typeface="Arial"/>
+              </a:rPr>
+              <a:t>1.7 · What you will need from your minister</a:t>
+            </a:r>
+          </a:p>
+        </p:txBody>
+      </p:sp>
+    </p:spTree>
+  </p:cSld>
+  <p:clrMapOvr>
+    <a:masterClrMapping/>
+  </p:clrMapOvr>
+</p:sld>
+</file>
+
+<file path=ppt/slides/slide58.xml><?xml version="1.0" encoding="utf-8"?>
+<p:sld xmlns:a="http://schemas.openxmlformats.org/drawingml/2006/main" xmlns:p="http://schemas.openxmlformats.org/presentationml/2006/main" xmlns:r="http://schemas.openxmlformats.org/officeDocument/2006/relationships">
+  <p:cSld>
+    <p:spTree>
+      <p:nvGrpSpPr>
+        <p:cNvPr id="1" name=""/>
+        <p:cNvGrpSpPr/>
+        <p:nvPr/>
+      </p:nvGrpSpPr>
+      <p:grpSpPr/>
+      <p:sp>
+        <p:nvSpPr>
           <p:cNvPr id="2" name="TextBox 1"/>
           <p:cNvSpPr txBox="1"/>
           <p:nvPr/>
@@ -16062,7 +15384,7 @@
 </p:sld>
 </file>
 
-<file path=ppt/slides/slide52.xml><?xml version="1.0" encoding="utf-8"?>
+<file path=ppt/slides/slide59.xml><?xml version="1.0" encoding="utf-8"?>
 <p:sld xmlns:a="http://schemas.openxmlformats.org/drawingml/2006/main" xmlns:p="http://schemas.openxmlformats.org/presentationml/2006/main" xmlns:r="http://schemas.openxmlformats.org/officeDocument/2006/relationships">
   <p:cSld>
     <p:spTree>

--- a/10-Knowledge-Products/KP1-GEA/videos/module_1/en/decks/KP1_M1_1.7_Deck_v0.2.pptx
+++ b/10-Knowledge-Products/KP1-GEA/videos/module_1/en/decks/KP1_M1_1.7_Deck_v0.2.pptx
@@ -11854,7 +11854,7 @@
                 </a:solidFill>
                 <a:latin typeface="Arial"/>
               </a:rPr>
-              <a:t>KP1 · MODULE 1 · VIDEO 1.7</a:t>
+              <a:t>MODULE 1 · VIDEO 1.7</a:t>
             </a:r>
           </a:p>
         </p:txBody>
